--- a/output/wordlabs-ask-3day.pptx
+++ b/output/wordlabs-ask-3day.pptx
@@ -4279,7 +4279,7 @@
                 <a:ea typeface="Calibri" pitchFamily="34" charset="-122"/>
                 <a:cs typeface="Calibri" pitchFamily="34" charset="-120"/>
               </a:rPr>
-              <a:t>Origin: Latin: ascire</a:t>
+              <a:t>Origin: Latin: ascian</a:t>
             </a:r>
             <a:endParaRPr lang="en-US" sz="1300" dirty="0"/>
           </a:p>
@@ -6040,7 +6040,7 @@
                 <a:ea typeface="Calibri" pitchFamily="34" charset="-122"/>
                 <a:cs typeface="Calibri" pitchFamily="34" charset="-120"/>
               </a:rPr>
-              <a:t>She </a:t>
+              <a:t>She kept </a:t>
             </a:r>
             <a:pPr algn="l" indent="0" marL="0">
               <a:buNone/>
@@ -6057,7 +6057,7 @@
                 <a:ea typeface="Calibri" pitchFamily="34" charset="-122"/>
                 <a:cs typeface="Calibri" pitchFamily="34" charset="-120"/>
               </a:rPr>
-              <a:t>asked</a:t>
+              <a:t>asking</a:t>
             </a:r>
             <a:pPr algn="l" indent="0" marL="0">
               <a:buNone/>
@@ -6071,7 +6071,7 @@
                 <a:ea typeface="Calibri" pitchFamily="34" charset="-122"/>
                 <a:cs typeface="Calibri" pitchFamily="34" charset="-120"/>
               </a:rPr>
-              <a:t> her friend a question, but her friend kept </a:t>
+              <a:t> questions, but the </a:t>
             </a:r>
             <a:pPr algn="l" indent="0" marL="0">
               <a:buNone/>
@@ -6088,7 +6088,7 @@
                 <a:ea typeface="Calibri" pitchFamily="34" charset="-122"/>
                 <a:cs typeface="Calibri" pitchFamily="34" charset="-120"/>
               </a:rPr>
-              <a:t>asking</a:t>
+              <a:t>unasked</a:t>
             </a:r>
             <a:pPr algn="l" indent="0" marL="0">
               <a:buNone/>
@@ -6102,7 +6102,7 @@
                 <a:ea typeface="Calibri" pitchFamily="34" charset="-122"/>
                 <a:cs typeface="Calibri" pitchFamily="34" charset="-120"/>
               </a:rPr>
-              <a:t> for more time to answer.</a:t>
+              <a:t> ones were often the most interesting.</a:t>
             </a:r>
             <a:endParaRPr lang="en-US" sz="1800" dirty="0"/>
           </a:p>
@@ -6257,7 +6257,7 @@
                 <a:ea typeface="Trebuchet MS" pitchFamily="34" charset="-122"/>
                 <a:cs typeface="Trebuchet MS" pitchFamily="34" charset="-120"/>
               </a:rPr>
-              <a:t>asked</a:t>
+              <a:t>asking</a:t>
             </a:r>
             <a:endParaRPr lang="en-US" sz="1400" dirty="0"/>
           </a:p>
@@ -6385,7 +6385,7 @@
                 <a:ea typeface="Trebuchet MS" pitchFamily="34" charset="-122"/>
                 <a:cs typeface="Trebuchet MS" pitchFamily="34" charset="-120"/>
               </a:rPr>
-              <a:t>asking</a:t>
+              <a:t>unasked</a:t>
             </a:r>
             <a:endParaRPr lang="en-US" sz="1400" dirty="0"/>
           </a:p>
@@ -6855,7 +6855,7 @@
                 <a:ea typeface="Trebuchet MS" pitchFamily="34" charset="-122"/>
                 <a:cs typeface="Trebuchet MS" pitchFamily="34" charset="-120"/>
               </a:rPr>
-              <a:t>asked</a:t>
+              <a:t>asking</a:t>
             </a:r>
             <a:endParaRPr lang="en-US" sz="2800" dirty="0"/>
           </a:p>
@@ -7682,7 +7682,7 @@
                 <a:ea typeface="Trebuchet MS" pitchFamily="34" charset="-122"/>
                 <a:cs typeface="Trebuchet MS" pitchFamily="34" charset="-120"/>
               </a:rPr>
-              <a:t>asked</a:t>
+              <a:t>asking</a:t>
             </a:r>
             <a:endParaRPr lang="en-US" sz="2800" dirty="0"/>
           </a:p>
@@ -7933,7 +7933,7 @@
                 <a:ea typeface="Trebuchet MS" pitchFamily="34" charset="-122"/>
                 <a:cs typeface="Trebuchet MS" pitchFamily="34" charset="-120"/>
               </a:rPr>
-              <a:t>ed</a:t>
+              <a:t>ing</a:t>
             </a:r>
             <a:endParaRPr lang="en-US" sz="1300" dirty="0"/>
           </a:p>
@@ -7972,7 +7972,7 @@
                 <a:ea typeface="Calibri" pitchFamily="34" charset="-122"/>
                 <a:cs typeface="Calibri" pitchFamily="34" charset="-120"/>
               </a:rPr>
-              <a:t>past tense</a:t>
+              <a:t>ongoing action</a:t>
             </a:r>
             <a:endParaRPr lang="en-US" sz="850" dirty="0"/>
           </a:p>
@@ -8667,7 +8667,7 @@
                 <a:ea typeface="Trebuchet MS" pitchFamily="34" charset="-122"/>
                 <a:cs typeface="Trebuchet MS" pitchFamily="34" charset="-120"/>
               </a:rPr>
-              <a:t>asked</a:t>
+              <a:t>asking</a:t>
             </a:r>
             <a:endParaRPr lang="en-US" sz="2800" dirty="0"/>
           </a:p>
@@ -8918,7 +8918,7 @@
                 <a:ea typeface="Trebuchet MS" pitchFamily="34" charset="-122"/>
                 <a:cs typeface="Trebuchet MS" pitchFamily="34" charset="-120"/>
               </a:rPr>
-              <a:t>ed</a:t>
+              <a:t>ing</a:t>
             </a:r>
             <a:endParaRPr lang="en-US" sz="1300" dirty="0"/>
           </a:p>
@@ -8957,7 +8957,7 @@
                 <a:ea typeface="Calibri" pitchFamily="34" charset="-122"/>
                 <a:cs typeface="Calibri" pitchFamily="34" charset="-120"/>
               </a:rPr>
-              <a:t>past tense</a:t>
+              <a:t>ongoing action</a:t>
             </a:r>
             <a:endParaRPr lang="en-US" sz="850" dirty="0"/>
           </a:p>
@@ -9064,7 +9064,7 @@
         </p:nvSpPr>
         <p:spPr>
           <a:xfrm>
-            <a:off x="4370832" y="3364992"/>
+            <a:off x="2999232" y="3364992"/>
             <a:ext cx="1645920" cy="475488"/>
           </a:xfrm>
           <a:prstGeom prst="rect">
@@ -9091,7 +9091,7 @@
         </p:nvSpPr>
         <p:spPr>
           <a:xfrm>
-            <a:off x="4370832" y="3364992"/>
+            <a:off x="2999232" y="3364992"/>
             <a:ext cx="1645920" cy="475488"/>
           </a:xfrm>
           <a:prstGeom prst="rect">
@@ -9116,7 +9116,7 @@
                 <a:ea typeface="Trebuchet MS" pitchFamily="34" charset="-122"/>
                 <a:cs typeface="Trebuchet MS" pitchFamily="34" charset="-120"/>
               </a:rPr>
-              <a:t>asked</a:t>
+              <a:t>ask</a:t>
             </a:r>
             <a:endParaRPr lang="en-US" sz="1400" dirty="0"/>
           </a:p>
@@ -9124,7 +9124,112 @@
       </p:sp>
       <p:sp>
         <p:nvSpPr>
-          <p:cNvPr id="27" name="Shape 25"/>
+          <p:cNvPr id="27" name="Text 25"/>
+          <p:cNvSpPr/>
+          <p:nvPr/>
+        </p:nvSpPr>
+        <p:spPr>
+          <a:xfrm>
+            <a:off x="4645152" y="3364992"/>
+            <a:ext cx="1097280" cy="475488"/>
+          </a:xfrm>
+          <a:prstGeom prst="rect">
+            <a:avLst/>
+          </a:prstGeom>
+          <a:noFill/>
+          <a:ln/>
+        </p:spPr>
+        <p:txBody>
+          <a:bodyPr wrap="square" lIns="0" tIns="0" rIns="0" bIns="0" rtlCol="0" anchor="ctr"/>
+          <a:lstStyle/>
+          <a:p>
+            <a:pPr algn="ctr" indent="0" marL="0">
+              <a:buNone/>
+            </a:pPr>
+            <a:r>
+              <a:rPr lang="en-US" sz="1600" b="1" dirty="0">
+                <a:solidFill>
+                  <a:srgbClr val="0D9488"/>
+                </a:solidFill>
+                <a:latin typeface="Trebuchet MS" pitchFamily="34" charset="0"/>
+                <a:ea typeface="Trebuchet MS" pitchFamily="34" charset="-122"/>
+                <a:cs typeface="Trebuchet MS" pitchFamily="34" charset="-120"/>
+              </a:rPr>
+              <a:t>·</a:t>
+            </a:r>
+            <a:endParaRPr lang="en-US" sz="1600" dirty="0"/>
+          </a:p>
+        </p:txBody>
+      </p:sp>
+      <p:sp>
+        <p:nvSpPr>
+          <p:cNvPr id="28" name="Shape 26"/>
+          <p:cNvSpPr/>
+          <p:nvPr/>
+        </p:nvSpPr>
+        <p:spPr>
+          <a:xfrm>
+            <a:off x="5742432" y="3364992"/>
+            <a:ext cx="1645920" cy="475488"/>
+          </a:xfrm>
+          <a:prstGeom prst="rect">
+            <a:avLst>
+              <a:gd name="adj" fmla="val 9615"/>
+            </a:avLst>
+          </a:prstGeom>
+          <a:solidFill>
+            <a:srgbClr val="FFFFFF"/>
+          </a:solidFill>
+          <a:ln w="12700">
+            <a:solidFill>
+              <a:srgbClr val="0D9488"/>
+            </a:solidFill>
+            <a:prstDash val="solid"/>
+          </a:ln>
+        </p:spPr>
+      </p:sp>
+      <p:sp>
+        <p:nvSpPr>
+          <p:cNvPr id="29" name="Text 27"/>
+          <p:cNvSpPr/>
+          <p:nvPr/>
+        </p:nvSpPr>
+        <p:spPr>
+          <a:xfrm>
+            <a:off x="5742432" y="3364992"/>
+            <a:ext cx="1645920" cy="475488"/>
+          </a:xfrm>
+          <a:prstGeom prst="rect">
+            <a:avLst/>
+          </a:prstGeom>
+          <a:noFill/>
+          <a:ln/>
+        </p:spPr>
+        <p:txBody>
+          <a:bodyPr wrap="square" lIns="0" tIns="0" rIns="0" bIns="0" rtlCol="0" anchor="ctr"/>
+          <a:lstStyle/>
+          <a:p>
+            <a:pPr algn="ctr" indent="0" marL="0">
+              <a:buNone/>
+            </a:pPr>
+            <a:r>
+              <a:rPr lang="en-US" sz="1400" b="1" dirty="0">
+                <a:solidFill>
+                  <a:srgbClr val="0D9488"/>
+                </a:solidFill>
+                <a:latin typeface="Trebuchet MS" pitchFamily="34" charset="0"/>
+                <a:ea typeface="Trebuchet MS" pitchFamily="34" charset="-122"/>
+                <a:cs typeface="Trebuchet MS" pitchFamily="34" charset="-120"/>
+              </a:rPr>
+              <a:t>ing</a:t>
+            </a:r>
+            <a:endParaRPr lang="en-US" sz="1400" dirty="0"/>
+          </a:p>
+        </p:txBody>
+      </p:sp>
+      <p:sp>
+        <p:nvSpPr>
+          <p:cNvPr id="30" name="Shape 28"/>
           <p:cNvSpPr/>
           <p:nvPr/>
         </p:nvSpPr>
@@ -9151,7 +9256,7 @@
       </p:sp>
       <p:sp>
         <p:nvSpPr>
-          <p:cNvPr id="28" name="Text 26"/>
+          <p:cNvPr id="31" name="Text 29"/>
           <p:cNvSpPr/>
           <p:nvPr/>
         </p:nvSpPr>
@@ -9190,7 +9295,7 @@
       </p:sp>
       <p:sp>
         <p:nvSpPr>
-          <p:cNvPr id="29" name="Shape 27"/>
+          <p:cNvPr id="32" name="Shape 30"/>
           <p:cNvSpPr/>
           <p:nvPr/>
         </p:nvSpPr>
@@ -9217,7 +9322,7 @@
       </p:sp>
       <p:sp>
         <p:nvSpPr>
-          <p:cNvPr id="30" name="Text 28"/>
+          <p:cNvPr id="33" name="Text 31"/>
           <p:cNvSpPr/>
           <p:nvPr/>
         </p:nvSpPr>
@@ -9679,7 +9784,7 @@
                 <a:ea typeface="Trebuchet MS" pitchFamily="34" charset="-122"/>
                 <a:cs typeface="Trebuchet MS" pitchFamily="34" charset="-120"/>
               </a:rPr>
-              <a:t>asked</a:t>
+              <a:t>asking</a:t>
             </a:r>
             <a:endParaRPr lang="en-US" sz="2800" dirty="0"/>
           </a:p>
@@ -9930,7 +10035,7 @@
                 <a:ea typeface="Trebuchet MS" pitchFamily="34" charset="-122"/>
                 <a:cs typeface="Trebuchet MS" pitchFamily="34" charset="-120"/>
               </a:rPr>
-              <a:t>ed</a:t>
+              <a:t>ing</a:t>
             </a:r>
             <a:endParaRPr lang="en-US" sz="1300" dirty="0"/>
           </a:p>
@@ -9969,7 +10074,7 @@
                 <a:ea typeface="Calibri" pitchFamily="34" charset="-122"/>
                 <a:cs typeface="Calibri" pitchFamily="34" charset="-120"/>
               </a:rPr>
-              <a:t>past tense</a:t>
+              <a:t>ongoing action</a:t>
             </a:r>
             <a:endParaRPr lang="en-US" sz="850" dirty="0"/>
           </a:p>
@@ -10076,7 +10181,7 @@
         </p:nvSpPr>
         <p:spPr>
           <a:xfrm>
-            <a:off x="4370832" y="3364992"/>
+            <a:off x="2999232" y="3364992"/>
             <a:ext cx="1645920" cy="475488"/>
           </a:xfrm>
           <a:prstGeom prst="rect">
@@ -10103,7 +10208,7 @@
         </p:nvSpPr>
         <p:spPr>
           <a:xfrm>
-            <a:off x="4370832" y="3364992"/>
+            <a:off x="2999232" y="3364992"/>
             <a:ext cx="1645920" cy="475488"/>
           </a:xfrm>
           <a:prstGeom prst="rect">
@@ -10128,7 +10233,7 @@
                 <a:ea typeface="Trebuchet MS" pitchFamily="34" charset="-122"/>
                 <a:cs typeface="Trebuchet MS" pitchFamily="34" charset="-120"/>
               </a:rPr>
-              <a:t>asked</a:t>
+              <a:t>ask</a:t>
             </a:r>
             <a:endParaRPr lang="en-US" sz="1400" dirty="0"/>
           </a:p>
@@ -10136,7 +10241,112 @@
       </p:sp>
       <p:sp>
         <p:nvSpPr>
-          <p:cNvPr id="27" name="Shape 25"/>
+          <p:cNvPr id="27" name="Text 25"/>
+          <p:cNvSpPr/>
+          <p:nvPr/>
+        </p:nvSpPr>
+        <p:spPr>
+          <a:xfrm>
+            <a:off x="4645152" y="3364992"/>
+            <a:ext cx="1097280" cy="475488"/>
+          </a:xfrm>
+          <a:prstGeom prst="rect">
+            <a:avLst/>
+          </a:prstGeom>
+          <a:noFill/>
+          <a:ln/>
+        </p:spPr>
+        <p:txBody>
+          <a:bodyPr wrap="square" lIns="0" tIns="0" rIns="0" bIns="0" rtlCol="0" anchor="ctr"/>
+          <a:lstStyle/>
+          <a:p>
+            <a:pPr algn="ctr" indent="0" marL="0">
+              <a:buNone/>
+            </a:pPr>
+            <a:r>
+              <a:rPr lang="en-US" sz="1600" b="1" dirty="0">
+                <a:solidFill>
+                  <a:srgbClr val="0D9488"/>
+                </a:solidFill>
+                <a:latin typeface="Trebuchet MS" pitchFamily="34" charset="0"/>
+                <a:ea typeface="Trebuchet MS" pitchFamily="34" charset="-122"/>
+                <a:cs typeface="Trebuchet MS" pitchFamily="34" charset="-120"/>
+              </a:rPr>
+              <a:t>·</a:t>
+            </a:r>
+            <a:endParaRPr lang="en-US" sz="1600" dirty="0"/>
+          </a:p>
+        </p:txBody>
+      </p:sp>
+      <p:sp>
+        <p:nvSpPr>
+          <p:cNvPr id="28" name="Shape 26"/>
+          <p:cNvSpPr/>
+          <p:nvPr/>
+        </p:nvSpPr>
+        <p:spPr>
+          <a:xfrm>
+            <a:off x="5742432" y="3364992"/>
+            <a:ext cx="1645920" cy="475488"/>
+          </a:xfrm>
+          <a:prstGeom prst="rect">
+            <a:avLst>
+              <a:gd name="adj" fmla="val 9615"/>
+            </a:avLst>
+          </a:prstGeom>
+          <a:solidFill>
+            <a:srgbClr val="FFFFFF"/>
+          </a:solidFill>
+          <a:ln w="12700">
+            <a:solidFill>
+              <a:srgbClr val="0D9488"/>
+            </a:solidFill>
+            <a:prstDash val="solid"/>
+          </a:ln>
+        </p:spPr>
+      </p:sp>
+      <p:sp>
+        <p:nvSpPr>
+          <p:cNvPr id="29" name="Text 27"/>
+          <p:cNvSpPr/>
+          <p:nvPr/>
+        </p:nvSpPr>
+        <p:spPr>
+          <a:xfrm>
+            <a:off x="5742432" y="3364992"/>
+            <a:ext cx="1645920" cy="475488"/>
+          </a:xfrm>
+          <a:prstGeom prst="rect">
+            <a:avLst/>
+          </a:prstGeom>
+          <a:noFill/>
+          <a:ln/>
+        </p:spPr>
+        <p:txBody>
+          <a:bodyPr wrap="square" lIns="0" tIns="0" rIns="0" bIns="0" rtlCol="0" anchor="ctr"/>
+          <a:lstStyle/>
+          <a:p>
+            <a:pPr algn="ctr" indent="0" marL="0">
+              <a:buNone/>
+            </a:pPr>
+            <a:r>
+              <a:rPr lang="en-US" sz="1400" b="1" dirty="0">
+                <a:solidFill>
+                  <a:srgbClr val="0D9488"/>
+                </a:solidFill>
+                <a:latin typeface="Trebuchet MS" pitchFamily="34" charset="0"/>
+                <a:ea typeface="Trebuchet MS" pitchFamily="34" charset="-122"/>
+                <a:cs typeface="Trebuchet MS" pitchFamily="34" charset="-120"/>
+              </a:rPr>
+              <a:t>ing</a:t>
+            </a:r>
+            <a:endParaRPr lang="en-US" sz="1400" dirty="0"/>
+          </a:p>
+        </p:txBody>
+      </p:sp>
+      <p:sp>
+        <p:nvSpPr>
+          <p:cNvPr id="30" name="Shape 28"/>
           <p:cNvSpPr/>
           <p:nvPr/>
         </p:nvSpPr>
@@ -10163,7 +10373,7 @@
       </p:sp>
       <p:sp>
         <p:nvSpPr>
-          <p:cNvPr id="28" name="Text 26"/>
+          <p:cNvPr id="31" name="Text 29"/>
           <p:cNvSpPr/>
           <p:nvPr/>
         </p:nvSpPr>
@@ -10202,18 +10412,18 @@
       </p:sp>
       <p:sp>
         <p:nvSpPr>
-          <p:cNvPr id="29" name="Shape 27"/>
+          <p:cNvPr id="32" name="Shape 30"/>
           <p:cNvSpPr/>
           <p:nvPr/>
         </p:nvSpPr>
         <p:spPr>
           <a:xfrm>
             <a:off x="1874520" y="4096512"/>
-            <a:ext cx="6903720" cy="804672"/>
+            <a:ext cx="6903720" cy="658368"/>
           </a:xfrm>
           <a:prstGeom prst="rect">
             <a:avLst>
-              <a:gd name="adj" fmla="val 6818"/>
+              <a:gd name="adj" fmla="val 8333"/>
             </a:avLst>
           </a:prstGeom>
           <a:solidFill>
@@ -10229,18 +10439,18 @@
       </p:sp>
       <p:sp>
         <p:nvSpPr>
-          <p:cNvPr id="30" name="Shape 28"/>
-          <p:cNvSpPr/>
-          <p:nvPr/>
-        </p:nvSpPr>
-        <p:spPr>
-          <a:xfrm>
-            <a:off x="3033522" y="4169664"/>
-            <a:ext cx="685800" cy="384048"/>
+          <p:cNvPr id="33" name="Shape 31"/>
+          <p:cNvSpPr/>
+          <p:nvPr/>
+        </p:nvSpPr>
+        <p:spPr>
+          <a:xfrm>
+            <a:off x="2427732" y="4169664"/>
+            <a:ext cx="685800" cy="475488"/>
           </a:xfrm>
           <a:prstGeom prst="rect">
             <a:avLst>
-              <a:gd name="adj" fmla="val 9524"/>
+              <a:gd name="adj" fmla="val 7692"/>
             </a:avLst>
           </a:prstGeom>
           <a:solidFill>
@@ -10256,14 +10466,14 @@
       </p:sp>
       <p:sp>
         <p:nvSpPr>
-          <p:cNvPr id="31" name="Text 29"/>
-          <p:cNvSpPr/>
-          <p:nvPr/>
-        </p:nvSpPr>
-        <p:spPr>
-          <a:xfrm>
-            <a:off x="3033522" y="4169664"/>
-            <a:ext cx="685800" cy="384048"/>
+          <p:cNvPr id="34" name="Text 32"/>
+          <p:cNvSpPr/>
+          <p:nvPr/>
+        </p:nvSpPr>
+        <p:spPr>
+          <a:xfrm>
+            <a:off x="2427732" y="4169664"/>
+            <a:ext cx="685800" cy="475488"/>
           </a:xfrm>
           <a:prstGeom prst="rect">
             <a:avLst/>
@@ -10279,7 +10489,7 @@
               <a:buNone/>
             </a:pPr>
             <a:r>
-              <a:rPr lang="en-US" sz="1000" b="1" dirty="0">
+              <a:rPr lang="en-US" sz="900" b="1" dirty="0">
                 <a:solidFill>
                   <a:srgbClr val="9D174D"/>
                 </a:solidFill>
@@ -10289,24 +10499,24 @@
               </a:rPr>
               <a:t>a</a:t>
             </a:r>
-            <a:endParaRPr lang="en-US" sz="1000" dirty="0"/>
-          </a:p>
-        </p:txBody>
-      </p:sp>
-      <p:sp>
-        <p:nvSpPr>
-          <p:cNvPr id="32" name="Shape 30"/>
-          <p:cNvSpPr/>
-          <p:nvPr/>
-        </p:nvSpPr>
-        <p:spPr>
-          <a:xfrm>
-            <a:off x="4850892" y="4169664"/>
-            <a:ext cx="685800" cy="384048"/>
+            <a:endParaRPr lang="en-US" sz="900" dirty="0"/>
+          </a:p>
+        </p:txBody>
+      </p:sp>
+      <p:sp>
+        <p:nvSpPr>
+          <p:cNvPr id="35" name="Shape 33"/>
+          <p:cNvSpPr/>
+          <p:nvPr/>
+        </p:nvSpPr>
+        <p:spPr>
+          <a:xfrm>
+            <a:off x="3639312" y="4169664"/>
+            <a:ext cx="685800" cy="475488"/>
           </a:xfrm>
           <a:prstGeom prst="rect">
             <a:avLst>
-              <a:gd name="adj" fmla="val 9524"/>
+              <a:gd name="adj" fmla="val 7692"/>
             </a:avLst>
           </a:prstGeom>
           <a:solidFill>
@@ -10322,14 +10532,14 @@
       </p:sp>
       <p:sp>
         <p:nvSpPr>
-          <p:cNvPr id="33" name="Text 31"/>
-          <p:cNvSpPr/>
-          <p:nvPr/>
-        </p:nvSpPr>
-        <p:spPr>
-          <a:xfrm>
-            <a:off x="4850892" y="4169664"/>
-            <a:ext cx="685800" cy="384048"/>
+          <p:cNvPr id="36" name="Text 34"/>
+          <p:cNvSpPr/>
+          <p:nvPr/>
+        </p:nvSpPr>
+        <p:spPr>
+          <a:xfrm>
+            <a:off x="3639312" y="4169664"/>
+            <a:ext cx="685800" cy="475488"/>
           </a:xfrm>
           <a:prstGeom prst="rect">
             <a:avLst/>
@@ -10345,7 +10555,7 @@
               <a:buNone/>
             </a:pPr>
             <a:r>
-              <a:rPr lang="en-US" sz="1000" b="1" dirty="0">
+              <a:rPr lang="en-US" sz="900" b="1" dirty="0">
                 <a:solidFill>
                   <a:srgbClr val="9D174D"/>
                 </a:solidFill>
@@ -10353,26 +10563,26 @@
                 <a:ea typeface="Trebuchet MS" pitchFamily="34" charset="-122"/>
                 <a:cs typeface="Trebuchet MS" pitchFamily="34" charset="-120"/>
               </a:rPr>
-              <a:t>sk</a:t>
-            </a:r>
-            <a:endParaRPr lang="en-US" sz="1000" dirty="0"/>
-          </a:p>
-        </p:txBody>
-      </p:sp>
-      <p:sp>
-        <p:nvSpPr>
-          <p:cNvPr id="34" name="Shape 32"/>
-          <p:cNvSpPr/>
-          <p:nvPr/>
-        </p:nvSpPr>
-        <p:spPr>
-          <a:xfrm>
-            <a:off x="6668262" y="4169664"/>
-            <a:ext cx="685800" cy="384048"/>
+              <a:t>s</a:t>
+            </a:r>
+            <a:endParaRPr lang="en-US" sz="900" dirty="0"/>
+          </a:p>
+        </p:txBody>
+      </p:sp>
+      <p:sp>
+        <p:nvSpPr>
+          <p:cNvPr id="37" name="Shape 35"/>
+          <p:cNvSpPr/>
+          <p:nvPr/>
+        </p:nvSpPr>
+        <p:spPr>
+          <a:xfrm>
+            <a:off x="4850892" y="4169664"/>
+            <a:ext cx="685800" cy="475488"/>
           </a:xfrm>
           <a:prstGeom prst="rect">
             <a:avLst>
-              <a:gd name="adj" fmla="val 9524"/>
+              <a:gd name="adj" fmla="val 7692"/>
             </a:avLst>
           </a:prstGeom>
           <a:solidFill>
@@ -10388,14 +10598,14 @@
       </p:sp>
       <p:sp>
         <p:nvSpPr>
-          <p:cNvPr id="35" name="Text 33"/>
-          <p:cNvSpPr/>
-          <p:nvPr/>
-        </p:nvSpPr>
-        <p:spPr>
-          <a:xfrm>
-            <a:off x="6668262" y="4169664"/>
-            <a:ext cx="685800" cy="384048"/>
+          <p:cNvPr id="38" name="Text 36"/>
+          <p:cNvSpPr/>
+          <p:nvPr/>
+        </p:nvSpPr>
+        <p:spPr>
+          <a:xfrm>
+            <a:off x="4850892" y="4169664"/>
+            <a:ext cx="685800" cy="475488"/>
           </a:xfrm>
           <a:prstGeom prst="rect">
             <a:avLst/>
@@ -10411,7 +10621,7 @@
               <a:buNone/>
             </a:pPr>
             <a:r>
-              <a:rPr lang="en-US" sz="1000" b="1" dirty="0">
+              <a:rPr lang="en-US" sz="900" b="1" dirty="0">
                 <a:solidFill>
                   <a:srgbClr val="9D174D"/>
                 </a:solidFill>
@@ -10419,48 +10629,141 @@
                 <a:ea typeface="Trebuchet MS" pitchFamily="34" charset="-122"/>
                 <a:cs typeface="Trebuchet MS" pitchFamily="34" charset="-120"/>
               </a:rPr>
-              <a:t>ed</a:t>
-            </a:r>
-            <a:endParaRPr lang="en-US" sz="1000" dirty="0"/>
-          </a:p>
-        </p:txBody>
-      </p:sp>
-      <p:sp>
-        <p:nvSpPr>
-          <p:cNvPr id="36" name="Text 34"/>
-          <p:cNvSpPr/>
-          <p:nvPr/>
-        </p:nvSpPr>
-        <p:spPr>
-          <a:xfrm>
-            <a:off x="6668262" y="4572000"/>
-            <a:ext cx="685800" cy="219456"/>
-          </a:xfrm>
-          <a:prstGeom prst="rect">
-            <a:avLst/>
-          </a:prstGeom>
-          <a:noFill/>
-          <a:ln/>
-        </p:spPr>
-        <p:txBody>
-          <a:bodyPr wrap="square" lIns="0" tIns="0" rIns="0" bIns="0" rtlCol="0" anchor="t"/>
-          <a:lstStyle/>
-          <a:p>
-            <a:pPr algn="ctr" indent="0" marL="0">
-              <a:buNone/>
-            </a:pPr>
-            <a:r>
-              <a:rPr lang="en-US" sz="750" i="1" dirty="0">
-                <a:solidFill>
-                  <a:srgbClr val="94A3B8"/>
-                </a:solidFill>
-                <a:latin typeface="Calibri" pitchFamily="34" charset="0"/>
-                <a:ea typeface="Calibri" pitchFamily="34" charset="-122"/>
-                <a:cs typeface="Calibri" pitchFamily="34" charset="-120"/>
-              </a:rPr>
-              <a:t>/t/</a:t>
-            </a:r>
-            <a:endParaRPr lang="en-US" sz="750" dirty="0"/>
+              <a:t>k</a:t>
+            </a:r>
+            <a:endParaRPr lang="en-US" sz="900" dirty="0"/>
+          </a:p>
+        </p:txBody>
+      </p:sp>
+      <p:sp>
+        <p:nvSpPr>
+          <p:cNvPr id="39" name="Shape 37"/>
+          <p:cNvSpPr/>
+          <p:nvPr/>
+        </p:nvSpPr>
+        <p:spPr>
+          <a:xfrm>
+            <a:off x="6062472" y="4169664"/>
+            <a:ext cx="685800" cy="475488"/>
+          </a:xfrm>
+          <a:prstGeom prst="rect">
+            <a:avLst>
+              <a:gd name="adj" fmla="val 7692"/>
+            </a:avLst>
+          </a:prstGeom>
+          <a:solidFill>
+            <a:srgbClr val="FFFFFF"/>
+          </a:solidFill>
+          <a:ln w="12700">
+            <a:solidFill>
+              <a:srgbClr val="DB2777"/>
+            </a:solidFill>
+            <a:prstDash val="solid"/>
+          </a:ln>
+        </p:spPr>
+      </p:sp>
+      <p:sp>
+        <p:nvSpPr>
+          <p:cNvPr id="40" name="Text 38"/>
+          <p:cNvSpPr/>
+          <p:nvPr/>
+        </p:nvSpPr>
+        <p:spPr>
+          <a:xfrm>
+            <a:off x="6062472" y="4169664"/>
+            <a:ext cx="685800" cy="475488"/>
+          </a:xfrm>
+          <a:prstGeom prst="rect">
+            <a:avLst/>
+          </a:prstGeom>
+          <a:noFill/>
+          <a:ln/>
+        </p:spPr>
+        <p:txBody>
+          <a:bodyPr wrap="square" lIns="0" tIns="0" rIns="0" bIns="0" rtlCol="0" anchor="ctr"/>
+          <a:lstStyle/>
+          <a:p>
+            <a:pPr algn="ctr" indent="0" marL="0">
+              <a:buNone/>
+            </a:pPr>
+            <a:r>
+              <a:rPr lang="en-US" sz="900" b="1" dirty="0">
+                <a:solidFill>
+                  <a:srgbClr val="9D174D"/>
+                </a:solidFill>
+                <a:latin typeface="Trebuchet MS" pitchFamily="34" charset="0"/>
+                <a:ea typeface="Trebuchet MS" pitchFamily="34" charset="-122"/>
+                <a:cs typeface="Trebuchet MS" pitchFamily="34" charset="-120"/>
+              </a:rPr>
+              <a:t>i</a:t>
+            </a:r>
+            <a:endParaRPr lang="en-US" sz="900" dirty="0"/>
+          </a:p>
+        </p:txBody>
+      </p:sp>
+      <p:sp>
+        <p:nvSpPr>
+          <p:cNvPr id="41" name="Shape 39"/>
+          <p:cNvSpPr/>
+          <p:nvPr/>
+        </p:nvSpPr>
+        <p:spPr>
+          <a:xfrm>
+            <a:off x="7274052" y="4169664"/>
+            <a:ext cx="685800" cy="475488"/>
+          </a:xfrm>
+          <a:prstGeom prst="rect">
+            <a:avLst>
+              <a:gd name="adj" fmla="val 7692"/>
+            </a:avLst>
+          </a:prstGeom>
+          <a:solidFill>
+            <a:srgbClr val="FFFFFF"/>
+          </a:solidFill>
+          <a:ln w="12700">
+            <a:solidFill>
+              <a:srgbClr val="DB2777"/>
+            </a:solidFill>
+            <a:prstDash val="solid"/>
+          </a:ln>
+        </p:spPr>
+      </p:sp>
+      <p:sp>
+        <p:nvSpPr>
+          <p:cNvPr id="42" name="Text 40"/>
+          <p:cNvSpPr/>
+          <p:nvPr/>
+        </p:nvSpPr>
+        <p:spPr>
+          <a:xfrm>
+            <a:off x="7274052" y="4169664"/>
+            <a:ext cx="685800" cy="475488"/>
+          </a:xfrm>
+          <a:prstGeom prst="rect">
+            <a:avLst/>
+          </a:prstGeom>
+          <a:noFill/>
+          <a:ln/>
+        </p:spPr>
+        <p:txBody>
+          <a:bodyPr wrap="square" lIns="0" tIns="0" rIns="0" bIns="0" rtlCol="0" anchor="ctr"/>
+          <a:lstStyle/>
+          <a:p>
+            <a:pPr algn="ctr" indent="0" marL="0">
+              <a:buNone/>
+            </a:pPr>
+            <a:r>
+              <a:rPr lang="en-US" sz="900" b="1" dirty="0">
+                <a:solidFill>
+                  <a:srgbClr val="9D174D"/>
+                </a:solidFill>
+                <a:latin typeface="Trebuchet MS" pitchFamily="34" charset="0"/>
+                <a:ea typeface="Trebuchet MS" pitchFamily="34" charset="-122"/>
+                <a:cs typeface="Trebuchet MS" pitchFamily="34" charset="-120"/>
+              </a:rPr>
+              <a:t>ng</a:t>
+            </a:r>
+            <a:endParaRPr lang="en-US" sz="900" dirty="0"/>
           </a:p>
         </p:txBody>
       </p:sp>
@@ -10889,7 +11192,7 @@
                 <a:ea typeface="Trebuchet MS" pitchFamily="34" charset="-122"/>
                 <a:cs typeface="Trebuchet MS" pitchFamily="34" charset="-120"/>
               </a:rPr>
-              <a:t>asking</a:t>
+              <a:t>unasked</a:t>
             </a:r>
             <a:endParaRPr lang="en-US" sz="2800" dirty="0"/>
           </a:p>
@@ -11716,7 +12019,7 @@
                 <a:ea typeface="Trebuchet MS" pitchFamily="34" charset="-122"/>
                 <a:cs typeface="Trebuchet MS" pitchFamily="34" charset="-120"/>
               </a:rPr>
-              <a:t>asking</a:t>
+              <a:t>unasked</a:t>
             </a:r>
             <a:endParaRPr lang="en-US" sz="2800" dirty="0"/>
           </a:p>
@@ -11796,7 +12099,7 @@
         </p:nvSpPr>
         <p:spPr>
           <a:xfrm>
-            <a:off x="2938272" y="2258568"/>
+            <a:off x="2221992" y="2258568"/>
             <a:ext cx="1828800" cy="292608"/>
           </a:xfrm>
           <a:prstGeom prst="rect">
@@ -11805,11 +12108,11 @@
             </a:avLst>
           </a:prstGeom>
           <a:solidFill>
-            <a:srgbClr val="CCFBF1"/>
+            <a:srgbClr val="DDD6FE"/>
           </a:solidFill>
           <a:ln w="19050">
             <a:solidFill>
-              <a:srgbClr val="0D9488"/>
+              <a:srgbClr val="7C3AED"/>
             </a:solidFill>
             <a:prstDash val="solid"/>
           </a:ln>
@@ -11830,7 +12133,7 @@
         </p:nvSpPr>
         <p:spPr>
           <a:xfrm>
-            <a:off x="2938272" y="2258568"/>
+            <a:off x="2221992" y="2258568"/>
             <a:ext cx="1828800" cy="292608"/>
           </a:xfrm>
           <a:prstGeom prst="rect">
@@ -11849,13 +12152,13 @@
             <a:r>
               <a:rPr lang="en-US" sz="1300" b="1" dirty="0">
                 <a:solidFill>
-                  <a:srgbClr val="0F766E"/>
+                  <a:srgbClr val="4C1D95"/>
                 </a:solidFill>
                 <a:latin typeface="Trebuchet MS" pitchFamily="34" charset="0"/>
                 <a:ea typeface="Trebuchet MS" pitchFamily="34" charset="-122"/>
                 <a:cs typeface="Trebuchet MS" pitchFamily="34" charset="-120"/>
               </a:rPr>
-              <a:t>ask</a:t>
+              <a:t>un</a:t>
             </a:r>
             <a:endParaRPr lang="en-US" sz="1300" dirty="0"/>
           </a:p>
@@ -11869,7 +12172,7 @@
         </p:nvSpPr>
         <p:spPr>
           <a:xfrm>
-            <a:off x="2938272" y="2569464"/>
+            <a:off x="2221992" y="2569464"/>
             <a:ext cx="1828800" cy="201168"/>
           </a:xfrm>
           <a:prstGeom prst="rect">
@@ -11894,7 +12197,7 @@
                 <a:ea typeface="Calibri" pitchFamily="34" charset="-122"/>
                 <a:cs typeface="Calibri" pitchFamily="34" charset="-120"/>
               </a:rPr>
-              <a:t>to request or inquire</a:t>
+              <a:t>not</a:t>
             </a:r>
             <a:endParaRPr lang="en-US" sz="850" dirty="0"/>
           </a:p>
@@ -11908,7 +12211,7 @@
         </p:nvSpPr>
         <p:spPr>
           <a:xfrm>
-            <a:off x="5803392" y="2258568"/>
+            <a:off x="4370832" y="2258568"/>
             <a:ext cx="1828800" cy="292608"/>
           </a:xfrm>
           <a:prstGeom prst="rect">
@@ -11917,11 +12220,11 @@
             </a:avLst>
           </a:prstGeom>
           <a:solidFill>
-            <a:srgbClr val="FCE7F3"/>
+            <a:srgbClr val="CCFBF1"/>
           </a:solidFill>
           <a:ln w="19050">
             <a:solidFill>
-              <a:srgbClr val="DB2777"/>
+              <a:srgbClr val="0D9488"/>
             </a:solidFill>
             <a:prstDash val="solid"/>
           </a:ln>
@@ -11942,7 +12245,7 @@
         </p:nvSpPr>
         <p:spPr>
           <a:xfrm>
-            <a:off x="5803392" y="2258568"/>
+            <a:off x="4370832" y="2258568"/>
             <a:ext cx="1828800" cy="292608"/>
           </a:xfrm>
           <a:prstGeom prst="rect">
@@ -11961,13 +12264,13 @@
             <a:r>
               <a:rPr lang="en-US" sz="1300" b="1" dirty="0">
                 <a:solidFill>
-                  <a:srgbClr val="9D174D"/>
+                  <a:srgbClr val="0F766E"/>
                 </a:solidFill>
                 <a:latin typeface="Trebuchet MS" pitchFamily="34" charset="0"/>
                 <a:ea typeface="Trebuchet MS" pitchFamily="34" charset="-122"/>
                 <a:cs typeface="Trebuchet MS" pitchFamily="34" charset="-120"/>
               </a:rPr>
-              <a:t>ing</a:t>
+              <a:t>ask</a:t>
             </a:r>
             <a:endParaRPr lang="en-US" sz="1300" dirty="0"/>
           </a:p>
@@ -11981,7 +12284,7 @@
         </p:nvSpPr>
         <p:spPr>
           <a:xfrm>
-            <a:off x="5803392" y="2569464"/>
+            <a:off x="4370832" y="2569464"/>
             <a:ext cx="1828800" cy="201168"/>
           </a:xfrm>
           <a:prstGeom prst="rect">
@@ -12006,7 +12309,7 @@
                 <a:ea typeface="Calibri" pitchFamily="34" charset="-122"/>
                 <a:cs typeface="Calibri" pitchFamily="34" charset="-120"/>
               </a:rPr>
-              <a:t>ongoing action</a:t>
+              <a:t>to request or inquire</a:t>
             </a:r>
             <a:endParaRPr lang="en-US" sz="850" dirty="0"/>
           </a:p>
@@ -12015,6 +12318,118 @@
       <p:sp>
         <p:nvSpPr>
           <p:cNvPr id="22" name="Shape 20"/>
+          <p:cNvSpPr/>
+          <p:nvPr/>
+        </p:nvSpPr>
+        <p:spPr>
+          <a:xfrm>
+            <a:off x="6519672" y="2258568"/>
+            <a:ext cx="1828800" cy="292608"/>
+          </a:xfrm>
+          <a:prstGeom prst="rect">
+            <a:avLst>
+              <a:gd name="adj" fmla="val 25000"/>
+            </a:avLst>
+          </a:prstGeom>
+          <a:solidFill>
+            <a:srgbClr val="FCE7F3"/>
+          </a:solidFill>
+          <a:ln w="19050">
+            <a:solidFill>
+              <a:srgbClr val="DB2777"/>
+            </a:solidFill>
+            <a:prstDash val="solid"/>
+          </a:ln>
+          <a:effectLst>
+            <a:outerShdw sx="100000" sy="100000" kx="0" ky="0" algn="bl" rotWithShape="0" blurRad="101600" dist="38100" dir="8100000">
+              <a:srgbClr val="000000">
+                <a:alpha val="12000"/>
+              </a:srgbClr>
+            </a:outerShdw>
+          </a:effectLst>
+        </p:spPr>
+      </p:sp>
+      <p:sp>
+        <p:nvSpPr>
+          <p:cNvPr id="23" name="Text 21"/>
+          <p:cNvSpPr/>
+          <p:nvPr/>
+        </p:nvSpPr>
+        <p:spPr>
+          <a:xfrm>
+            <a:off x="6519672" y="2258568"/>
+            <a:ext cx="1828800" cy="292608"/>
+          </a:xfrm>
+          <a:prstGeom prst="rect">
+            <a:avLst/>
+          </a:prstGeom>
+          <a:noFill/>
+          <a:ln/>
+        </p:spPr>
+        <p:txBody>
+          <a:bodyPr wrap="square" lIns="0" tIns="0" rIns="0" bIns="0" rtlCol="0" anchor="ctr"/>
+          <a:lstStyle/>
+          <a:p>
+            <a:pPr algn="ctr" indent="0" marL="0">
+              <a:buNone/>
+            </a:pPr>
+            <a:r>
+              <a:rPr lang="en-US" sz="1300" b="1" dirty="0">
+                <a:solidFill>
+                  <a:srgbClr val="9D174D"/>
+                </a:solidFill>
+                <a:latin typeface="Trebuchet MS" pitchFamily="34" charset="0"/>
+                <a:ea typeface="Trebuchet MS" pitchFamily="34" charset="-122"/>
+                <a:cs typeface="Trebuchet MS" pitchFamily="34" charset="-120"/>
+              </a:rPr>
+              <a:t>ed</a:t>
+            </a:r>
+            <a:endParaRPr lang="en-US" sz="1300" dirty="0"/>
+          </a:p>
+        </p:txBody>
+      </p:sp>
+      <p:sp>
+        <p:nvSpPr>
+          <p:cNvPr id="24" name="Text 22"/>
+          <p:cNvSpPr/>
+          <p:nvPr/>
+        </p:nvSpPr>
+        <p:spPr>
+          <a:xfrm>
+            <a:off x="6519672" y="2569464"/>
+            <a:ext cx="1828800" cy="201168"/>
+          </a:xfrm>
+          <a:prstGeom prst="rect">
+            <a:avLst/>
+          </a:prstGeom>
+          <a:noFill/>
+          <a:ln/>
+        </p:spPr>
+        <p:txBody>
+          <a:bodyPr wrap="square" lIns="0" tIns="0" rIns="0" bIns="0" rtlCol="0" anchor="t"/>
+          <a:lstStyle/>
+          <a:p>
+            <a:pPr algn="ctr" indent="0" marL="0">
+              <a:buNone/>
+            </a:pPr>
+            <a:r>
+              <a:rPr lang="en-US" sz="850" dirty="0">
+                <a:solidFill>
+                  <a:srgbClr val="475569"/>
+                </a:solidFill>
+                <a:latin typeface="Calibri" pitchFamily="34" charset="0"/>
+                <a:ea typeface="Calibri" pitchFamily="34" charset="-122"/>
+                <a:cs typeface="Calibri" pitchFamily="34" charset="-120"/>
+              </a:rPr>
+              <a:t>past tense</a:t>
+            </a:r>
+            <a:endParaRPr lang="en-US" sz="850" dirty="0"/>
+          </a:p>
+        </p:txBody>
+      </p:sp>
+      <p:sp>
+        <p:nvSpPr>
+          <p:cNvPr id="25" name="Shape 23"/>
           <p:cNvSpPr/>
           <p:nvPr/>
         </p:nvSpPr>
@@ -12041,7 +12456,7 @@
       </p:sp>
       <p:sp>
         <p:nvSpPr>
-          <p:cNvPr id="23" name="Text 21"/>
+          <p:cNvPr id="26" name="Text 24"/>
           <p:cNvSpPr/>
           <p:nvPr/>
         </p:nvSpPr>
@@ -12080,7 +12495,7 @@
       </p:sp>
       <p:sp>
         <p:nvSpPr>
-          <p:cNvPr id="24" name="Shape 22"/>
+          <p:cNvPr id="27" name="Shape 25"/>
           <p:cNvSpPr/>
           <p:nvPr/>
         </p:nvSpPr>
@@ -12107,7 +12522,7 @@
       </p:sp>
       <p:sp>
         <p:nvSpPr>
-          <p:cNvPr id="25" name="Text 23"/>
+          <p:cNvPr id="28" name="Text 26"/>
           <p:cNvSpPr/>
           <p:nvPr/>
         </p:nvSpPr>
@@ -12146,7 +12561,7 @@
       </p:sp>
       <p:sp>
         <p:nvSpPr>
-          <p:cNvPr id="26" name="Shape 24"/>
+          <p:cNvPr id="29" name="Shape 27"/>
           <p:cNvSpPr/>
           <p:nvPr/>
         </p:nvSpPr>
@@ -12173,7 +12588,7 @@
       </p:sp>
       <p:sp>
         <p:nvSpPr>
-          <p:cNvPr id="27" name="Text 25"/>
+          <p:cNvPr id="30" name="Text 28"/>
           <p:cNvSpPr/>
           <p:nvPr/>
         </p:nvSpPr>
@@ -12212,7 +12627,7 @@
       </p:sp>
       <p:sp>
         <p:nvSpPr>
-          <p:cNvPr id="28" name="Shape 26"/>
+          <p:cNvPr id="31" name="Shape 29"/>
           <p:cNvSpPr/>
           <p:nvPr/>
         </p:nvSpPr>
@@ -12239,7 +12654,7 @@
       </p:sp>
       <p:sp>
         <p:nvSpPr>
-          <p:cNvPr id="29" name="Text 27"/>
+          <p:cNvPr id="32" name="Text 30"/>
           <p:cNvSpPr/>
           <p:nvPr/>
         </p:nvSpPr>
@@ -12701,7 +13116,7 @@
                 <a:ea typeface="Trebuchet MS" pitchFamily="34" charset="-122"/>
                 <a:cs typeface="Trebuchet MS" pitchFamily="34" charset="-120"/>
               </a:rPr>
-              <a:t>asking</a:t>
+              <a:t>unasked</a:t>
             </a:r>
             <a:endParaRPr lang="en-US" sz="2800" dirty="0"/>
           </a:p>
@@ -12781,7 +13196,7 @@
         </p:nvSpPr>
         <p:spPr>
           <a:xfrm>
-            <a:off x="2938272" y="2258568"/>
+            <a:off x="2221992" y="2258568"/>
             <a:ext cx="1828800" cy="292608"/>
           </a:xfrm>
           <a:prstGeom prst="rect">
@@ -12790,11 +13205,11 @@
             </a:avLst>
           </a:prstGeom>
           <a:solidFill>
-            <a:srgbClr val="CCFBF1"/>
+            <a:srgbClr val="DDD6FE"/>
           </a:solidFill>
           <a:ln w="19050">
             <a:solidFill>
-              <a:srgbClr val="0D9488"/>
+              <a:srgbClr val="7C3AED"/>
             </a:solidFill>
             <a:prstDash val="solid"/>
           </a:ln>
@@ -12815,7 +13230,7 @@
         </p:nvSpPr>
         <p:spPr>
           <a:xfrm>
-            <a:off x="2938272" y="2258568"/>
+            <a:off x="2221992" y="2258568"/>
             <a:ext cx="1828800" cy="292608"/>
           </a:xfrm>
           <a:prstGeom prst="rect">
@@ -12834,13 +13249,13 @@
             <a:r>
               <a:rPr lang="en-US" sz="1300" b="1" dirty="0">
                 <a:solidFill>
-                  <a:srgbClr val="0F766E"/>
+                  <a:srgbClr val="4C1D95"/>
                 </a:solidFill>
                 <a:latin typeface="Trebuchet MS" pitchFamily="34" charset="0"/>
                 <a:ea typeface="Trebuchet MS" pitchFamily="34" charset="-122"/>
                 <a:cs typeface="Trebuchet MS" pitchFamily="34" charset="-120"/>
               </a:rPr>
-              <a:t>ask</a:t>
+              <a:t>un</a:t>
             </a:r>
             <a:endParaRPr lang="en-US" sz="1300" dirty="0"/>
           </a:p>
@@ -12854,7 +13269,7 @@
         </p:nvSpPr>
         <p:spPr>
           <a:xfrm>
-            <a:off x="2938272" y="2569464"/>
+            <a:off x="2221992" y="2569464"/>
             <a:ext cx="1828800" cy="201168"/>
           </a:xfrm>
           <a:prstGeom prst="rect">
@@ -12879,7 +13294,7 @@
                 <a:ea typeface="Calibri" pitchFamily="34" charset="-122"/>
                 <a:cs typeface="Calibri" pitchFamily="34" charset="-120"/>
               </a:rPr>
-              <a:t>to request or inquire</a:t>
+              <a:t>not</a:t>
             </a:r>
             <a:endParaRPr lang="en-US" sz="850" dirty="0"/>
           </a:p>
@@ -12893,7 +13308,7 @@
         </p:nvSpPr>
         <p:spPr>
           <a:xfrm>
-            <a:off x="5803392" y="2258568"/>
+            <a:off x="4370832" y="2258568"/>
             <a:ext cx="1828800" cy="292608"/>
           </a:xfrm>
           <a:prstGeom prst="rect">
@@ -12902,11 +13317,11 @@
             </a:avLst>
           </a:prstGeom>
           <a:solidFill>
-            <a:srgbClr val="FCE7F3"/>
+            <a:srgbClr val="CCFBF1"/>
           </a:solidFill>
           <a:ln w="19050">
             <a:solidFill>
-              <a:srgbClr val="DB2777"/>
+              <a:srgbClr val="0D9488"/>
             </a:solidFill>
             <a:prstDash val="solid"/>
           </a:ln>
@@ -12927,7 +13342,7 @@
         </p:nvSpPr>
         <p:spPr>
           <a:xfrm>
-            <a:off x="5803392" y="2258568"/>
+            <a:off x="4370832" y="2258568"/>
             <a:ext cx="1828800" cy="292608"/>
           </a:xfrm>
           <a:prstGeom prst="rect">
@@ -12946,13 +13361,13 @@
             <a:r>
               <a:rPr lang="en-US" sz="1300" b="1" dirty="0">
                 <a:solidFill>
-                  <a:srgbClr val="9D174D"/>
+                  <a:srgbClr val="0F766E"/>
                 </a:solidFill>
                 <a:latin typeface="Trebuchet MS" pitchFamily="34" charset="0"/>
                 <a:ea typeface="Trebuchet MS" pitchFamily="34" charset="-122"/>
                 <a:cs typeface="Trebuchet MS" pitchFamily="34" charset="-120"/>
               </a:rPr>
-              <a:t>ing</a:t>
+              <a:t>ask</a:t>
             </a:r>
             <a:endParaRPr lang="en-US" sz="1300" dirty="0"/>
           </a:p>
@@ -12966,7 +13381,7 @@
         </p:nvSpPr>
         <p:spPr>
           <a:xfrm>
-            <a:off x="5803392" y="2569464"/>
+            <a:off x="4370832" y="2569464"/>
             <a:ext cx="1828800" cy="201168"/>
           </a:xfrm>
           <a:prstGeom prst="rect">
@@ -12991,7 +13406,7 @@
                 <a:ea typeface="Calibri" pitchFamily="34" charset="-122"/>
                 <a:cs typeface="Calibri" pitchFamily="34" charset="-120"/>
               </a:rPr>
-              <a:t>ongoing action</a:t>
+              <a:t>to request or inquire</a:t>
             </a:r>
             <a:endParaRPr lang="en-US" sz="850" dirty="0"/>
           </a:p>
@@ -13000,6 +13415,118 @@
       <p:sp>
         <p:nvSpPr>
           <p:cNvPr id="22" name="Shape 20"/>
+          <p:cNvSpPr/>
+          <p:nvPr/>
+        </p:nvSpPr>
+        <p:spPr>
+          <a:xfrm>
+            <a:off x="6519672" y="2258568"/>
+            <a:ext cx="1828800" cy="292608"/>
+          </a:xfrm>
+          <a:prstGeom prst="rect">
+            <a:avLst>
+              <a:gd name="adj" fmla="val 25000"/>
+            </a:avLst>
+          </a:prstGeom>
+          <a:solidFill>
+            <a:srgbClr val="FCE7F3"/>
+          </a:solidFill>
+          <a:ln w="19050">
+            <a:solidFill>
+              <a:srgbClr val="DB2777"/>
+            </a:solidFill>
+            <a:prstDash val="solid"/>
+          </a:ln>
+          <a:effectLst>
+            <a:outerShdw sx="100000" sy="100000" kx="0" ky="0" algn="bl" rotWithShape="0" blurRad="101600" dist="38100" dir="8100000">
+              <a:srgbClr val="000000">
+                <a:alpha val="12000"/>
+              </a:srgbClr>
+            </a:outerShdw>
+          </a:effectLst>
+        </p:spPr>
+      </p:sp>
+      <p:sp>
+        <p:nvSpPr>
+          <p:cNvPr id="23" name="Text 21"/>
+          <p:cNvSpPr/>
+          <p:nvPr/>
+        </p:nvSpPr>
+        <p:spPr>
+          <a:xfrm>
+            <a:off x="6519672" y="2258568"/>
+            <a:ext cx="1828800" cy="292608"/>
+          </a:xfrm>
+          <a:prstGeom prst="rect">
+            <a:avLst/>
+          </a:prstGeom>
+          <a:noFill/>
+          <a:ln/>
+        </p:spPr>
+        <p:txBody>
+          <a:bodyPr wrap="square" lIns="0" tIns="0" rIns="0" bIns="0" rtlCol="0" anchor="ctr"/>
+          <a:lstStyle/>
+          <a:p>
+            <a:pPr algn="ctr" indent="0" marL="0">
+              <a:buNone/>
+            </a:pPr>
+            <a:r>
+              <a:rPr lang="en-US" sz="1300" b="1" dirty="0">
+                <a:solidFill>
+                  <a:srgbClr val="9D174D"/>
+                </a:solidFill>
+                <a:latin typeface="Trebuchet MS" pitchFamily="34" charset="0"/>
+                <a:ea typeface="Trebuchet MS" pitchFamily="34" charset="-122"/>
+                <a:cs typeface="Trebuchet MS" pitchFamily="34" charset="-120"/>
+              </a:rPr>
+              <a:t>ed</a:t>
+            </a:r>
+            <a:endParaRPr lang="en-US" sz="1300" dirty="0"/>
+          </a:p>
+        </p:txBody>
+      </p:sp>
+      <p:sp>
+        <p:nvSpPr>
+          <p:cNvPr id="24" name="Text 22"/>
+          <p:cNvSpPr/>
+          <p:nvPr/>
+        </p:nvSpPr>
+        <p:spPr>
+          <a:xfrm>
+            <a:off x="6519672" y="2569464"/>
+            <a:ext cx="1828800" cy="201168"/>
+          </a:xfrm>
+          <a:prstGeom prst="rect">
+            <a:avLst/>
+          </a:prstGeom>
+          <a:noFill/>
+          <a:ln/>
+        </p:spPr>
+        <p:txBody>
+          <a:bodyPr wrap="square" lIns="0" tIns="0" rIns="0" bIns="0" rtlCol="0" anchor="t"/>
+          <a:lstStyle/>
+          <a:p>
+            <a:pPr algn="ctr" indent="0" marL="0">
+              <a:buNone/>
+            </a:pPr>
+            <a:r>
+              <a:rPr lang="en-US" sz="850" dirty="0">
+                <a:solidFill>
+                  <a:srgbClr val="475569"/>
+                </a:solidFill>
+                <a:latin typeface="Calibri" pitchFamily="34" charset="0"/>
+                <a:ea typeface="Calibri" pitchFamily="34" charset="-122"/>
+                <a:cs typeface="Calibri" pitchFamily="34" charset="-120"/>
+              </a:rPr>
+              <a:t>past tense</a:t>
+            </a:r>
+            <a:endParaRPr lang="en-US" sz="850" dirty="0"/>
+          </a:p>
+        </p:txBody>
+      </p:sp>
+      <p:sp>
+        <p:nvSpPr>
+          <p:cNvPr id="25" name="Shape 23"/>
           <p:cNvSpPr/>
           <p:nvPr/>
         </p:nvSpPr>
@@ -13026,7 +13553,7 @@
       </p:sp>
       <p:sp>
         <p:nvSpPr>
-          <p:cNvPr id="23" name="Text 21"/>
+          <p:cNvPr id="26" name="Text 24"/>
           <p:cNvSpPr/>
           <p:nvPr/>
         </p:nvSpPr>
@@ -13065,7 +13592,7 @@
       </p:sp>
       <p:sp>
         <p:nvSpPr>
-          <p:cNvPr id="24" name="Shape 22"/>
+          <p:cNvPr id="27" name="Shape 25"/>
           <p:cNvSpPr/>
           <p:nvPr/>
         </p:nvSpPr>
@@ -13092,7 +13619,7 @@
       </p:sp>
       <p:sp>
         <p:nvSpPr>
-          <p:cNvPr id="25" name="Shape 23"/>
+          <p:cNvPr id="28" name="Shape 26"/>
           <p:cNvSpPr/>
           <p:nvPr/>
         </p:nvSpPr>
@@ -13119,7 +13646,7 @@
       </p:sp>
       <p:sp>
         <p:nvSpPr>
-          <p:cNvPr id="26" name="Text 24"/>
+          <p:cNvPr id="29" name="Text 27"/>
           <p:cNvSpPr/>
           <p:nvPr/>
         </p:nvSpPr>
@@ -13150,7 +13677,7 @@
                 <a:ea typeface="Trebuchet MS" pitchFamily="34" charset="-122"/>
                 <a:cs typeface="Trebuchet MS" pitchFamily="34" charset="-120"/>
               </a:rPr>
-              <a:t>ask</a:t>
+              <a:t>un</a:t>
             </a:r>
             <a:endParaRPr lang="en-US" sz="1400" dirty="0"/>
           </a:p>
@@ -13158,7 +13685,7 @@
       </p:sp>
       <p:sp>
         <p:nvSpPr>
-          <p:cNvPr id="27" name="Text 25"/>
+          <p:cNvPr id="30" name="Text 28"/>
           <p:cNvSpPr/>
           <p:nvPr/>
         </p:nvSpPr>
@@ -13197,7 +13724,7 @@
       </p:sp>
       <p:sp>
         <p:nvSpPr>
-          <p:cNvPr id="28" name="Shape 26"/>
+          <p:cNvPr id="31" name="Shape 29"/>
           <p:cNvSpPr/>
           <p:nvPr/>
         </p:nvSpPr>
@@ -13224,7 +13751,7 @@
       </p:sp>
       <p:sp>
         <p:nvSpPr>
-          <p:cNvPr id="29" name="Text 27"/>
+          <p:cNvPr id="32" name="Text 30"/>
           <p:cNvSpPr/>
           <p:nvPr/>
         </p:nvSpPr>
@@ -13255,7 +13782,7 @@
                 <a:ea typeface="Trebuchet MS" pitchFamily="34" charset="-122"/>
                 <a:cs typeface="Trebuchet MS" pitchFamily="34" charset="-120"/>
               </a:rPr>
-              <a:t>ing</a:t>
+              <a:t>asked</a:t>
             </a:r>
             <a:endParaRPr lang="en-US" sz="1400" dirty="0"/>
           </a:p>
@@ -13263,7 +13790,7 @@
       </p:sp>
       <p:sp>
         <p:nvSpPr>
-          <p:cNvPr id="30" name="Shape 28"/>
+          <p:cNvPr id="33" name="Shape 31"/>
           <p:cNvSpPr/>
           <p:nvPr/>
         </p:nvSpPr>
@@ -13290,7 +13817,7 @@
       </p:sp>
       <p:sp>
         <p:nvSpPr>
-          <p:cNvPr id="31" name="Text 29"/>
+          <p:cNvPr id="34" name="Text 32"/>
           <p:cNvSpPr/>
           <p:nvPr/>
         </p:nvSpPr>
@@ -13329,7 +13856,7 @@
       </p:sp>
       <p:sp>
         <p:nvSpPr>
-          <p:cNvPr id="32" name="Shape 30"/>
+          <p:cNvPr id="35" name="Shape 33"/>
           <p:cNvSpPr/>
           <p:nvPr/>
         </p:nvSpPr>
@@ -13356,7 +13883,7 @@
       </p:sp>
       <p:sp>
         <p:nvSpPr>
-          <p:cNvPr id="33" name="Text 31"/>
+          <p:cNvPr id="36" name="Text 34"/>
           <p:cNvSpPr/>
           <p:nvPr/>
         </p:nvSpPr>
@@ -14083,7 +14610,7 @@
                 <a:ea typeface="Trebuchet MS" pitchFamily="34" charset="-122"/>
                 <a:cs typeface="Trebuchet MS" pitchFamily="34" charset="-120"/>
               </a:rPr>
-              <a:t>asking</a:t>
+              <a:t>unasked</a:t>
             </a:r>
             <a:endParaRPr lang="en-US" sz="2800" dirty="0"/>
           </a:p>
@@ -14163,7 +14690,7 @@
         </p:nvSpPr>
         <p:spPr>
           <a:xfrm>
-            <a:off x="2938272" y="2258568"/>
+            <a:off x="2221992" y="2258568"/>
             <a:ext cx="1828800" cy="292608"/>
           </a:xfrm>
           <a:prstGeom prst="rect">
@@ -14172,11 +14699,11 @@
             </a:avLst>
           </a:prstGeom>
           <a:solidFill>
-            <a:srgbClr val="CCFBF1"/>
+            <a:srgbClr val="DDD6FE"/>
           </a:solidFill>
           <a:ln w="19050">
             <a:solidFill>
-              <a:srgbClr val="0D9488"/>
+              <a:srgbClr val="7C3AED"/>
             </a:solidFill>
             <a:prstDash val="solid"/>
           </a:ln>
@@ -14197,7 +14724,7 @@
         </p:nvSpPr>
         <p:spPr>
           <a:xfrm>
-            <a:off x="2938272" y="2258568"/>
+            <a:off x="2221992" y="2258568"/>
             <a:ext cx="1828800" cy="292608"/>
           </a:xfrm>
           <a:prstGeom prst="rect">
@@ -14216,13 +14743,13 @@
             <a:r>
               <a:rPr lang="en-US" sz="1300" b="1" dirty="0">
                 <a:solidFill>
-                  <a:srgbClr val="0F766E"/>
+                  <a:srgbClr val="4C1D95"/>
                 </a:solidFill>
                 <a:latin typeface="Trebuchet MS" pitchFamily="34" charset="0"/>
                 <a:ea typeface="Trebuchet MS" pitchFamily="34" charset="-122"/>
                 <a:cs typeface="Trebuchet MS" pitchFamily="34" charset="-120"/>
               </a:rPr>
-              <a:t>ask</a:t>
+              <a:t>un</a:t>
             </a:r>
             <a:endParaRPr lang="en-US" sz="1300" dirty="0"/>
           </a:p>
@@ -14236,7 +14763,7 @@
         </p:nvSpPr>
         <p:spPr>
           <a:xfrm>
-            <a:off x="2938272" y="2569464"/>
+            <a:off x="2221992" y="2569464"/>
             <a:ext cx="1828800" cy="201168"/>
           </a:xfrm>
           <a:prstGeom prst="rect">
@@ -14261,7 +14788,7 @@
                 <a:ea typeface="Calibri" pitchFamily="34" charset="-122"/>
                 <a:cs typeface="Calibri" pitchFamily="34" charset="-120"/>
               </a:rPr>
-              <a:t>to request or inquire</a:t>
+              <a:t>not</a:t>
             </a:r>
             <a:endParaRPr lang="en-US" sz="850" dirty="0"/>
           </a:p>
@@ -14275,7 +14802,7 @@
         </p:nvSpPr>
         <p:spPr>
           <a:xfrm>
-            <a:off x="5803392" y="2258568"/>
+            <a:off x="4370832" y="2258568"/>
             <a:ext cx="1828800" cy="292608"/>
           </a:xfrm>
           <a:prstGeom prst="rect">
@@ -14284,11 +14811,11 @@
             </a:avLst>
           </a:prstGeom>
           <a:solidFill>
-            <a:srgbClr val="FCE7F3"/>
+            <a:srgbClr val="CCFBF1"/>
           </a:solidFill>
           <a:ln w="19050">
             <a:solidFill>
-              <a:srgbClr val="DB2777"/>
+              <a:srgbClr val="0D9488"/>
             </a:solidFill>
             <a:prstDash val="solid"/>
           </a:ln>
@@ -14309,7 +14836,7 @@
         </p:nvSpPr>
         <p:spPr>
           <a:xfrm>
-            <a:off x="5803392" y="2258568"/>
+            <a:off x="4370832" y="2258568"/>
             <a:ext cx="1828800" cy="292608"/>
           </a:xfrm>
           <a:prstGeom prst="rect">
@@ -14328,13 +14855,13 @@
             <a:r>
               <a:rPr lang="en-US" sz="1300" b="1" dirty="0">
                 <a:solidFill>
-                  <a:srgbClr val="9D174D"/>
+                  <a:srgbClr val="0F766E"/>
                 </a:solidFill>
                 <a:latin typeface="Trebuchet MS" pitchFamily="34" charset="0"/>
                 <a:ea typeface="Trebuchet MS" pitchFamily="34" charset="-122"/>
                 <a:cs typeface="Trebuchet MS" pitchFamily="34" charset="-120"/>
               </a:rPr>
-              <a:t>ing</a:t>
+              <a:t>ask</a:t>
             </a:r>
             <a:endParaRPr lang="en-US" sz="1300" dirty="0"/>
           </a:p>
@@ -14348,7 +14875,7 @@
         </p:nvSpPr>
         <p:spPr>
           <a:xfrm>
-            <a:off x="5803392" y="2569464"/>
+            <a:off x="4370832" y="2569464"/>
             <a:ext cx="1828800" cy="201168"/>
           </a:xfrm>
           <a:prstGeom prst="rect">
@@ -14373,7 +14900,7 @@
                 <a:ea typeface="Calibri" pitchFamily="34" charset="-122"/>
                 <a:cs typeface="Calibri" pitchFamily="34" charset="-120"/>
               </a:rPr>
-              <a:t>ongoing action</a:t>
+              <a:t>to request or inquire</a:t>
             </a:r>
             <a:endParaRPr lang="en-US" sz="850" dirty="0"/>
           </a:p>
@@ -14382,6 +14909,118 @@
       <p:sp>
         <p:nvSpPr>
           <p:cNvPr id="22" name="Shape 20"/>
+          <p:cNvSpPr/>
+          <p:nvPr/>
+        </p:nvSpPr>
+        <p:spPr>
+          <a:xfrm>
+            <a:off x="6519672" y="2258568"/>
+            <a:ext cx="1828800" cy="292608"/>
+          </a:xfrm>
+          <a:prstGeom prst="rect">
+            <a:avLst>
+              <a:gd name="adj" fmla="val 25000"/>
+            </a:avLst>
+          </a:prstGeom>
+          <a:solidFill>
+            <a:srgbClr val="FCE7F3"/>
+          </a:solidFill>
+          <a:ln w="19050">
+            <a:solidFill>
+              <a:srgbClr val="DB2777"/>
+            </a:solidFill>
+            <a:prstDash val="solid"/>
+          </a:ln>
+          <a:effectLst>
+            <a:outerShdw sx="100000" sy="100000" kx="0" ky="0" algn="bl" rotWithShape="0" blurRad="101600" dist="38100" dir="8100000">
+              <a:srgbClr val="000000">
+                <a:alpha val="12000"/>
+              </a:srgbClr>
+            </a:outerShdw>
+          </a:effectLst>
+        </p:spPr>
+      </p:sp>
+      <p:sp>
+        <p:nvSpPr>
+          <p:cNvPr id="23" name="Text 21"/>
+          <p:cNvSpPr/>
+          <p:nvPr/>
+        </p:nvSpPr>
+        <p:spPr>
+          <a:xfrm>
+            <a:off x="6519672" y="2258568"/>
+            <a:ext cx="1828800" cy="292608"/>
+          </a:xfrm>
+          <a:prstGeom prst="rect">
+            <a:avLst/>
+          </a:prstGeom>
+          <a:noFill/>
+          <a:ln/>
+        </p:spPr>
+        <p:txBody>
+          <a:bodyPr wrap="square" lIns="0" tIns="0" rIns="0" bIns="0" rtlCol="0" anchor="ctr"/>
+          <a:lstStyle/>
+          <a:p>
+            <a:pPr algn="ctr" indent="0" marL="0">
+              <a:buNone/>
+            </a:pPr>
+            <a:r>
+              <a:rPr lang="en-US" sz="1300" b="1" dirty="0">
+                <a:solidFill>
+                  <a:srgbClr val="9D174D"/>
+                </a:solidFill>
+                <a:latin typeface="Trebuchet MS" pitchFamily="34" charset="0"/>
+                <a:ea typeface="Trebuchet MS" pitchFamily="34" charset="-122"/>
+                <a:cs typeface="Trebuchet MS" pitchFamily="34" charset="-120"/>
+              </a:rPr>
+              <a:t>ed</a:t>
+            </a:r>
+            <a:endParaRPr lang="en-US" sz="1300" dirty="0"/>
+          </a:p>
+        </p:txBody>
+      </p:sp>
+      <p:sp>
+        <p:nvSpPr>
+          <p:cNvPr id="24" name="Text 22"/>
+          <p:cNvSpPr/>
+          <p:nvPr/>
+        </p:nvSpPr>
+        <p:spPr>
+          <a:xfrm>
+            <a:off x="6519672" y="2569464"/>
+            <a:ext cx="1828800" cy="201168"/>
+          </a:xfrm>
+          <a:prstGeom prst="rect">
+            <a:avLst/>
+          </a:prstGeom>
+          <a:noFill/>
+          <a:ln/>
+        </p:spPr>
+        <p:txBody>
+          <a:bodyPr wrap="square" lIns="0" tIns="0" rIns="0" bIns="0" rtlCol="0" anchor="t"/>
+          <a:lstStyle/>
+          <a:p>
+            <a:pPr algn="ctr" indent="0" marL="0">
+              <a:buNone/>
+            </a:pPr>
+            <a:r>
+              <a:rPr lang="en-US" sz="850" dirty="0">
+                <a:solidFill>
+                  <a:srgbClr val="475569"/>
+                </a:solidFill>
+                <a:latin typeface="Calibri" pitchFamily="34" charset="0"/>
+                <a:ea typeface="Calibri" pitchFamily="34" charset="-122"/>
+                <a:cs typeface="Calibri" pitchFamily="34" charset="-120"/>
+              </a:rPr>
+              <a:t>past tense</a:t>
+            </a:r>
+            <a:endParaRPr lang="en-US" sz="850" dirty="0"/>
+          </a:p>
+        </p:txBody>
+      </p:sp>
+      <p:sp>
+        <p:nvSpPr>
+          <p:cNvPr id="25" name="Shape 23"/>
           <p:cNvSpPr/>
           <p:nvPr/>
         </p:nvSpPr>
@@ -14408,7 +15047,7 @@
       </p:sp>
       <p:sp>
         <p:nvSpPr>
-          <p:cNvPr id="23" name="Text 21"/>
+          <p:cNvPr id="26" name="Text 24"/>
           <p:cNvSpPr/>
           <p:nvPr/>
         </p:nvSpPr>
@@ -14447,7 +15086,7 @@
       </p:sp>
       <p:sp>
         <p:nvSpPr>
-          <p:cNvPr id="24" name="Shape 22"/>
+          <p:cNvPr id="27" name="Shape 25"/>
           <p:cNvSpPr/>
           <p:nvPr/>
         </p:nvSpPr>
@@ -14474,7 +15113,7 @@
       </p:sp>
       <p:sp>
         <p:nvSpPr>
-          <p:cNvPr id="25" name="Shape 23"/>
+          <p:cNvPr id="28" name="Shape 26"/>
           <p:cNvSpPr/>
           <p:nvPr/>
         </p:nvSpPr>
@@ -14501,7 +15140,7 @@
       </p:sp>
       <p:sp>
         <p:nvSpPr>
-          <p:cNvPr id="26" name="Text 24"/>
+          <p:cNvPr id="29" name="Text 27"/>
           <p:cNvSpPr/>
           <p:nvPr/>
         </p:nvSpPr>
@@ -14532,7 +15171,7 @@
                 <a:ea typeface="Trebuchet MS" pitchFamily="34" charset="-122"/>
                 <a:cs typeface="Trebuchet MS" pitchFamily="34" charset="-120"/>
               </a:rPr>
-              <a:t>ask</a:t>
+              <a:t>un</a:t>
             </a:r>
             <a:endParaRPr lang="en-US" sz="1400" dirty="0"/>
           </a:p>
@@ -14540,7 +15179,7 @@
       </p:sp>
       <p:sp>
         <p:nvSpPr>
-          <p:cNvPr id="27" name="Text 25"/>
+          <p:cNvPr id="30" name="Text 28"/>
           <p:cNvSpPr/>
           <p:nvPr/>
         </p:nvSpPr>
@@ -14579,7 +15218,7 @@
       </p:sp>
       <p:sp>
         <p:nvSpPr>
-          <p:cNvPr id="28" name="Shape 26"/>
+          <p:cNvPr id="31" name="Shape 29"/>
           <p:cNvSpPr/>
           <p:nvPr/>
         </p:nvSpPr>
@@ -14606,7 +15245,7 @@
       </p:sp>
       <p:sp>
         <p:nvSpPr>
-          <p:cNvPr id="29" name="Text 27"/>
+          <p:cNvPr id="32" name="Text 30"/>
           <p:cNvSpPr/>
           <p:nvPr/>
         </p:nvSpPr>
@@ -14637,7 +15276,7 @@
                 <a:ea typeface="Trebuchet MS" pitchFamily="34" charset="-122"/>
                 <a:cs typeface="Trebuchet MS" pitchFamily="34" charset="-120"/>
               </a:rPr>
-              <a:t>ing</a:t>
+              <a:t>asked</a:t>
             </a:r>
             <a:endParaRPr lang="en-US" sz="1400" dirty="0"/>
           </a:p>
@@ -14645,7 +15284,7 @@
       </p:sp>
       <p:sp>
         <p:nvSpPr>
-          <p:cNvPr id="30" name="Shape 28"/>
+          <p:cNvPr id="33" name="Shape 31"/>
           <p:cNvSpPr/>
           <p:nvPr/>
         </p:nvSpPr>
@@ -14672,7 +15311,7 @@
       </p:sp>
       <p:sp>
         <p:nvSpPr>
-          <p:cNvPr id="31" name="Text 29"/>
+          <p:cNvPr id="34" name="Text 32"/>
           <p:cNvSpPr/>
           <p:nvPr/>
         </p:nvSpPr>
@@ -14711,18 +15350,18 @@
       </p:sp>
       <p:sp>
         <p:nvSpPr>
-          <p:cNvPr id="32" name="Shape 30"/>
+          <p:cNvPr id="35" name="Shape 33"/>
           <p:cNvSpPr/>
           <p:nvPr/>
         </p:nvSpPr>
         <p:spPr>
           <a:xfrm>
             <a:off x="1874520" y="4096512"/>
-            <a:ext cx="6903720" cy="658368"/>
+            <a:ext cx="6903720" cy="804672"/>
           </a:xfrm>
           <a:prstGeom prst="rect">
             <a:avLst>
-              <a:gd name="adj" fmla="val 8333"/>
+              <a:gd name="adj" fmla="val 6818"/>
             </a:avLst>
           </a:prstGeom>
           <a:solidFill>
@@ -14738,18 +15377,18 @@
       </p:sp>
       <p:sp>
         <p:nvSpPr>
-          <p:cNvPr id="33" name="Shape 31"/>
-          <p:cNvSpPr/>
-          <p:nvPr/>
-        </p:nvSpPr>
-        <p:spPr>
-          <a:xfrm>
-            <a:off x="2670048" y="4169664"/>
-            <a:ext cx="685800" cy="475488"/>
+          <p:cNvPr id="36" name="Shape 34"/>
+          <p:cNvSpPr/>
+          <p:nvPr/>
+        </p:nvSpPr>
+        <p:spPr>
+          <a:xfrm>
+            <a:off x="2254649" y="4169664"/>
+            <a:ext cx="685800" cy="384048"/>
           </a:xfrm>
           <a:prstGeom prst="rect">
             <a:avLst>
-              <a:gd name="adj" fmla="val 7692"/>
+              <a:gd name="adj" fmla="val 9524"/>
             </a:avLst>
           </a:prstGeom>
           <a:solidFill>
@@ -14765,14 +15404,14 @@
       </p:sp>
       <p:sp>
         <p:nvSpPr>
-          <p:cNvPr id="34" name="Text 32"/>
-          <p:cNvSpPr/>
-          <p:nvPr/>
-        </p:nvSpPr>
-        <p:spPr>
-          <a:xfrm>
-            <a:off x="2670048" y="4169664"/>
-            <a:ext cx="685800" cy="475488"/>
+          <p:cNvPr id="37" name="Text 35"/>
+          <p:cNvSpPr/>
+          <p:nvPr/>
+        </p:nvSpPr>
+        <p:spPr>
+          <a:xfrm>
+            <a:off x="2254649" y="4169664"/>
+            <a:ext cx="685800" cy="384048"/>
           </a:xfrm>
           <a:prstGeom prst="rect">
             <a:avLst/>
@@ -14796,7 +15435,7 @@
                 <a:ea typeface="Trebuchet MS" pitchFamily="34" charset="-122"/>
                 <a:cs typeface="Trebuchet MS" pitchFamily="34" charset="-120"/>
               </a:rPr>
-              <a:t>a</a:t>
+              <a:t>u</a:t>
             </a:r>
             <a:endParaRPr lang="en-US" sz="900" dirty="0"/>
           </a:p>
@@ -14804,18 +15443,18 @@
       </p:sp>
       <p:sp>
         <p:nvSpPr>
-          <p:cNvPr id="35" name="Shape 33"/>
-          <p:cNvSpPr/>
-          <p:nvPr/>
-        </p:nvSpPr>
-        <p:spPr>
-          <a:xfrm>
-            <a:off x="4123944" y="4169664"/>
-            <a:ext cx="685800" cy="475488"/>
+          <p:cNvPr id="38" name="Shape 36"/>
+          <p:cNvSpPr/>
+          <p:nvPr/>
+        </p:nvSpPr>
+        <p:spPr>
+          <a:xfrm>
+            <a:off x="3293146" y="4169664"/>
+            <a:ext cx="685800" cy="384048"/>
           </a:xfrm>
           <a:prstGeom prst="rect">
             <a:avLst>
-              <a:gd name="adj" fmla="val 7692"/>
+              <a:gd name="adj" fmla="val 9524"/>
             </a:avLst>
           </a:prstGeom>
           <a:solidFill>
@@ -14831,14 +15470,14 @@
       </p:sp>
       <p:sp>
         <p:nvSpPr>
-          <p:cNvPr id="36" name="Text 34"/>
-          <p:cNvSpPr/>
-          <p:nvPr/>
-        </p:nvSpPr>
-        <p:spPr>
-          <a:xfrm>
-            <a:off x="4123944" y="4169664"/>
-            <a:ext cx="685800" cy="475488"/>
+          <p:cNvPr id="39" name="Text 37"/>
+          <p:cNvSpPr/>
+          <p:nvPr/>
+        </p:nvSpPr>
+        <p:spPr>
+          <a:xfrm>
+            <a:off x="3293146" y="4169664"/>
+            <a:ext cx="685800" cy="384048"/>
           </a:xfrm>
           <a:prstGeom prst="rect">
             <a:avLst/>
@@ -14862,7 +15501,7 @@
                 <a:ea typeface="Trebuchet MS" pitchFamily="34" charset="-122"/>
                 <a:cs typeface="Trebuchet MS" pitchFamily="34" charset="-120"/>
               </a:rPr>
-              <a:t>sk</a:t>
+              <a:t>n</a:t>
             </a:r>
             <a:endParaRPr lang="en-US" sz="900" dirty="0"/>
           </a:p>
@@ -14870,18 +15509,18 @@
       </p:sp>
       <p:sp>
         <p:nvSpPr>
-          <p:cNvPr id="37" name="Shape 35"/>
-          <p:cNvSpPr/>
-          <p:nvPr/>
-        </p:nvSpPr>
-        <p:spPr>
-          <a:xfrm>
-            <a:off x="5577840" y="4169664"/>
-            <a:ext cx="685800" cy="475488"/>
+          <p:cNvPr id="40" name="Shape 38"/>
+          <p:cNvSpPr/>
+          <p:nvPr/>
+        </p:nvSpPr>
+        <p:spPr>
+          <a:xfrm>
+            <a:off x="4331643" y="4169664"/>
+            <a:ext cx="685800" cy="384048"/>
           </a:xfrm>
           <a:prstGeom prst="rect">
             <a:avLst>
-              <a:gd name="adj" fmla="val 7692"/>
+              <a:gd name="adj" fmla="val 9524"/>
             </a:avLst>
           </a:prstGeom>
           <a:solidFill>
@@ -14897,14 +15536,14 @@
       </p:sp>
       <p:sp>
         <p:nvSpPr>
-          <p:cNvPr id="38" name="Text 36"/>
-          <p:cNvSpPr/>
-          <p:nvPr/>
-        </p:nvSpPr>
-        <p:spPr>
-          <a:xfrm>
-            <a:off x="5577840" y="4169664"/>
-            <a:ext cx="685800" cy="475488"/>
+          <p:cNvPr id="41" name="Text 39"/>
+          <p:cNvSpPr/>
+          <p:nvPr/>
+        </p:nvSpPr>
+        <p:spPr>
+          <a:xfrm>
+            <a:off x="4331643" y="4169664"/>
+            <a:ext cx="685800" cy="384048"/>
           </a:xfrm>
           <a:prstGeom prst="rect">
             <a:avLst/>
@@ -14928,7 +15567,7 @@
                 <a:ea typeface="Trebuchet MS" pitchFamily="34" charset="-122"/>
                 <a:cs typeface="Trebuchet MS" pitchFamily="34" charset="-120"/>
               </a:rPr>
-              <a:t>i</a:t>
+              <a:t>a</a:t>
             </a:r>
             <a:endParaRPr lang="en-US" sz="900" dirty="0"/>
           </a:p>
@@ -14936,18 +15575,18 @@
       </p:sp>
       <p:sp>
         <p:nvSpPr>
-          <p:cNvPr id="39" name="Shape 37"/>
-          <p:cNvSpPr/>
-          <p:nvPr/>
-        </p:nvSpPr>
-        <p:spPr>
-          <a:xfrm>
-            <a:off x="7031736" y="4169664"/>
-            <a:ext cx="685800" cy="475488"/>
+          <p:cNvPr id="42" name="Shape 40"/>
+          <p:cNvSpPr/>
+          <p:nvPr/>
+        </p:nvSpPr>
+        <p:spPr>
+          <a:xfrm>
+            <a:off x="5370141" y="4169664"/>
+            <a:ext cx="685800" cy="384048"/>
           </a:xfrm>
           <a:prstGeom prst="rect">
             <a:avLst>
-              <a:gd name="adj" fmla="val 7692"/>
+              <a:gd name="adj" fmla="val 9524"/>
             </a:avLst>
           </a:prstGeom>
           <a:solidFill>
@@ -14963,14 +15602,14 @@
       </p:sp>
       <p:sp>
         <p:nvSpPr>
-          <p:cNvPr id="40" name="Text 38"/>
-          <p:cNvSpPr/>
-          <p:nvPr/>
-        </p:nvSpPr>
-        <p:spPr>
-          <a:xfrm>
-            <a:off x="7031736" y="4169664"/>
-            <a:ext cx="685800" cy="475488"/>
+          <p:cNvPr id="43" name="Text 41"/>
+          <p:cNvSpPr/>
+          <p:nvPr/>
+        </p:nvSpPr>
+        <p:spPr>
+          <a:xfrm>
+            <a:off x="5370141" y="4169664"/>
+            <a:ext cx="685800" cy="384048"/>
           </a:xfrm>
           <a:prstGeom prst="rect">
             <a:avLst/>
@@ -14994,9 +15633,180 @@
                 <a:ea typeface="Trebuchet MS" pitchFamily="34" charset="-122"/>
                 <a:cs typeface="Trebuchet MS" pitchFamily="34" charset="-120"/>
               </a:rPr>
-              <a:t>ng</a:t>
+              <a:t>s</a:t>
             </a:r>
             <a:endParaRPr lang="en-US" sz="900" dirty="0"/>
+          </a:p>
+        </p:txBody>
+      </p:sp>
+      <p:sp>
+        <p:nvSpPr>
+          <p:cNvPr id="44" name="Shape 42"/>
+          <p:cNvSpPr/>
+          <p:nvPr/>
+        </p:nvSpPr>
+        <p:spPr>
+          <a:xfrm>
+            <a:off x="6408638" y="4169664"/>
+            <a:ext cx="685800" cy="384048"/>
+          </a:xfrm>
+          <a:prstGeom prst="rect">
+            <a:avLst>
+              <a:gd name="adj" fmla="val 9524"/>
+            </a:avLst>
+          </a:prstGeom>
+          <a:solidFill>
+            <a:srgbClr val="FFFFFF"/>
+          </a:solidFill>
+          <a:ln w="12700">
+            <a:solidFill>
+              <a:srgbClr val="DB2777"/>
+            </a:solidFill>
+            <a:prstDash val="solid"/>
+          </a:ln>
+        </p:spPr>
+      </p:sp>
+      <p:sp>
+        <p:nvSpPr>
+          <p:cNvPr id="45" name="Text 43"/>
+          <p:cNvSpPr/>
+          <p:nvPr/>
+        </p:nvSpPr>
+        <p:spPr>
+          <a:xfrm>
+            <a:off x="6408638" y="4169664"/>
+            <a:ext cx="685800" cy="384048"/>
+          </a:xfrm>
+          <a:prstGeom prst="rect">
+            <a:avLst/>
+          </a:prstGeom>
+          <a:noFill/>
+          <a:ln/>
+        </p:spPr>
+        <p:txBody>
+          <a:bodyPr wrap="square" lIns="0" tIns="0" rIns="0" bIns="0" rtlCol="0" anchor="ctr"/>
+          <a:lstStyle/>
+          <a:p>
+            <a:pPr algn="ctr" indent="0" marL="0">
+              <a:buNone/>
+            </a:pPr>
+            <a:r>
+              <a:rPr lang="en-US" sz="900" b="1" dirty="0">
+                <a:solidFill>
+                  <a:srgbClr val="9D174D"/>
+                </a:solidFill>
+                <a:latin typeface="Trebuchet MS" pitchFamily="34" charset="0"/>
+                <a:ea typeface="Trebuchet MS" pitchFamily="34" charset="-122"/>
+                <a:cs typeface="Trebuchet MS" pitchFamily="34" charset="-120"/>
+              </a:rPr>
+              <a:t>k</a:t>
+            </a:r>
+            <a:endParaRPr lang="en-US" sz="900" dirty="0"/>
+          </a:p>
+        </p:txBody>
+      </p:sp>
+      <p:sp>
+        <p:nvSpPr>
+          <p:cNvPr id="46" name="Shape 44"/>
+          <p:cNvSpPr/>
+          <p:nvPr/>
+        </p:nvSpPr>
+        <p:spPr>
+          <a:xfrm>
+            <a:off x="7447135" y="4169664"/>
+            <a:ext cx="685800" cy="384048"/>
+          </a:xfrm>
+          <a:prstGeom prst="rect">
+            <a:avLst>
+              <a:gd name="adj" fmla="val 9524"/>
+            </a:avLst>
+          </a:prstGeom>
+          <a:solidFill>
+            <a:srgbClr val="FFFFFF"/>
+          </a:solidFill>
+          <a:ln w="12700">
+            <a:solidFill>
+              <a:srgbClr val="DB2777"/>
+            </a:solidFill>
+            <a:prstDash val="solid"/>
+          </a:ln>
+        </p:spPr>
+      </p:sp>
+      <p:sp>
+        <p:nvSpPr>
+          <p:cNvPr id="47" name="Text 45"/>
+          <p:cNvSpPr/>
+          <p:nvPr/>
+        </p:nvSpPr>
+        <p:spPr>
+          <a:xfrm>
+            <a:off x="7447135" y="4169664"/>
+            <a:ext cx="685800" cy="384048"/>
+          </a:xfrm>
+          <a:prstGeom prst="rect">
+            <a:avLst/>
+          </a:prstGeom>
+          <a:noFill/>
+          <a:ln/>
+        </p:spPr>
+        <p:txBody>
+          <a:bodyPr wrap="square" lIns="0" tIns="0" rIns="0" bIns="0" rtlCol="0" anchor="ctr"/>
+          <a:lstStyle/>
+          <a:p>
+            <a:pPr algn="ctr" indent="0" marL="0">
+              <a:buNone/>
+            </a:pPr>
+            <a:r>
+              <a:rPr lang="en-US" sz="900" b="1" dirty="0">
+                <a:solidFill>
+                  <a:srgbClr val="9D174D"/>
+                </a:solidFill>
+                <a:latin typeface="Trebuchet MS" pitchFamily="34" charset="0"/>
+                <a:ea typeface="Trebuchet MS" pitchFamily="34" charset="-122"/>
+                <a:cs typeface="Trebuchet MS" pitchFamily="34" charset="-120"/>
+              </a:rPr>
+              <a:t>t</a:t>
+            </a:r>
+            <a:endParaRPr lang="en-US" sz="900" dirty="0"/>
+          </a:p>
+        </p:txBody>
+      </p:sp>
+      <p:sp>
+        <p:nvSpPr>
+          <p:cNvPr id="48" name="Text 46"/>
+          <p:cNvSpPr/>
+          <p:nvPr/>
+        </p:nvSpPr>
+        <p:spPr>
+          <a:xfrm>
+            <a:off x="7447135" y="4572000"/>
+            <a:ext cx="685800" cy="219456"/>
+          </a:xfrm>
+          <a:prstGeom prst="rect">
+            <a:avLst/>
+          </a:prstGeom>
+          <a:noFill/>
+          <a:ln/>
+        </p:spPr>
+        <p:txBody>
+          <a:bodyPr wrap="square" lIns="0" tIns="0" rIns="0" bIns="0" rtlCol="0" anchor="t"/>
+          <a:lstStyle/>
+          <a:p>
+            <a:pPr algn="ctr" indent="0" marL="0">
+              <a:buNone/>
+            </a:pPr>
+            <a:r>
+              <a:rPr lang="en-US" sz="750" i="1" dirty="0">
+                <a:solidFill>
+                  <a:srgbClr val="94A3B8"/>
+                </a:solidFill>
+                <a:latin typeface="Calibri" pitchFamily="34" charset="0"/>
+                <a:ea typeface="Calibri" pitchFamily="34" charset="-122"/>
+                <a:cs typeface="Calibri" pitchFamily="34" charset="-120"/>
+              </a:rPr>
+              <a:t>/t/</a:t>
+            </a:r>
+            <a:endParaRPr lang="en-US" sz="750" dirty="0"/>
           </a:p>
         </p:txBody>
       </p:sp>
@@ -16320,7 +17130,7 @@
                 <a:ea typeface="Calibri" pitchFamily="34" charset="-122"/>
                 <a:cs typeface="Calibri" pitchFamily="34" charset="-120"/>
               </a:rPr>
-              <a:t>The curious </a:t>
+              <a:t>The </a:t>
             </a:r>
             <a:pPr algn="l" indent="0" marL="0">
               <a:buNone/>
@@ -16368,7 +17178,7 @@
                 <a:ea typeface="Calibri" pitchFamily="34" charset="-122"/>
                 <a:cs typeface="Calibri" pitchFamily="34" charset="-120"/>
               </a:rPr>
-              <a:t>asked</a:t>
+              <a:t>reasked</a:t>
             </a:r>
             <a:pPr algn="l" indent="0" marL="0">
               <a:buNone/>
@@ -16382,7 +17192,7 @@
                 <a:ea typeface="Calibri" pitchFamily="34" charset="-122"/>
                 <a:cs typeface="Calibri" pitchFamily="34" charset="-120"/>
               </a:rPr>
-              <a:t> many questions, and she kept </a:t>
+              <a:t> her question politely, and the teacher, who was </a:t>
             </a:r>
             <a:pPr algn="l" indent="0" marL="0">
               <a:buNone/>
@@ -16399,7 +17209,7 @@
                 <a:ea typeface="Calibri" pitchFamily="34" charset="-122"/>
                 <a:cs typeface="Calibri" pitchFamily="34" charset="-120"/>
               </a:rPr>
-              <a:t>asking</a:t>
+              <a:t>overasked</a:t>
             </a:r>
             <a:pPr algn="l" indent="0" marL="0">
               <a:buNone/>
@@ -16413,7 +17223,7 @@
                 <a:ea typeface="Calibri" pitchFamily="34" charset="-122"/>
                 <a:cs typeface="Calibri" pitchFamily="34" charset="-120"/>
               </a:rPr>
-              <a:t> until she finally understood the answer.</a:t>
+              <a:t> that day, still smiled.</a:t>
             </a:r>
             <a:endParaRPr lang="en-US" sz="1800" dirty="0"/>
           </a:p>
@@ -16696,7 +17506,7 @@
                 <a:ea typeface="Trebuchet MS" pitchFamily="34" charset="-122"/>
                 <a:cs typeface="Trebuchet MS" pitchFamily="34" charset="-120"/>
               </a:rPr>
-              <a:t>asked</a:t>
+              <a:t>reasked</a:t>
             </a:r>
             <a:endParaRPr lang="en-US" sz="1400" dirty="0"/>
           </a:p>
@@ -16824,7 +17634,7 @@
                 <a:ea typeface="Trebuchet MS" pitchFamily="34" charset="-122"/>
                 <a:cs typeface="Trebuchet MS" pitchFamily="34" charset="-120"/>
               </a:rPr>
-              <a:t>asking</a:t>
+              <a:t>overasked</a:t>
             </a:r>
             <a:endParaRPr lang="en-US" sz="1400" dirty="0"/>
           </a:p>
@@ -20884,7 +21694,7 @@
         </p:nvSpPr>
         <p:spPr>
           <a:xfrm>
-            <a:off x="3033522" y="4169664"/>
+            <a:off x="2670048" y="4169664"/>
             <a:ext cx="685800" cy="475488"/>
           </a:xfrm>
           <a:prstGeom prst="rect">
@@ -20911,7 +21721,7 @@
         </p:nvSpPr>
         <p:spPr>
           <a:xfrm>
-            <a:off x="3033522" y="4169664"/>
+            <a:off x="2670048" y="4169664"/>
             <a:ext cx="685800" cy="475488"/>
           </a:xfrm>
           <a:prstGeom prst="rect">
@@ -20928,7 +21738,7 @@
               <a:buNone/>
             </a:pPr>
             <a:r>
-              <a:rPr lang="en-US" sz="1000" b="1" dirty="0">
+              <a:rPr lang="en-US" sz="900" b="1" dirty="0">
                 <a:solidFill>
                   <a:srgbClr val="9D174D"/>
                 </a:solidFill>
@@ -20938,7 +21748,7 @@
               </a:rPr>
               <a:t>a</a:t>
             </a:r>
-            <a:endParaRPr lang="en-US" sz="1000" dirty="0"/>
+            <a:endParaRPr lang="en-US" sz="900" dirty="0"/>
           </a:p>
         </p:txBody>
       </p:sp>
@@ -20950,7 +21760,7 @@
         </p:nvSpPr>
         <p:spPr>
           <a:xfrm>
-            <a:off x="4850892" y="4169664"/>
+            <a:off x="4123944" y="4169664"/>
             <a:ext cx="685800" cy="475488"/>
           </a:xfrm>
           <a:prstGeom prst="rect">
@@ -20977,7 +21787,7 @@
         </p:nvSpPr>
         <p:spPr>
           <a:xfrm>
-            <a:off x="4850892" y="4169664"/>
+            <a:off x="4123944" y="4169664"/>
             <a:ext cx="685800" cy="475488"/>
           </a:xfrm>
           <a:prstGeom prst="rect">
@@ -20994,7 +21804,7 @@
               <a:buNone/>
             </a:pPr>
             <a:r>
-              <a:rPr lang="en-US" sz="1000" b="1" dirty="0">
+              <a:rPr lang="en-US" sz="900" b="1" dirty="0">
                 <a:solidFill>
                   <a:srgbClr val="9D174D"/>
                 </a:solidFill>
@@ -21002,9 +21812,9 @@
                 <a:ea typeface="Trebuchet MS" pitchFamily="34" charset="-122"/>
                 <a:cs typeface="Trebuchet MS" pitchFamily="34" charset="-120"/>
               </a:rPr>
-              <a:t>sk</a:t>
-            </a:r>
-            <a:endParaRPr lang="en-US" sz="1000" dirty="0"/>
+              <a:t>s</a:t>
+            </a:r>
+            <a:endParaRPr lang="en-US" sz="900" dirty="0"/>
           </a:p>
         </p:txBody>
       </p:sp>
@@ -21016,7 +21826,7 @@
         </p:nvSpPr>
         <p:spPr>
           <a:xfrm>
-            <a:off x="6668262" y="4169664"/>
+            <a:off x="5577840" y="4169664"/>
             <a:ext cx="685800" cy="475488"/>
           </a:xfrm>
           <a:prstGeom prst="rect">
@@ -21043,7 +21853,7 @@
         </p:nvSpPr>
         <p:spPr>
           <a:xfrm>
-            <a:off x="6668262" y="4169664"/>
+            <a:off x="5577840" y="4169664"/>
             <a:ext cx="685800" cy="475488"/>
           </a:xfrm>
           <a:prstGeom prst="rect">
@@ -21060,7 +21870,7 @@
               <a:buNone/>
             </a:pPr>
             <a:r>
-              <a:rPr lang="en-US" sz="1000" b="1" dirty="0">
+              <a:rPr lang="en-US" sz="900" b="1" dirty="0">
                 <a:solidFill>
                   <a:srgbClr val="9D174D"/>
                 </a:solidFill>
@@ -21068,9 +21878,75 @@
                 <a:ea typeface="Trebuchet MS" pitchFamily="34" charset="-122"/>
                 <a:cs typeface="Trebuchet MS" pitchFamily="34" charset="-120"/>
               </a:rPr>
+              <a:t>k</a:t>
+            </a:r>
+            <a:endParaRPr lang="en-US" sz="900" dirty="0"/>
+          </a:p>
+        </p:txBody>
+      </p:sp>
+      <p:sp>
+        <p:nvSpPr>
+          <p:cNvPr id="39" name="Shape 37"/>
+          <p:cNvSpPr/>
+          <p:nvPr/>
+        </p:nvSpPr>
+        <p:spPr>
+          <a:xfrm>
+            <a:off x="7031736" y="4169664"/>
+            <a:ext cx="685800" cy="475488"/>
+          </a:xfrm>
+          <a:prstGeom prst="rect">
+            <a:avLst>
+              <a:gd name="adj" fmla="val 7692"/>
+            </a:avLst>
+          </a:prstGeom>
+          <a:solidFill>
+            <a:srgbClr val="FFFFFF"/>
+          </a:solidFill>
+          <a:ln w="12700">
+            <a:solidFill>
+              <a:srgbClr val="DB2777"/>
+            </a:solidFill>
+            <a:prstDash val="solid"/>
+          </a:ln>
+        </p:spPr>
+      </p:sp>
+      <p:sp>
+        <p:nvSpPr>
+          <p:cNvPr id="40" name="Text 38"/>
+          <p:cNvSpPr/>
+          <p:nvPr/>
+        </p:nvSpPr>
+        <p:spPr>
+          <a:xfrm>
+            <a:off x="7031736" y="4169664"/>
+            <a:ext cx="685800" cy="475488"/>
+          </a:xfrm>
+          <a:prstGeom prst="rect">
+            <a:avLst/>
+          </a:prstGeom>
+          <a:noFill/>
+          <a:ln/>
+        </p:spPr>
+        <p:txBody>
+          <a:bodyPr wrap="square" lIns="0" tIns="0" rIns="0" bIns="0" rtlCol="0" anchor="ctr"/>
+          <a:lstStyle/>
+          <a:p>
+            <a:pPr algn="ctr" indent="0" marL="0">
+              <a:buNone/>
+            </a:pPr>
+            <a:r>
+              <a:rPr lang="en-US" sz="900" b="1" dirty="0">
+                <a:solidFill>
+                  <a:srgbClr val="9D174D"/>
+                </a:solidFill>
+                <a:latin typeface="Trebuchet MS" pitchFamily="34" charset="0"/>
+                <a:ea typeface="Trebuchet MS" pitchFamily="34" charset="-122"/>
+                <a:cs typeface="Trebuchet MS" pitchFamily="34" charset="-120"/>
+              </a:rPr>
               <a:t>er</a:t>
             </a:r>
-            <a:endParaRPr lang="en-US" sz="1000" dirty="0"/>
+            <a:endParaRPr lang="en-US" sz="900" dirty="0"/>
           </a:p>
         </p:txBody>
       </p:sp>
@@ -21499,7 +22375,7 @@
                 <a:ea typeface="Trebuchet MS" pitchFamily="34" charset="-122"/>
                 <a:cs typeface="Trebuchet MS" pitchFamily="34" charset="-120"/>
               </a:rPr>
-              <a:t>asked</a:t>
+              <a:t>reasked</a:t>
             </a:r>
             <a:endParaRPr lang="en-US" sz="2800" dirty="0"/>
           </a:p>
@@ -22326,7 +23202,7 @@
                 <a:ea typeface="Trebuchet MS" pitchFamily="34" charset="-122"/>
                 <a:cs typeface="Trebuchet MS" pitchFamily="34" charset="-120"/>
               </a:rPr>
-              <a:t>asked</a:t>
+              <a:t>reasked</a:t>
             </a:r>
             <a:endParaRPr lang="en-US" sz="2800" dirty="0"/>
           </a:p>
@@ -22406,7 +23282,7 @@
         </p:nvSpPr>
         <p:spPr>
           <a:xfrm>
-            <a:off x="2938272" y="2258568"/>
+            <a:off x="2221992" y="2258568"/>
             <a:ext cx="1828800" cy="292608"/>
           </a:xfrm>
           <a:prstGeom prst="rect">
@@ -22415,11 +23291,11 @@
             </a:avLst>
           </a:prstGeom>
           <a:solidFill>
-            <a:srgbClr val="CCFBF1"/>
+            <a:srgbClr val="DDD6FE"/>
           </a:solidFill>
           <a:ln w="19050">
             <a:solidFill>
-              <a:srgbClr val="0D9488"/>
+              <a:srgbClr val="7C3AED"/>
             </a:solidFill>
             <a:prstDash val="solid"/>
           </a:ln>
@@ -22440,7 +23316,7 @@
         </p:nvSpPr>
         <p:spPr>
           <a:xfrm>
-            <a:off x="2938272" y="2258568"/>
+            <a:off x="2221992" y="2258568"/>
             <a:ext cx="1828800" cy="292608"/>
           </a:xfrm>
           <a:prstGeom prst="rect">
@@ -22459,13 +23335,13 @@
             <a:r>
               <a:rPr lang="en-US" sz="1300" b="1" dirty="0">
                 <a:solidFill>
-                  <a:srgbClr val="0F766E"/>
+                  <a:srgbClr val="4C1D95"/>
                 </a:solidFill>
                 <a:latin typeface="Trebuchet MS" pitchFamily="34" charset="0"/>
                 <a:ea typeface="Trebuchet MS" pitchFamily="34" charset="-122"/>
                 <a:cs typeface="Trebuchet MS" pitchFamily="34" charset="-120"/>
               </a:rPr>
-              <a:t>ask</a:t>
+              <a:t>re</a:t>
             </a:r>
             <a:endParaRPr lang="en-US" sz="1300" dirty="0"/>
           </a:p>
@@ -22479,7 +23355,7 @@
         </p:nvSpPr>
         <p:spPr>
           <a:xfrm>
-            <a:off x="2938272" y="2569464"/>
+            <a:off x="2221992" y="2569464"/>
             <a:ext cx="1828800" cy="201168"/>
           </a:xfrm>
           <a:prstGeom prst="rect">
@@ -22504,7 +23380,7 @@
                 <a:ea typeface="Calibri" pitchFamily="34" charset="-122"/>
                 <a:cs typeface="Calibri" pitchFamily="34" charset="-120"/>
               </a:rPr>
-              <a:t>to request or inquire</a:t>
+              <a:t>again</a:t>
             </a:r>
             <a:endParaRPr lang="en-US" sz="850" dirty="0"/>
           </a:p>
@@ -22518,7 +23394,7 @@
         </p:nvSpPr>
         <p:spPr>
           <a:xfrm>
-            <a:off x="5803392" y="2258568"/>
+            <a:off x="4370832" y="2258568"/>
             <a:ext cx="1828800" cy="292608"/>
           </a:xfrm>
           <a:prstGeom prst="rect">
@@ -22527,11 +23403,11 @@
             </a:avLst>
           </a:prstGeom>
           <a:solidFill>
-            <a:srgbClr val="FCE7F3"/>
+            <a:srgbClr val="CCFBF1"/>
           </a:solidFill>
           <a:ln w="19050">
             <a:solidFill>
-              <a:srgbClr val="DB2777"/>
+              <a:srgbClr val="0D9488"/>
             </a:solidFill>
             <a:prstDash val="solid"/>
           </a:ln>
@@ -22552,7 +23428,7 @@
         </p:nvSpPr>
         <p:spPr>
           <a:xfrm>
-            <a:off x="5803392" y="2258568"/>
+            <a:off x="4370832" y="2258568"/>
             <a:ext cx="1828800" cy="292608"/>
           </a:xfrm>
           <a:prstGeom prst="rect">
@@ -22571,13 +23447,13 @@
             <a:r>
               <a:rPr lang="en-US" sz="1300" b="1" dirty="0">
                 <a:solidFill>
-                  <a:srgbClr val="9D174D"/>
+                  <a:srgbClr val="0F766E"/>
                 </a:solidFill>
                 <a:latin typeface="Trebuchet MS" pitchFamily="34" charset="0"/>
                 <a:ea typeface="Trebuchet MS" pitchFamily="34" charset="-122"/>
                 <a:cs typeface="Trebuchet MS" pitchFamily="34" charset="-120"/>
               </a:rPr>
-              <a:t>ed</a:t>
+              <a:t>ask</a:t>
             </a:r>
             <a:endParaRPr lang="en-US" sz="1300" dirty="0"/>
           </a:p>
@@ -22591,7 +23467,7 @@
         </p:nvSpPr>
         <p:spPr>
           <a:xfrm>
-            <a:off x="5803392" y="2569464"/>
+            <a:off x="4370832" y="2569464"/>
             <a:ext cx="1828800" cy="201168"/>
           </a:xfrm>
           <a:prstGeom prst="rect">
@@ -22616,6 +23492,118 @@
                 <a:ea typeface="Calibri" pitchFamily="34" charset="-122"/>
                 <a:cs typeface="Calibri" pitchFamily="34" charset="-120"/>
               </a:rPr>
+              <a:t>to request or inquire</a:t>
+            </a:r>
+            <a:endParaRPr lang="en-US" sz="850" dirty="0"/>
+          </a:p>
+        </p:txBody>
+      </p:sp>
+      <p:sp>
+        <p:nvSpPr>
+          <p:cNvPr id="22" name="Shape 20"/>
+          <p:cNvSpPr/>
+          <p:nvPr/>
+        </p:nvSpPr>
+        <p:spPr>
+          <a:xfrm>
+            <a:off x="6519672" y="2258568"/>
+            <a:ext cx="1828800" cy="292608"/>
+          </a:xfrm>
+          <a:prstGeom prst="rect">
+            <a:avLst>
+              <a:gd name="adj" fmla="val 25000"/>
+            </a:avLst>
+          </a:prstGeom>
+          <a:solidFill>
+            <a:srgbClr val="FCE7F3"/>
+          </a:solidFill>
+          <a:ln w="19050">
+            <a:solidFill>
+              <a:srgbClr val="DB2777"/>
+            </a:solidFill>
+            <a:prstDash val="solid"/>
+          </a:ln>
+          <a:effectLst>
+            <a:outerShdw sx="100000" sy="100000" kx="0" ky="0" algn="bl" rotWithShape="0" blurRad="101600" dist="38100" dir="8100000">
+              <a:srgbClr val="000000">
+                <a:alpha val="12000"/>
+              </a:srgbClr>
+            </a:outerShdw>
+          </a:effectLst>
+        </p:spPr>
+      </p:sp>
+      <p:sp>
+        <p:nvSpPr>
+          <p:cNvPr id="23" name="Text 21"/>
+          <p:cNvSpPr/>
+          <p:nvPr/>
+        </p:nvSpPr>
+        <p:spPr>
+          <a:xfrm>
+            <a:off x="6519672" y="2258568"/>
+            <a:ext cx="1828800" cy="292608"/>
+          </a:xfrm>
+          <a:prstGeom prst="rect">
+            <a:avLst/>
+          </a:prstGeom>
+          <a:noFill/>
+          <a:ln/>
+        </p:spPr>
+        <p:txBody>
+          <a:bodyPr wrap="square" lIns="0" tIns="0" rIns="0" bIns="0" rtlCol="0" anchor="ctr"/>
+          <a:lstStyle/>
+          <a:p>
+            <a:pPr algn="ctr" indent="0" marL="0">
+              <a:buNone/>
+            </a:pPr>
+            <a:r>
+              <a:rPr lang="en-US" sz="1300" b="1" dirty="0">
+                <a:solidFill>
+                  <a:srgbClr val="9D174D"/>
+                </a:solidFill>
+                <a:latin typeface="Trebuchet MS" pitchFamily="34" charset="0"/>
+                <a:ea typeface="Trebuchet MS" pitchFamily="34" charset="-122"/>
+                <a:cs typeface="Trebuchet MS" pitchFamily="34" charset="-120"/>
+              </a:rPr>
+              <a:t>ed</a:t>
+            </a:r>
+            <a:endParaRPr lang="en-US" sz="1300" dirty="0"/>
+          </a:p>
+        </p:txBody>
+      </p:sp>
+      <p:sp>
+        <p:nvSpPr>
+          <p:cNvPr id="24" name="Text 22"/>
+          <p:cNvSpPr/>
+          <p:nvPr/>
+        </p:nvSpPr>
+        <p:spPr>
+          <a:xfrm>
+            <a:off x="6519672" y="2569464"/>
+            <a:ext cx="1828800" cy="201168"/>
+          </a:xfrm>
+          <a:prstGeom prst="rect">
+            <a:avLst/>
+          </a:prstGeom>
+          <a:noFill/>
+          <a:ln/>
+        </p:spPr>
+        <p:txBody>
+          <a:bodyPr wrap="square" lIns="0" tIns="0" rIns="0" bIns="0" rtlCol="0" anchor="t"/>
+          <a:lstStyle/>
+          <a:p>
+            <a:pPr algn="ctr" indent="0" marL="0">
+              <a:buNone/>
+            </a:pPr>
+            <a:r>
+              <a:rPr lang="en-US" sz="850" dirty="0">
+                <a:solidFill>
+                  <a:srgbClr val="475569"/>
+                </a:solidFill>
+                <a:latin typeface="Calibri" pitchFamily="34" charset="0"/>
+                <a:ea typeface="Calibri" pitchFamily="34" charset="-122"/>
+                <a:cs typeface="Calibri" pitchFamily="34" charset="-120"/>
+              </a:rPr>
               <a:t>past tense</a:t>
             </a:r>
             <a:endParaRPr lang="en-US" sz="850" dirty="0"/>
@@ -22624,7 +23612,7 @@
       </p:sp>
       <p:sp>
         <p:nvSpPr>
-          <p:cNvPr id="22" name="Shape 20"/>
+          <p:cNvPr id="25" name="Shape 23"/>
           <p:cNvSpPr/>
           <p:nvPr/>
         </p:nvSpPr>
@@ -22651,7 +23639,7 @@
       </p:sp>
       <p:sp>
         <p:nvSpPr>
-          <p:cNvPr id="23" name="Text 21"/>
+          <p:cNvPr id="26" name="Text 24"/>
           <p:cNvSpPr/>
           <p:nvPr/>
         </p:nvSpPr>
@@ -22690,7 +23678,7 @@
       </p:sp>
       <p:sp>
         <p:nvSpPr>
-          <p:cNvPr id="24" name="Shape 22"/>
+          <p:cNvPr id="27" name="Shape 25"/>
           <p:cNvSpPr/>
           <p:nvPr/>
         </p:nvSpPr>
@@ -22717,7 +23705,7 @@
       </p:sp>
       <p:sp>
         <p:nvSpPr>
-          <p:cNvPr id="25" name="Text 23"/>
+          <p:cNvPr id="28" name="Text 26"/>
           <p:cNvSpPr/>
           <p:nvPr/>
         </p:nvSpPr>
@@ -22756,7 +23744,7 @@
       </p:sp>
       <p:sp>
         <p:nvSpPr>
-          <p:cNvPr id="26" name="Shape 24"/>
+          <p:cNvPr id="29" name="Shape 27"/>
           <p:cNvSpPr/>
           <p:nvPr/>
         </p:nvSpPr>
@@ -22783,7 +23771,7 @@
       </p:sp>
       <p:sp>
         <p:nvSpPr>
-          <p:cNvPr id="27" name="Text 25"/>
+          <p:cNvPr id="30" name="Text 28"/>
           <p:cNvSpPr/>
           <p:nvPr/>
         </p:nvSpPr>
@@ -22822,7 +23810,7 @@
       </p:sp>
       <p:sp>
         <p:nvSpPr>
-          <p:cNvPr id="28" name="Shape 26"/>
+          <p:cNvPr id="31" name="Shape 29"/>
           <p:cNvSpPr/>
           <p:nvPr/>
         </p:nvSpPr>
@@ -22849,7 +23837,7 @@
       </p:sp>
       <p:sp>
         <p:nvSpPr>
-          <p:cNvPr id="29" name="Text 27"/>
+          <p:cNvPr id="32" name="Text 30"/>
           <p:cNvSpPr/>
           <p:nvPr/>
         </p:nvSpPr>
@@ -24030,7 +25018,7 @@
                 <a:ea typeface="Trebuchet MS" pitchFamily="34" charset="-122"/>
                 <a:cs typeface="Trebuchet MS" pitchFamily="34" charset="-120"/>
               </a:rPr>
-              <a:t>asked</a:t>
+              <a:t>reasked</a:t>
             </a:r>
             <a:endParaRPr lang="en-US" sz="2800" dirty="0"/>
           </a:p>
@@ -24110,7 +25098,7 @@
         </p:nvSpPr>
         <p:spPr>
           <a:xfrm>
-            <a:off x="2938272" y="2258568"/>
+            <a:off x="2221992" y="2258568"/>
             <a:ext cx="1828800" cy="292608"/>
           </a:xfrm>
           <a:prstGeom prst="rect">
@@ -24119,11 +25107,11 @@
             </a:avLst>
           </a:prstGeom>
           <a:solidFill>
-            <a:srgbClr val="CCFBF1"/>
+            <a:srgbClr val="DDD6FE"/>
           </a:solidFill>
           <a:ln w="19050">
             <a:solidFill>
-              <a:srgbClr val="0D9488"/>
+              <a:srgbClr val="7C3AED"/>
             </a:solidFill>
             <a:prstDash val="solid"/>
           </a:ln>
@@ -24144,7 +25132,7 @@
         </p:nvSpPr>
         <p:spPr>
           <a:xfrm>
-            <a:off x="2938272" y="2258568"/>
+            <a:off x="2221992" y="2258568"/>
             <a:ext cx="1828800" cy="292608"/>
           </a:xfrm>
           <a:prstGeom prst="rect">
@@ -24163,13 +25151,13 @@
             <a:r>
               <a:rPr lang="en-US" sz="1300" b="1" dirty="0">
                 <a:solidFill>
-                  <a:srgbClr val="0F766E"/>
+                  <a:srgbClr val="4C1D95"/>
                 </a:solidFill>
                 <a:latin typeface="Trebuchet MS" pitchFamily="34" charset="0"/>
                 <a:ea typeface="Trebuchet MS" pitchFamily="34" charset="-122"/>
                 <a:cs typeface="Trebuchet MS" pitchFamily="34" charset="-120"/>
               </a:rPr>
-              <a:t>ask</a:t>
+              <a:t>re</a:t>
             </a:r>
             <a:endParaRPr lang="en-US" sz="1300" dirty="0"/>
           </a:p>
@@ -24183,7 +25171,7 @@
         </p:nvSpPr>
         <p:spPr>
           <a:xfrm>
-            <a:off x="2938272" y="2569464"/>
+            <a:off x="2221992" y="2569464"/>
             <a:ext cx="1828800" cy="201168"/>
           </a:xfrm>
           <a:prstGeom prst="rect">
@@ -24208,7 +25196,7 @@
                 <a:ea typeface="Calibri" pitchFamily="34" charset="-122"/>
                 <a:cs typeface="Calibri" pitchFamily="34" charset="-120"/>
               </a:rPr>
-              <a:t>to request or inquire</a:t>
+              <a:t>again</a:t>
             </a:r>
             <a:endParaRPr lang="en-US" sz="850" dirty="0"/>
           </a:p>
@@ -24222,7 +25210,7 @@
         </p:nvSpPr>
         <p:spPr>
           <a:xfrm>
-            <a:off x="5803392" y="2258568"/>
+            <a:off x="4370832" y="2258568"/>
             <a:ext cx="1828800" cy="292608"/>
           </a:xfrm>
           <a:prstGeom prst="rect">
@@ -24231,11 +25219,11 @@
             </a:avLst>
           </a:prstGeom>
           <a:solidFill>
-            <a:srgbClr val="FCE7F3"/>
+            <a:srgbClr val="CCFBF1"/>
           </a:solidFill>
           <a:ln w="19050">
             <a:solidFill>
-              <a:srgbClr val="DB2777"/>
+              <a:srgbClr val="0D9488"/>
             </a:solidFill>
             <a:prstDash val="solid"/>
           </a:ln>
@@ -24256,7 +25244,7 @@
         </p:nvSpPr>
         <p:spPr>
           <a:xfrm>
-            <a:off x="5803392" y="2258568"/>
+            <a:off x="4370832" y="2258568"/>
             <a:ext cx="1828800" cy="292608"/>
           </a:xfrm>
           <a:prstGeom prst="rect">
@@ -24275,13 +25263,13 @@
             <a:r>
               <a:rPr lang="en-US" sz="1300" b="1" dirty="0">
                 <a:solidFill>
-                  <a:srgbClr val="9D174D"/>
+                  <a:srgbClr val="0F766E"/>
                 </a:solidFill>
                 <a:latin typeface="Trebuchet MS" pitchFamily="34" charset="0"/>
                 <a:ea typeface="Trebuchet MS" pitchFamily="34" charset="-122"/>
                 <a:cs typeface="Trebuchet MS" pitchFamily="34" charset="-120"/>
               </a:rPr>
-              <a:t>ed</a:t>
+              <a:t>ask</a:t>
             </a:r>
             <a:endParaRPr lang="en-US" sz="1300" dirty="0"/>
           </a:p>
@@ -24295,7 +25283,7 @@
         </p:nvSpPr>
         <p:spPr>
           <a:xfrm>
-            <a:off x="5803392" y="2569464"/>
+            <a:off x="4370832" y="2569464"/>
             <a:ext cx="1828800" cy="201168"/>
           </a:xfrm>
           <a:prstGeom prst="rect">
@@ -24320,6 +25308,118 @@
                 <a:ea typeface="Calibri" pitchFamily="34" charset="-122"/>
                 <a:cs typeface="Calibri" pitchFamily="34" charset="-120"/>
               </a:rPr>
+              <a:t>to request or inquire</a:t>
+            </a:r>
+            <a:endParaRPr lang="en-US" sz="850" dirty="0"/>
+          </a:p>
+        </p:txBody>
+      </p:sp>
+      <p:sp>
+        <p:nvSpPr>
+          <p:cNvPr id="22" name="Shape 20"/>
+          <p:cNvSpPr/>
+          <p:nvPr/>
+        </p:nvSpPr>
+        <p:spPr>
+          <a:xfrm>
+            <a:off x="6519672" y="2258568"/>
+            <a:ext cx="1828800" cy="292608"/>
+          </a:xfrm>
+          <a:prstGeom prst="rect">
+            <a:avLst>
+              <a:gd name="adj" fmla="val 25000"/>
+            </a:avLst>
+          </a:prstGeom>
+          <a:solidFill>
+            <a:srgbClr val="FCE7F3"/>
+          </a:solidFill>
+          <a:ln w="19050">
+            <a:solidFill>
+              <a:srgbClr val="DB2777"/>
+            </a:solidFill>
+            <a:prstDash val="solid"/>
+          </a:ln>
+          <a:effectLst>
+            <a:outerShdw sx="100000" sy="100000" kx="0" ky="0" algn="bl" rotWithShape="0" blurRad="101600" dist="38100" dir="8100000">
+              <a:srgbClr val="000000">
+                <a:alpha val="12000"/>
+              </a:srgbClr>
+            </a:outerShdw>
+          </a:effectLst>
+        </p:spPr>
+      </p:sp>
+      <p:sp>
+        <p:nvSpPr>
+          <p:cNvPr id="23" name="Text 21"/>
+          <p:cNvSpPr/>
+          <p:nvPr/>
+        </p:nvSpPr>
+        <p:spPr>
+          <a:xfrm>
+            <a:off x="6519672" y="2258568"/>
+            <a:ext cx="1828800" cy="292608"/>
+          </a:xfrm>
+          <a:prstGeom prst="rect">
+            <a:avLst/>
+          </a:prstGeom>
+          <a:noFill/>
+          <a:ln/>
+        </p:spPr>
+        <p:txBody>
+          <a:bodyPr wrap="square" lIns="0" tIns="0" rIns="0" bIns="0" rtlCol="0" anchor="ctr"/>
+          <a:lstStyle/>
+          <a:p>
+            <a:pPr algn="ctr" indent="0" marL="0">
+              <a:buNone/>
+            </a:pPr>
+            <a:r>
+              <a:rPr lang="en-US" sz="1300" b="1" dirty="0">
+                <a:solidFill>
+                  <a:srgbClr val="9D174D"/>
+                </a:solidFill>
+                <a:latin typeface="Trebuchet MS" pitchFamily="34" charset="0"/>
+                <a:ea typeface="Trebuchet MS" pitchFamily="34" charset="-122"/>
+                <a:cs typeface="Trebuchet MS" pitchFamily="34" charset="-120"/>
+              </a:rPr>
+              <a:t>ed</a:t>
+            </a:r>
+            <a:endParaRPr lang="en-US" sz="1300" dirty="0"/>
+          </a:p>
+        </p:txBody>
+      </p:sp>
+      <p:sp>
+        <p:nvSpPr>
+          <p:cNvPr id="24" name="Text 22"/>
+          <p:cNvSpPr/>
+          <p:nvPr/>
+        </p:nvSpPr>
+        <p:spPr>
+          <a:xfrm>
+            <a:off x="6519672" y="2569464"/>
+            <a:ext cx="1828800" cy="201168"/>
+          </a:xfrm>
+          <a:prstGeom prst="rect">
+            <a:avLst/>
+          </a:prstGeom>
+          <a:noFill/>
+          <a:ln/>
+        </p:spPr>
+        <p:txBody>
+          <a:bodyPr wrap="square" lIns="0" tIns="0" rIns="0" bIns="0" rtlCol="0" anchor="t"/>
+          <a:lstStyle/>
+          <a:p>
+            <a:pPr algn="ctr" indent="0" marL="0">
+              <a:buNone/>
+            </a:pPr>
+            <a:r>
+              <a:rPr lang="en-US" sz="850" dirty="0">
+                <a:solidFill>
+                  <a:srgbClr val="475569"/>
+                </a:solidFill>
+                <a:latin typeface="Calibri" pitchFamily="34" charset="0"/>
+                <a:ea typeface="Calibri" pitchFamily="34" charset="-122"/>
+                <a:cs typeface="Calibri" pitchFamily="34" charset="-120"/>
+              </a:rPr>
               <a:t>past tense</a:t>
             </a:r>
             <a:endParaRPr lang="en-US" sz="850" dirty="0"/>
@@ -24328,7 +25428,7 @@
       </p:sp>
       <p:sp>
         <p:nvSpPr>
-          <p:cNvPr id="22" name="Shape 20"/>
+          <p:cNvPr id="25" name="Shape 23"/>
           <p:cNvSpPr/>
           <p:nvPr/>
         </p:nvSpPr>
@@ -24355,7 +25455,7 @@
       </p:sp>
       <p:sp>
         <p:nvSpPr>
-          <p:cNvPr id="23" name="Text 21"/>
+          <p:cNvPr id="26" name="Text 24"/>
           <p:cNvSpPr/>
           <p:nvPr/>
         </p:nvSpPr>
@@ -24394,7 +25494,7 @@
       </p:sp>
       <p:sp>
         <p:nvSpPr>
-          <p:cNvPr id="24" name="Shape 22"/>
+          <p:cNvPr id="27" name="Shape 25"/>
           <p:cNvSpPr/>
           <p:nvPr/>
         </p:nvSpPr>
@@ -24421,13 +25521,13 @@
       </p:sp>
       <p:sp>
         <p:nvSpPr>
-          <p:cNvPr id="25" name="Shape 23"/>
-          <p:cNvSpPr/>
-          <p:nvPr/>
-        </p:nvSpPr>
-        <p:spPr>
-          <a:xfrm>
-            <a:off x="4370832" y="3364992"/>
+          <p:cNvPr id="28" name="Shape 26"/>
+          <p:cNvSpPr/>
+          <p:nvPr/>
+        </p:nvSpPr>
+        <p:spPr>
+          <a:xfrm>
+            <a:off x="2999232" y="3364992"/>
             <a:ext cx="1645920" cy="475488"/>
           </a:xfrm>
           <a:prstGeom prst="rect">
@@ -24448,13 +25548,13 @@
       </p:sp>
       <p:sp>
         <p:nvSpPr>
-          <p:cNvPr id="26" name="Text 24"/>
-          <p:cNvSpPr/>
-          <p:nvPr/>
-        </p:nvSpPr>
-        <p:spPr>
-          <a:xfrm>
-            <a:off x="4370832" y="3364992"/>
+          <p:cNvPr id="29" name="Text 27"/>
+          <p:cNvSpPr/>
+          <p:nvPr/>
+        </p:nvSpPr>
+        <p:spPr>
+          <a:xfrm>
+            <a:off x="2999232" y="3364992"/>
             <a:ext cx="1645920" cy="475488"/>
           </a:xfrm>
           <a:prstGeom prst="rect">
@@ -24479,6 +25579,111 @@
                 <a:ea typeface="Trebuchet MS" pitchFamily="34" charset="-122"/>
                 <a:cs typeface="Trebuchet MS" pitchFamily="34" charset="-120"/>
               </a:rPr>
+              <a:t>re</a:t>
+            </a:r>
+            <a:endParaRPr lang="en-US" sz="1400" dirty="0"/>
+          </a:p>
+        </p:txBody>
+      </p:sp>
+      <p:sp>
+        <p:nvSpPr>
+          <p:cNvPr id="30" name="Text 28"/>
+          <p:cNvSpPr/>
+          <p:nvPr/>
+        </p:nvSpPr>
+        <p:spPr>
+          <a:xfrm>
+            <a:off x="4645152" y="3364992"/>
+            <a:ext cx="1097280" cy="475488"/>
+          </a:xfrm>
+          <a:prstGeom prst="rect">
+            <a:avLst/>
+          </a:prstGeom>
+          <a:noFill/>
+          <a:ln/>
+        </p:spPr>
+        <p:txBody>
+          <a:bodyPr wrap="square" lIns="0" tIns="0" rIns="0" bIns="0" rtlCol="0" anchor="ctr"/>
+          <a:lstStyle/>
+          <a:p>
+            <a:pPr algn="ctr" indent="0" marL="0">
+              <a:buNone/>
+            </a:pPr>
+            <a:r>
+              <a:rPr lang="en-US" sz="1600" b="1" dirty="0">
+                <a:solidFill>
+                  <a:srgbClr val="0D9488"/>
+                </a:solidFill>
+                <a:latin typeface="Trebuchet MS" pitchFamily="34" charset="0"/>
+                <a:ea typeface="Trebuchet MS" pitchFamily="34" charset="-122"/>
+                <a:cs typeface="Trebuchet MS" pitchFamily="34" charset="-120"/>
+              </a:rPr>
+              <a:t>·</a:t>
+            </a:r>
+            <a:endParaRPr lang="en-US" sz="1600" dirty="0"/>
+          </a:p>
+        </p:txBody>
+      </p:sp>
+      <p:sp>
+        <p:nvSpPr>
+          <p:cNvPr id="31" name="Shape 29"/>
+          <p:cNvSpPr/>
+          <p:nvPr/>
+        </p:nvSpPr>
+        <p:spPr>
+          <a:xfrm>
+            <a:off x="5742432" y="3364992"/>
+            <a:ext cx="1645920" cy="475488"/>
+          </a:xfrm>
+          <a:prstGeom prst="rect">
+            <a:avLst>
+              <a:gd name="adj" fmla="val 9615"/>
+            </a:avLst>
+          </a:prstGeom>
+          <a:solidFill>
+            <a:srgbClr val="FFFFFF"/>
+          </a:solidFill>
+          <a:ln w="12700">
+            <a:solidFill>
+              <a:srgbClr val="0D9488"/>
+            </a:solidFill>
+            <a:prstDash val="solid"/>
+          </a:ln>
+        </p:spPr>
+      </p:sp>
+      <p:sp>
+        <p:nvSpPr>
+          <p:cNvPr id="32" name="Text 30"/>
+          <p:cNvSpPr/>
+          <p:nvPr/>
+        </p:nvSpPr>
+        <p:spPr>
+          <a:xfrm>
+            <a:off x="5742432" y="3364992"/>
+            <a:ext cx="1645920" cy="475488"/>
+          </a:xfrm>
+          <a:prstGeom prst="rect">
+            <a:avLst/>
+          </a:prstGeom>
+          <a:noFill/>
+          <a:ln/>
+        </p:spPr>
+        <p:txBody>
+          <a:bodyPr wrap="square" lIns="0" tIns="0" rIns="0" bIns="0" rtlCol="0" anchor="ctr"/>
+          <a:lstStyle/>
+          <a:p>
+            <a:pPr algn="ctr" indent="0" marL="0">
+              <a:buNone/>
+            </a:pPr>
+            <a:r>
+              <a:rPr lang="en-US" sz="1400" b="1" dirty="0">
+                <a:solidFill>
+                  <a:srgbClr val="0D9488"/>
+                </a:solidFill>
+                <a:latin typeface="Trebuchet MS" pitchFamily="34" charset="0"/>
+                <a:ea typeface="Trebuchet MS" pitchFamily="34" charset="-122"/>
+                <a:cs typeface="Trebuchet MS" pitchFamily="34" charset="-120"/>
+              </a:rPr>
               <a:t>asked</a:t>
             </a:r>
             <a:endParaRPr lang="en-US" sz="1400" dirty="0"/>
@@ -24487,7 +25692,7 @@
       </p:sp>
       <p:sp>
         <p:nvSpPr>
-          <p:cNvPr id="27" name="Shape 25"/>
+          <p:cNvPr id="33" name="Shape 31"/>
           <p:cNvSpPr/>
           <p:nvPr/>
         </p:nvSpPr>
@@ -24514,7 +25719,7 @@
       </p:sp>
       <p:sp>
         <p:nvSpPr>
-          <p:cNvPr id="28" name="Text 26"/>
+          <p:cNvPr id="34" name="Text 32"/>
           <p:cNvSpPr/>
           <p:nvPr/>
         </p:nvSpPr>
@@ -24553,7 +25758,7 @@
       </p:sp>
       <p:sp>
         <p:nvSpPr>
-          <p:cNvPr id="29" name="Shape 27"/>
+          <p:cNvPr id="35" name="Shape 33"/>
           <p:cNvSpPr/>
           <p:nvPr/>
         </p:nvSpPr>
@@ -24580,7 +25785,7 @@
       </p:sp>
       <p:sp>
         <p:nvSpPr>
-          <p:cNvPr id="30" name="Text 28"/>
+          <p:cNvPr id="36" name="Text 34"/>
           <p:cNvSpPr/>
           <p:nvPr/>
         </p:nvSpPr>
@@ -25042,7 +26247,7 @@
                 <a:ea typeface="Trebuchet MS" pitchFamily="34" charset="-122"/>
                 <a:cs typeface="Trebuchet MS" pitchFamily="34" charset="-120"/>
               </a:rPr>
-              <a:t>asked</a:t>
+              <a:t>reasked</a:t>
             </a:r>
             <a:endParaRPr lang="en-US" sz="2800" dirty="0"/>
           </a:p>
@@ -25122,7 +26327,7 @@
         </p:nvSpPr>
         <p:spPr>
           <a:xfrm>
-            <a:off x="2938272" y="2258568"/>
+            <a:off x="2221992" y="2258568"/>
             <a:ext cx="1828800" cy="292608"/>
           </a:xfrm>
           <a:prstGeom prst="rect">
@@ -25131,11 +26336,11 @@
             </a:avLst>
           </a:prstGeom>
           <a:solidFill>
-            <a:srgbClr val="CCFBF1"/>
+            <a:srgbClr val="DDD6FE"/>
           </a:solidFill>
           <a:ln w="19050">
             <a:solidFill>
-              <a:srgbClr val="0D9488"/>
+              <a:srgbClr val="7C3AED"/>
             </a:solidFill>
             <a:prstDash val="solid"/>
           </a:ln>
@@ -25156,7 +26361,7 @@
         </p:nvSpPr>
         <p:spPr>
           <a:xfrm>
-            <a:off x="2938272" y="2258568"/>
+            <a:off x="2221992" y="2258568"/>
             <a:ext cx="1828800" cy="292608"/>
           </a:xfrm>
           <a:prstGeom prst="rect">
@@ -25175,13 +26380,13 @@
             <a:r>
               <a:rPr lang="en-US" sz="1300" b="1" dirty="0">
                 <a:solidFill>
-                  <a:srgbClr val="0F766E"/>
+                  <a:srgbClr val="4C1D95"/>
                 </a:solidFill>
                 <a:latin typeface="Trebuchet MS" pitchFamily="34" charset="0"/>
                 <a:ea typeface="Trebuchet MS" pitchFamily="34" charset="-122"/>
                 <a:cs typeface="Trebuchet MS" pitchFamily="34" charset="-120"/>
               </a:rPr>
-              <a:t>ask</a:t>
+              <a:t>re</a:t>
             </a:r>
             <a:endParaRPr lang="en-US" sz="1300" dirty="0"/>
           </a:p>
@@ -25195,7 +26400,7 @@
         </p:nvSpPr>
         <p:spPr>
           <a:xfrm>
-            <a:off x="2938272" y="2569464"/>
+            <a:off x="2221992" y="2569464"/>
             <a:ext cx="1828800" cy="201168"/>
           </a:xfrm>
           <a:prstGeom prst="rect">
@@ -25220,7 +26425,7 @@
                 <a:ea typeface="Calibri" pitchFamily="34" charset="-122"/>
                 <a:cs typeface="Calibri" pitchFamily="34" charset="-120"/>
               </a:rPr>
-              <a:t>to request or inquire</a:t>
+              <a:t>again</a:t>
             </a:r>
             <a:endParaRPr lang="en-US" sz="850" dirty="0"/>
           </a:p>
@@ -25234,7 +26439,7 @@
         </p:nvSpPr>
         <p:spPr>
           <a:xfrm>
-            <a:off x="5803392" y="2258568"/>
+            <a:off x="4370832" y="2258568"/>
             <a:ext cx="1828800" cy="292608"/>
           </a:xfrm>
           <a:prstGeom prst="rect">
@@ -25243,11 +26448,11 @@
             </a:avLst>
           </a:prstGeom>
           <a:solidFill>
-            <a:srgbClr val="FCE7F3"/>
+            <a:srgbClr val="CCFBF1"/>
           </a:solidFill>
           <a:ln w="19050">
             <a:solidFill>
-              <a:srgbClr val="DB2777"/>
+              <a:srgbClr val="0D9488"/>
             </a:solidFill>
             <a:prstDash val="solid"/>
           </a:ln>
@@ -25268,7 +26473,7 @@
         </p:nvSpPr>
         <p:spPr>
           <a:xfrm>
-            <a:off x="5803392" y="2258568"/>
+            <a:off x="4370832" y="2258568"/>
             <a:ext cx="1828800" cy="292608"/>
           </a:xfrm>
           <a:prstGeom prst="rect">
@@ -25287,13 +26492,13 @@
             <a:r>
               <a:rPr lang="en-US" sz="1300" b="1" dirty="0">
                 <a:solidFill>
-                  <a:srgbClr val="9D174D"/>
+                  <a:srgbClr val="0F766E"/>
                 </a:solidFill>
                 <a:latin typeface="Trebuchet MS" pitchFamily="34" charset="0"/>
                 <a:ea typeface="Trebuchet MS" pitchFamily="34" charset="-122"/>
                 <a:cs typeface="Trebuchet MS" pitchFamily="34" charset="-120"/>
               </a:rPr>
-              <a:t>ed</a:t>
+              <a:t>ask</a:t>
             </a:r>
             <a:endParaRPr lang="en-US" sz="1300" dirty="0"/>
           </a:p>
@@ -25307,7 +26512,7 @@
         </p:nvSpPr>
         <p:spPr>
           <a:xfrm>
-            <a:off x="5803392" y="2569464"/>
+            <a:off x="4370832" y="2569464"/>
             <a:ext cx="1828800" cy="201168"/>
           </a:xfrm>
           <a:prstGeom prst="rect">
@@ -25332,6 +26537,118 @@
                 <a:ea typeface="Calibri" pitchFamily="34" charset="-122"/>
                 <a:cs typeface="Calibri" pitchFamily="34" charset="-120"/>
               </a:rPr>
+              <a:t>to request or inquire</a:t>
+            </a:r>
+            <a:endParaRPr lang="en-US" sz="850" dirty="0"/>
+          </a:p>
+        </p:txBody>
+      </p:sp>
+      <p:sp>
+        <p:nvSpPr>
+          <p:cNvPr id="22" name="Shape 20"/>
+          <p:cNvSpPr/>
+          <p:nvPr/>
+        </p:nvSpPr>
+        <p:spPr>
+          <a:xfrm>
+            <a:off x="6519672" y="2258568"/>
+            <a:ext cx="1828800" cy="292608"/>
+          </a:xfrm>
+          <a:prstGeom prst="rect">
+            <a:avLst>
+              <a:gd name="adj" fmla="val 25000"/>
+            </a:avLst>
+          </a:prstGeom>
+          <a:solidFill>
+            <a:srgbClr val="FCE7F3"/>
+          </a:solidFill>
+          <a:ln w="19050">
+            <a:solidFill>
+              <a:srgbClr val="DB2777"/>
+            </a:solidFill>
+            <a:prstDash val="solid"/>
+          </a:ln>
+          <a:effectLst>
+            <a:outerShdw sx="100000" sy="100000" kx="0" ky="0" algn="bl" rotWithShape="0" blurRad="101600" dist="38100" dir="8100000">
+              <a:srgbClr val="000000">
+                <a:alpha val="12000"/>
+              </a:srgbClr>
+            </a:outerShdw>
+          </a:effectLst>
+        </p:spPr>
+      </p:sp>
+      <p:sp>
+        <p:nvSpPr>
+          <p:cNvPr id="23" name="Text 21"/>
+          <p:cNvSpPr/>
+          <p:nvPr/>
+        </p:nvSpPr>
+        <p:spPr>
+          <a:xfrm>
+            <a:off x="6519672" y="2258568"/>
+            <a:ext cx="1828800" cy="292608"/>
+          </a:xfrm>
+          <a:prstGeom prst="rect">
+            <a:avLst/>
+          </a:prstGeom>
+          <a:noFill/>
+          <a:ln/>
+        </p:spPr>
+        <p:txBody>
+          <a:bodyPr wrap="square" lIns="0" tIns="0" rIns="0" bIns="0" rtlCol="0" anchor="ctr"/>
+          <a:lstStyle/>
+          <a:p>
+            <a:pPr algn="ctr" indent="0" marL="0">
+              <a:buNone/>
+            </a:pPr>
+            <a:r>
+              <a:rPr lang="en-US" sz="1300" b="1" dirty="0">
+                <a:solidFill>
+                  <a:srgbClr val="9D174D"/>
+                </a:solidFill>
+                <a:latin typeface="Trebuchet MS" pitchFamily="34" charset="0"/>
+                <a:ea typeface="Trebuchet MS" pitchFamily="34" charset="-122"/>
+                <a:cs typeface="Trebuchet MS" pitchFamily="34" charset="-120"/>
+              </a:rPr>
+              <a:t>ed</a:t>
+            </a:r>
+            <a:endParaRPr lang="en-US" sz="1300" dirty="0"/>
+          </a:p>
+        </p:txBody>
+      </p:sp>
+      <p:sp>
+        <p:nvSpPr>
+          <p:cNvPr id="24" name="Text 22"/>
+          <p:cNvSpPr/>
+          <p:nvPr/>
+        </p:nvSpPr>
+        <p:spPr>
+          <a:xfrm>
+            <a:off x="6519672" y="2569464"/>
+            <a:ext cx="1828800" cy="201168"/>
+          </a:xfrm>
+          <a:prstGeom prst="rect">
+            <a:avLst/>
+          </a:prstGeom>
+          <a:noFill/>
+          <a:ln/>
+        </p:spPr>
+        <p:txBody>
+          <a:bodyPr wrap="square" lIns="0" tIns="0" rIns="0" bIns="0" rtlCol="0" anchor="t"/>
+          <a:lstStyle/>
+          <a:p>
+            <a:pPr algn="ctr" indent="0" marL="0">
+              <a:buNone/>
+            </a:pPr>
+            <a:r>
+              <a:rPr lang="en-US" sz="850" dirty="0">
+                <a:solidFill>
+                  <a:srgbClr val="475569"/>
+                </a:solidFill>
+                <a:latin typeface="Calibri" pitchFamily="34" charset="0"/>
+                <a:ea typeface="Calibri" pitchFamily="34" charset="-122"/>
+                <a:cs typeface="Calibri" pitchFamily="34" charset="-120"/>
+              </a:rPr>
               <a:t>past tense</a:t>
             </a:r>
             <a:endParaRPr lang="en-US" sz="850" dirty="0"/>
@@ -25340,7 +26657,7 @@
       </p:sp>
       <p:sp>
         <p:nvSpPr>
-          <p:cNvPr id="22" name="Shape 20"/>
+          <p:cNvPr id="25" name="Shape 23"/>
           <p:cNvSpPr/>
           <p:nvPr/>
         </p:nvSpPr>
@@ -25367,7 +26684,7 @@
       </p:sp>
       <p:sp>
         <p:nvSpPr>
-          <p:cNvPr id="23" name="Text 21"/>
+          <p:cNvPr id="26" name="Text 24"/>
           <p:cNvSpPr/>
           <p:nvPr/>
         </p:nvSpPr>
@@ -25406,7 +26723,7 @@
       </p:sp>
       <p:sp>
         <p:nvSpPr>
-          <p:cNvPr id="24" name="Shape 22"/>
+          <p:cNvPr id="27" name="Shape 25"/>
           <p:cNvSpPr/>
           <p:nvPr/>
         </p:nvSpPr>
@@ -25433,13 +26750,13 @@
       </p:sp>
       <p:sp>
         <p:nvSpPr>
-          <p:cNvPr id="25" name="Shape 23"/>
-          <p:cNvSpPr/>
-          <p:nvPr/>
-        </p:nvSpPr>
-        <p:spPr>
-          <a:xfrm>
-            <a:off x="4370832" y="3364992"/>
+          <p:cNvPr id="28" name="Shape 26"/>
+          <p:cNvSpPr/>
+          <p:nvPr/>
+        </p:nvSpPr>
+        <p:spPr>
+          <a:xfrm>
+            <a:off x="2999232" y="3364992"/>
             <a:ext cx="1645920" cy="475488"/>
           </a:xfrm>
           <a:prstGeom prst="rect">
@@ -25460,13 +26777,13 @@
       </p:sp>
       <p:sp>
         <p:nvSpPr>
-          <p:cNvPr id="26" name="Text 24"/>
-          <p:cNvSpPr/>
-          <p:nvPr/>
-        </p:nvSpPr>
-        <p:spPr>
-          <a:xfrm>
-            <a:off x="4370832" y="3364992"/>
+          <p:cNvPr id="29" name="Text 27"/>
+          <p:cNvSpPr/>
+          <p:nvPr/>
+        </p:nvSpPr>
+        <p:spPr>
+          <a:xfrm>
+            <a:off x="2999232" y="3364992"/>
             <a:ext cx="1645920" cy="475488"/>
           </a:xfrm>
           <a:prstGeom prst="rect">
@@ -25491,6 +26808,111 @@
                 <a:ea typeface="Trebuchet MS" pitchFamily="34" charset="-122"/>
                 <a:cs typeface="Trebuchet MS" pitchFamily="34" charset="-120"/>
               </a:rPr>
+              <a:t>re</a:t>
+            </a:r>
+            <a:endParaRPr lang="en-US" sz="1400" dirty="0"/>
+          </a:p>
+        </p:txBody>
+      </p:sp>
+      <p:sp>
+        <p:nvSpPr>
+          <p:cNvPr id="30" name="Text 28"/>
+          <p:cNvSpPr/>
+          <p:nvPr/>
+        </p:nvSpPr>
+        <p:spPr>
+          <a:xfrm>
+            <a:off x="4645152" y="3364992"/>
+            <a:ext cx="1097280" cy="475488"/>
+          </a:xfrm>
+          <a:prstGeom prst="rect">
+            <a:avLst/>
+          </a:prstGeom>
+          <a:noFill/>
+          <a:ln/>
+        </p:spPr>
+        <p:txBody>
+          <a:bodyPr wrap="square" lIns="0" tIns="0" rIns="0" bIns="0" rtlCol="0" anchor="ctr"/>
+          <a:lstStyle/>
+          <a:p>
+            <a:pPr algn="ctr" indent="0" marL="0">
+              <a:buNone/>
+            </a:pPr>
+            <a:r>
+              <a:rPr lang="en-US" sz="1600" b="1" dirty="0">
+                <a:solidFill>
+                  <a:srgbClr val="0D9488"/>
+                </a:solidFill>
+                <a:latin typeface="Trebuchet MS" pitchFamily="34" charset="0"/>
+                <a:ea typeface="Trebuchet MS" pitchFamily="34" charset="-122"/>
+                <a:cs typeface="Trebuchet MS" pitchFamily="34" charset="-120"/>
+              </a:rPr>
+              <a:t>·</a:t>
+            </a:r>
+            <a:endParaRPr lang="en-US" sz="1600" dirty="0"/>
+          </a:p>
+        </p:txBody>
+      </p:sp>
+      <p:sp>
+        <p:nvSpPr>
+          <p:cNvPr id="31" name="Shape 29"/>
+          <p:cNvSpPr/>
+          <p:nvPr/>
+        </p:nvSpPr>
+        <p:spPr>
+          <a:xfrm>
+            <a:off x="5742432" y="3364992"/>
+            <a:ext cx="1645920" cy="475488"/>
+          </a:xfrm>
+          <a:prstGeom prst="rect">
+            <a:avLst>
+              <a:gd name="adj" fmla="val 9615"/>
+            </a:avLst>
+          </a:prstGeom>
+          <a:solidFill>
+            <a:srgbClr val="FFFFFF"/>
+          </a:solidFill>
+          <a:ln w="12700">
+            <a:solidFill>
+              <a:srgbClr val="0D9488"/>
+            </a:solidFill>
+            <a:prstDash val="solid"/>
+          </a:ln>
+        </p:spPr>
+      </p:sp>
+      <p:sp>
+        <p:nvSpPr>
+          <p:cNvPr id="32" name="Text 30"/>
+          <p:cNvSpPr/>
+          <p:nvPr/>
+        </p:nvSpPr>
+        <p:spPr>
+          <a:xfrm>
+            <a:off x="5742432" y="3364992"/>
+            <a:ext cx="1645920" cy="475488"/>
+          </a:xfrm>
+          <a:prstGeom prst="rect">
+            <a:avLst/>
+          </a:prstGeom>
+          <a:noFill/>
+          <a:ln/>
+        </p:spPr>
+        <p:txBody>
+          <a:bodyPr wrap="square" lIns="0" tIns="0" rIns="0" bIns="0" rtlCol="0" anchor="ctr"/>
+          <a:lstStyle/>
+          <a:p>
+            <a:pPr algn="ctr" indent="0" marL="0">
+              <a:buNone/>
+            </a:pPr>
+            <a:r>
+              <a:rPr lang="en-US" sz="1400" b="1" dirty="0">
+                <a:solidFill>
+                  <a:srgbClr val="0D9488"/>
+                </a:solidFill>
+                <a:latin typeface="Trebuchet MS" pitchFamily="34" charset="0"/>
+                <a:ea typeface="Trebuchet MS" pitchFamily="34" charset="-122"/>
+                <a:cs typeface="Trebuchet MS" pitchFamily="34" charset="-120"/>
+              </a:rPr>
               <a:t>asked</a:t>
             </a:r>
             <a:endParaRPr lang="en-US" sz="1400" dirty="0"/>
@@ -25499,7 +26921,7 @@
       </p:sp>
       <p:sp>
         <p:nvSpPr>
-          <p:cNvPr id="27" name="Shape 25"/>
+          <p:cNvPr id="33" name="Shape 31"/>
           <p:cNvSpPr/>
           <p:nvPr/>
         </p:nvSpPr>
@@ -25526,7 +26948,7 @@
       </p:sp>
       <p:sp>
         <p:nvSpPr>
-          <p:cNvPr id="28" name="Text 26"/>
+          <p:cNvPr id="34" name="Text 32"/>
           <p:cNvSpPr/>
           <p:nvPr/>
         </p:nvSpPr>
@@ -25565,7 +26987,7 @@
       </p:sp>
       <p:sp>
         <p:nvSpPr>
-          <p:cNvPr id="29" name="Shape 27"/>
+          <p:cNvPr id="35" name="Shape 33"/>
           <p:cNvSpPr/>
           <p:nvPr/>
         </p:nvSpPr>
@@ -25592,13 +27014,13 @@
       </p:sp>
       <p:sp>
         <p:nvSpPr>
-          <p:cNvPr id="30" name="Shape 28"/>
-          <p:cNvSpPr/>
-          <p:nvPr/>
-        </p:nvSpPr>
-        <p:spPr>
-          <a:xfrm>
-            <a:off x="3033522" y="4169664"/>
+          <p:cNvPr id="36" name="Shape 34"/>
+          <p:cNvSpPr/>
+          <p:nvPr/>
+        </p:nvSpPr>
+        <p:spPr>
+          <a:xfrm>
+            <a:off x="2254649" y="4169664"/>
             <a:ext cx="685800" cy="384048"/>
           </a:xfrm>
           <a:prstGeom prst="rect">
@@ -25619,13 +27041,13 @@
       </p:sp>
       <p:sp>
         <p:nvSpPr>
-          <p:cNvPr id="31" name="Text 29"/>
-          <p:cNvSpPr/>
-          <p:nvPr/>
-        </p:nvSpPr>
-        <p:spPr>
-          <a:xfrm>
-            <a:off x="3033522" y="4169664"/>
+          <p:cNvPr id="37" name="Text 35"/>
+          <p:cNvSpPr/>
+          <p:nvPr/>
+        </p:nvSpPr>
+        <p:spPr>
+          <a:xfrm>
+            <a:off x="2254649" y="4169664"/>
             <a:ext cx="685800" cy="384048"/>
           </a:xfrm>
           <a:prstGeom prst="rect">
@@ -25642,7 +27064,7 @@
               <a:buNone/>
             </a:pPr>
             <a:r>
-              <a:rPr lang="en-US" sz="1000" b="1" dirty="0">
+              <a:rPr lang="en-US" sz="900" b="1" dirty="0">
                 <a:solidFill>
                   <a:srgbClr val="9D174D"/>
                 </a:solidFill>
@@ -25650,21 +27072,21 @@
                 <a:ea typeface="Trebuchet MS" pitchFamily="34" charset="-122"/>
                 <a:cs typeface="Trebuchet MS" pitchFamily="34" charset="-120"/>
               </a:rPr>
-              <a:t>a</a:t>
-            </a:r>
-            <a:endParaRPr lang="en-US" sz="1000" dirty="0"/>
-          </a:p>
-        </p:txBody>
-      </p:sp>
-      <p:sp>
-        <p:nvSpPr>
-          <p:cNvPr id="32" name="Shape 30"/>
-          <p:cNvSpPr/>
-          <p:nvPr/>
-        </p:nvSpPr>
-        <p:spPr>
-          <a:xfrm>
-            <a:off x="4850892" y="4169664"/>
+              <a:t>r</a:t>
+            </a:r>
+            <a:endParaRPr lang="en-US" sz="900" dirty="0"/>
+          </a:p>
+        </p:txBody>
+      </p:sp>
+      <p:sp>
+        <p:nvSpPr>
+          <p:cNvPr id="38" name="Shape 36"/>
+          <p:cNvSpPr/>
+          <p:nvPr/>
+        </p:nvSpPr>
+        <p:spPr>
+          <a:xfrm>
+            <a:off x="3293146" y="4169664"/>
             <a:ext cx="685800" cy="384048"/>
           </a:xfrm>
           <a:prstGeom prst="rect">
@@ -25685,13 +27107,13 @@
       </p:sp>
       <p:sp>
         <p:nvSpPr>
-          <p:cNvPr id="33" name="Text 31"/>
-          <p:cNvSpPr/>
-          <p:nvPr/>
-        </p:nvSpPr>
-        <p:spPr>
-          <a:xfrm>
-            <a:off x="4850892" y="4169664"/>
+          <p:cNvPr id="39" name="Text 37"/>
+          <p:cNvSpPr/>
+          <p:nvPr/>
+        </p:nvSpPr>
+        <p:spPr>
+          <a:xfrm>
+            <a:off x="3293146" y="4169664"/>
             <a:ext cx="685800" cy="384048"/>
           </a:xfrm>
           <a:prstGeom prst="rect">
@@ -25708,7 +27130,7 @@
               <a:buNone/>
             </a:pPr>
             <a:r>
-              <a:rPr lang="en-US" sz="1000" b="1" dirty="0">
+              <a:rPr lang="en-US" sz="900" b="1" dirty="0">
                 <a:solidFill>
                   <a:srgbClr val="9D174D"/>
                 </a:solidFill>
@@ -25716,21 +27138,21 @@
                 <a:ea typeface="Trebuchet MS" pitchFamily="34" charset="-122"/>
                 <a:cs typeface="Trebuchet MS" pitchFamily="34" charset="-120"/>
               </a:rPr>
-              <a:t>sk</a:t>
-            </a:r>
-            <a:endParaRPr lang="en-US" sz="1000" dirty="0"/>
-          </a:p>
-        </p:txBody>
-      </p:sp>
-      <p:sp>
-        <p:nvSpPr>
-          <p:cNvPr id="34" name="Shape 32"/>
-          <p:cNvSpPr/>
-          <p:nvPr/>
-        </p:nvSpPr>
-        <p:spPr>
-          <a:xfrm>
-            <a:off x="6668262" y="4169664"/>
+              <a:t>e</a:t>
+            </a:r>
+            <a:endParaRPr lang="en-US" sz="900" dirty="0"/>
+          </a:p>
+        </p:txBody>
+      </p:sp>
+      <p:sp>
+        <p:nvSpPr>
+          <p:cNvPr id="40" name="Shape 38"/>
+          <p:cNvSpPr/>
+          <p:nvPr/>
+        </p:nvSpPr>
+        <p:spPr>
+          <a:xfrm>
+            <a:off x="4331643" y="4169664"/>
             <a:ext cx="685800" cy="384048"/>
           </a:xfrm>
           <a:prstGeom prst="rect">
@@ -25751,13 +27173,13 @@
       </p:sp>
       <p:sp>
         <p:nvSpPr>
-          <p:cNvPr id="35" name="Text 33"/>
-          <p:cNvSpPr/>
-          <p:nvPr/>
-        </p:nvSpPr>
-        <p:spPr>
-          <a:xfrm>
-            <a:off x="6668262" y="4169664"/>
+          <p:cNvPr id="41" name="Text 39"/>
+          <p:cNvSpPr/>
+          <p:nvPr/>
+        </p:nvSpPr>
+        <p:spPr>
+          <a:xfrm>
+            <a:off x="4331643" y="4169664"/>
             <a:ext cx="685800" cy="384048"/>
           </a:xfrm>
           <a:prstGeom prst="rect">
@@ -25774,7 +27196,7 @@
               <a:buNone/>
             </a:pPr>
             <a:r>
-              <a:rPr lang="en-US" sz="1000" b="1" dirty="0">
+              <a:rPr lang="en-US" sz="900" b="1" dirty="0">
                 <a:solidFill>
                   <a:srgbClr val="9D174D"/>
                 </a:solidFill>
@@ -25782,21 +27204,219 @@
                 <a:ea typeface="Trebuchet MS" pitchFamily="34" charset="-122"/>
                 <a:cs typeface="Trebuchet MS" pitchFamily="34" charset="-120"/>
               </a:rPr>
-              <a:t>ed</a:t>
-            </a:r>
-            <a:endParaRPr lang="en-US" sz="1000" dirty="0"/>
-          </a:p>
-        </p:txBody>
-      </p:sp>
-      <p:sp>
-        <p:nvSpPr>
-          <p:cNvPr id="36" name="Text 34"/>
-          <p:cNvSpPr/>
-          <p:nvPr/>
-        </p:nvSpPr>
-        <p:spPr>
-          <a:xfrm>
-            <a:off x="6668262" y="4572000"/>
+              <a:t>a</a:t>
+            </a:r>
+            <a:endParaRPr lang="en-US" sz="900" dirty="0"/>
+          </a:p>
+        </p:txBody>
+      </p:sp>
+      <p:sp>
+        <p:nvSpPr>
+          <p:cNvPr id="42" name="Shape 40"/>
+          <p:cNvSpPr/>
+          <p:nvPr/>
+        </p:nvSpPr>
+        <p:spPr>
+          <a:xfrm>
+            <a:off x="5370141" y="4169664"/>
+            <a:ext cx="685800" cy="384048"/>
+          </a:xfrm>
+          <a:prstGeom prst="rect">
+            <a:avLst>
+              <a:gd name="adj" fmla="val 9524"/>
+            </a:avLst>
+          </a:prstGeom>
+          <a:solidFill>
+            <a:srgbClr val="FFFFFF"/>
+          </a:solidFill>
+          <a:ln w="12700">
+            <a:solidFill>
+              <a:srgbClr val="DB2777"/>
+            </a:solidFill>
+            <a:prstDash val="solid"/>
+          </a:ln>
+        </p:spPr>
+      </p:sp>
+      <p:sp>
+        <p:nvSpPr>
+          <p:cNvPr id="43" name="Text 41"/>
+          <p:cNvSpPr/>
+          <p:nvPr/>
+        </p:nvSpPr>
+        <p:spPr>
+          <a:xfrm>
+            <a:off x="5370141" y="4169664"/>
+            <a:ext cx="685800" cy="384048"/>
+          </a:xfrm>
+          <a:prstGeom prst="rect">
+            <a:avLst/>
+          </a:prstGeom>
+          <a:noFill/>
+          <a:ln/>
+        </p:spPr>
+        <p:txBody>
+          <a:bodyPr wrap="square" lIns="0" tIns="0" rIns="0" bIns="0" rtlCol="0" anchor="ctr"/>
+          <a:lstStyle/>
+          <a:p>
+            <a:pPr algn="ctr" indent="0" marL="0">
+              <a:buNone/>
+            </a:pPr>
+            <a:r>
+              <a:rPr lang="en-US" sz="900" b="1" dirty="0">
+                <a:solidFill>
+                  <a:srgbClr val="9D174D"/>
+                </a:solidFill>
+                <a:latin typeface="Trebuchet MS" pitchFamily="34" charset="0"/>
+                <a:ea typeface="Trebuchet MS" pitchFamily="34" charset="-122"/>
+                <a:cs typeface="Trebuchet MS" pitchFamily="34" charset="-120"/>
+              </a:rPr>
+              <a:t>s</a:t>
+            </a:r>
+            <a:endParaRPr lang="en-US" sz="900" dirty="0"/>
+          </a:p>
+        </p:txBody>
+      </p:sp>
+      <p:sp>
+        <p:nvSpPr>
+          <p:cNvPr id="44" name="Shape 42"/>
+          <p:cNvSpPr/>
+          <p:nvPr/>
+        </p:nvSpPr>
+        <p:spPr>
+          <a:xfrm>
+            <a:off x="6408638" y="4169664"/>
+            <a:ext cx="685800" cy="384048"/>
+          </a:xfrm>
+          <a:prstGeom prst="rect">
+            <a:avLst>
+              <a:gd name="adj" fmla="val 9524"/>
+            </a:avLst>
+          </a:prstGeom>
+          <a:solidFill>
+            <a:srgbClr val="FFFFFF"/>
+          </a:solidFill>
+          <a:ln w="12700">
+            <a:solidFill>
+              <a:srgbClr val="DB2777"/>
+            </a:solidFill>
+            <a:prstDash val="solid"/>
+          </a:ln>
+        </p:spPr>
+      </p:sp>
+      <p:sp>
+        <p:nvSpPr>
+          <p:cNvPr id="45" name="Text 43"/>
+          <p:cNvSpPr/>
+          <p:nvPr/>
+        </p:nvSpPr>
+        <p:spPr>
+          <a:xfrm>
+            <a:off x="6408638" y="4169664"/>
+            <a:ext cx="685800" cy="384048"/>
+          </a:xfrm>
+          <a:prstGeom prst="rect">
+            <a:avLst/>
+          </a:prstGeom>
+          <a:noFill/>
+          <a:ln/>
+        </p:spPr>
+        <p:txBody>
+          <a:bodyPr wrap="square" lIns="0" tIns="0" rIns="0" bIns="0" rtlCol="0" anchor="ctr"/>
+          <a:lstStyle/>
+          <a:p>
+            <a:pPr algn="ctr" indent="0" marL="0">
+              <a:buNone/>
+            </a:pPr>
+            <a:r>
+              <a:rPr lang="en-US" sz="900" b="1" dirty="0">
+                <a:solidFill>
+                  <a:srgbClr val="9D174D"/>
+                </a:solidFill>
+                <a:latin typeface="Trebuchet MS" pitchFamily="34" charset="0"/>
+                <a:ea typeface="Trebuchet MS" pitchFamily="34" charset="-122"/>
+                <a:cs typeface="Trebuchet MS" pitchFamily="34" charset="-120"/>
+              </a:rPr>
+              <a:t>k</a:t>
+            </a:r>
+            <a:endParaRPr lang="en-US" sz="900" dirty="0"/>
+          </a:p>
+        </p:txBody>
+      </p:sp>
+      <p:sp>
+        <p:nvSpPr>
+          <p:cNvPr id="46" name="Shape 44"/>
+          <p:cNvSpPr/>
+          <p:nvPr/>
+        </p:nvSpPr>
+        <p:spPr>
+          <a:xfrm>
+            <a:off x="7447135" y="4169664"/>
+            <a:ext cx="685800" cy="384048"/>
+          </a:xfrm>
+          <a:prstGeom prst="rect">
+            <a:avLst>
+              <a:gd name="adj" fmla="val 9524"/>
+            </a:avLst>
+          </a:prstGeom>
+          <a:solidFill>
+            <a:srgbClr val="FFFFFF"/>
+          </a:solidFill>
+          <a:ln w="12700">
+            <a:solidFill>
+              <a:srgbClr val="DB2777"/>
+            </a:solidFill>
+            <a:prstDash val="solid"/>
+          </a:ln>
+        </p:spPr>
+      </p:sp>
+      <p:sp>
+        <p:nvSpPr>
+          <p:cNvPr id="47" name="Text 45"/>
+          <p:cNvSpPr/>
+          <p:nvPr/>
+        </p:nvSpPr>
+        <p:spPr>
+          <a:xfrm>
+            <a:off x="7447135" y="4169664"/>
+            <a:ext cx="685800" cy="384048"/>
+          </a:xfrm>
+          <a:prstGeom prst="rect">
+            <a:avLst/>
+          </a:prstGeom>
+          <a:noFill/>
+          <a:ln/>
+        </p:spPr>
+        <p:txBody>
+          <a:bodyPr wrap="square" lIns="0" tIns="0" rIns="0" bIns="0" rtlCol="0" anchor="ctr"/>
+          <a:lstStyle/>
+          <a:p>
+            <a:pPr algn="ctr" indent="0" marL="0">
+              <a:buNone/>
+            </a:pPr>
+            <a:r>
+              <a:rPr lang="en-US" sz="900" b="1" dirty="0">
+                <a:solidFill>
+                  <a:srgbClr val="9D174D"/>
+                </a:solidFill>
+                <a:latin typeface="Trebuchet MS" pitchFamily="34" charset="0"/>
+                <a:ea typeface="Trebuchet MS" pitchFamily="34" charset="-122"/>
+                <a:cs typeface="Trebuchet MS" pitchFamily="34" charset="-120"/>
+              </a:rPr>
+              <a:t>t</a:t>
+            </a:r>
+            <a:endParaRPr lang="en-US" sz="900" dirty="0"/>
+          </a:p>
+        </p:txBody>
+      </p:sp>
+      <p:sp>
+        <p:nvSpPr>
+          <p:cNvPr id="48" name="Text 46"/>
+          <p:cNvSpPr/>
+          <p:nvPr/>
+        </p:nvSpPr>
+        <p:spPr>
+          <a:xfrm>
+            <a:off x="7447135" y="4572000"/>
             <a:ext cx="685800" cy="219456"/>
           </a:xfrm>
           <a:prstGeom prst="rect">
@@ -26252,7 +27872,7 @@
                 <a:ea typeface="Trebuchet MS" pitchFamily="34" charset="-122"/>
                 <a:cs typeface="Trebuchet MS" pitchFamily="34" charset="-120"/>
               </a:rPr>
-              <a:t>asking</a:t>
+              <a:t>overasked</a:t>
             </a:r>
             <a:endParaRPr lang="en-US" sz="2800" dirty="0"/>
           </a:p>
@@ -27079,7 +28699,7 @@
                 <a:ea typeface="Trebuchet MS" pitchFamily="34" charset="-122"/>
                 <a:cs typeface="Trebuchet MS" pitchFamily="34" charset="-120"/>
               </a:rPr>
-              <a:t>asking</a:t>
+              <a:t>overasked</a:t>
             </a:r>
             <a:endParaRPr lang="en-US" sz="2800" dirty="0"/>
           </a:p>
@@ -27159,7 +28779,7 @@
         </p:nvSpPr>
         <p:spPr>
           <a:xfrm>
-            <a:off x="2938272" y="2258568"/>
+            <a:off x="2221992" y="2258568"/>
             <a:ext cx="1828800" cy="292608"/>
           </a:xfrm>
           <a:prstGeom prst="rect">
@@ -27168,11 +28788,11 @@
             </a:avLst>
           </a:prstGeom>
           <a:solidFill>
-            <a:srgbClr val="CCFBF1"/>
+            <a:srgbClr val="DDD6FE"/>
           </a:solidFill>
           <a:ln w="19050">
             <a:solidFill>
-              <a:srgbClr val="0D9488"/>
+              <a:srgbClr val="7C3AED"/>
             </a:solidFill>
             <a:prstDash val="solid"/>
           </a:ln>
@@ -27193,7 +28813,7 @@
         </p:nvSpPr>
         <p:spPr>
           <a:xfrm>
-            <a:off x="2938272" y="2258568"/>
+            <a:off x="2221992" y="2258568"/>
             <a:ext cx="1828800" cy="292608"/>
           </a:xfrm>
           <a:prstGeom prst="rect">
@@ -27212,13 +28832,13 @@
             <a:r>
               <a:rPr lang="en-US" sz="1300" b="1" dirty="0">
                 <a:solidFill>
-                  <a:srgbClr val="0F766E"/>
+                  <a:srgbClr val="4C1D95"/>
                 </a:solidFill>
                 <a:latin typeface="Trebuchet MS" pitchFamily="34" charset="0"/>
                 <a:ea typeface="Trebuchet MS" pitchFamily="34" charset="-122"/>
                 <a:cs typeface="Trebuchet MS" pitchFamily="34" charset="-120"/>
               </a:rPr>
-              <a:t>ask</a:t>
+              <a:t>over</a:t>
             </a:r>
             <a:endParaRPr lang="en-US" sz="1300" dirty="0"/>
           </a:p>
@@ -27232,7 +28852,7 @@
         </p:nvSpPr>
         <p:spPr>
           <a:xfrm>
-            <a:off x="2938272" y="2569464"/>
+            <a:off x="2221992" y="2569464"/>
             <a:ext cx="1828800" cy="201168"/>
           </a:xfrm>
           <a:prstGeom prst="rect">
@@ -27257,7 +28877,7 @@
                 <a:ea typeface="Calibri" pitchFamily="34" charset="-122"/>
                 <a:cs typeface="Calibri" pitchFamily="34" charset="-120"/>
               </a:rPr>
-              <a:t>to request or inquire</a:t>
+              <a:t>too much</a:t>
             </a:r>
             <a:endParaRPr lang="en-US" sz="850" dirty="0"/>
           </a:p>
@@ -27271,7 +28891,7 @@
         </p:nvSpPr>
         <p:spPr>
           <a:xfrm>
-            <a:off x="5803392" y="2258568"/>
+            <a:off x="4370832" y="2258568"/>
             <a:ext cx="1828800" cy="292608"/>
           </a:xfrm>
           <a:prstGeom prst="rect">
@@ -27280,11 +28900,11 @@
             </a:avLst>
           </a:prstGeom>
           <a:solidFill>
-            <a:srgbClr val="FCE7F3"/>
+            <a:srgbClr val="CCFBF1"/>
           </a:solidFill>
           <a:ln w="19050">
             <a:solidFill>
-              <a:srgbClr val="DB2777"/>
+              <a:srgbClr val="0D9488"/>
             </a:solidFill>
             <a:prstDash val="solid"/>
           </a:ln>
@@ -27305,7 +28925,7 @@
         </p:nvSpPr>
         <p:spPr>
           <a:xfrm>
-            <a:off x="5803392" y="2258568"/>
+            <a:off x="4370832" y="2258568"/>
             <a:ext cx="1828800" cy="292608"/>
           </a:xfrm>
           <a:prstGeom prst="rect">
@@ -27324,13 +28944,13 @@
             <a:r>
               <a:rPr lang="en-US" sz="1300" b="1" dirty="0">
                 <a:solidFill>
-                  <a:srgbClr val="9D174D"/>
+                  <a:srgbClr val="0F766E"/>
                 </a:solidFill>
                 <a:latin typeface="Trebuchet MS" pitchFamily="34" charset="0"/>
                 <a:ea typeface="Trebuchet MS" pitchFamily="34" charset="-122"/>
                 <a:cs typeface="Trebuchet MS" pitchFamily="34" charset="-120"/>
               </a:rPr>
-              <a:t>ing</a:t>
+              <a:t>ask</a:t>
             </a:r>
             <a:endParaRPr lang="en-US" sz="1300" dirty="0"/>
           </a:p>
@@ -27344,7 +28964,7 @@
         </p:nvSpPr>
         <p:spPr>
           <a:xfrm>
-            <a:off x="5803392" y="2569464"/>
+            <a:off x="4370832" y="2569464"/>
             <a:ext cx="1828800" cy="201168"/>
           </a:xfrm>
           <a:prstGeom prst="rect">
@@ -27369,7 +28989,7 @@
                 <a:ea typeface="Calibri" pitchFamily="34" charset="-122"/>
                 <a:cs typeface="Calibri" pitchFamily="34" charset="-120"/>
               </a:rPr>
-              <a:t>ongoing action</a:t>
+              <a:t>to request or inquire</a:t>
             </a:r>
             <a:endParaRPr lang="en-US" sz="850" dirty="0"/>
           </a:p>
@@ -27378,6 +28998,118 @@
       <p:sp>
         <p:nvSpPr>
           <p:cNvPr id="22" name="Shape 20"/>
+          <p:cNvSpPr/>
+          <p:nvPr/>
+        </p:nvSpPr>
+        <p:spPr>
+          <a:xfrm>
+            <a:off x="6519672" y="2258568"/>
+            <a:ext cx="1828800" cy="292608"/>
+          </a:xfrm>
+          <a:prstGeom prst="rect">
+            <a:avLst>
+              <a:gd name="adj" fmla="val 25000"/>
+            </a:avLst>
+          </a:prstGeom>
+          <a:solidFill>
+            <a:srgbClr val="FCE7F3"/>
+          </a:solidFill>
+          <a:ln w="19050">
+            <a:solidFill>
+              <a:srgbClr val="DB2777"/>
+            </a:solidFill>
+            <a:prstDash val="solid"/>
+          </a:ln>
+          <a:effectLst>
+            <a:outerShdw sx="100000" sy="100000" kx="0" ky="0" algn="bl" rotWithShape="0" blurRad="101600" dist="38100" dir="8100000">
+              <a:srgbClr val="000000">
+                <a:alpha val="12000"/>
+              </a:srgbClr>
+            </a:outerShdw>
+          </a:effectLst>
+        </p:spPr>
+      </p:sp>
+      <p:sp>
+        <p:nvSpPr>
+          <p:cNvPr id="23" name="Text 21"/>
+          <p:cNvSpPr/>
+          <p:nvPr/>
+        </p:nvSpPr>
+        <p:spPr>
+          <a:xfrm>
+            <a:off x="6519672" y="2258568"/>
+            <a:ext cx="1828800" cy="292608"/>
+          </a:xfrm>
+          <a:prstGeom prst="rect">
+            <a:avLst/>
+          </a:prstGeom>
+          <a:noFill/>
+          <a:ln/>
+        </p:spPr>
+        <p:txBody>
+          <a:bodyPr wrap="square" lIns="0" tIns="0" rIns="0" bIns="0" rtlCol="0" anchor="ctr"/>
+          <a:lstStyle/>
+          <a:p>
+            <a:pPr algn="ctr" indent="0" marL="0">
+              <a:buNone/>
+            </a:pPr>
+            <a:r>
+              <a:rPr lang="en-US" sz="1300" b="1" dirty="0">
+                <a:solidFill>
+                  <a:srgbClr val="9D174D"/>
+                </a:solidFill>
+                <a:latin typeface="Trebuchet MS" pitchFamily="34" charset="0"/>
+                <a:ea typeface="Trebuchet MS" pitchFamily="34" charset="-122"/>
+                <a:cs typeface="Trebuchet MS" pitchFamily="34" charset="-120"/>
+              </a:rPr>
+              <a:t>ed</a:t>
+            </a:r>
+            <a:endParaRPr lang="en-US" sz="1300" dirty="0"/>
+          </a:p>
+        </p:txBody>
+      </p:sp>
+      <p:sp>
+        <p:nvSpPr>
+          <p:cNvPr id="24" name="Text 22"/>
+          <p:cNvSpPr/>
+          <p:nvPr/>
+        </p:nvSpPr>
+        <p:spPr>
+          <a:xfrm>
+            <a:off x="6519672" y="2569464"/>
+            <a:ext cx="1828800" cy="201168"/>
+          </a:xfrm>
+          <a:prstGeom prst="rect">
+            <a:avLst/>
+          </a:prstGeom>
+          <a:noFill/>
+          <a:ln/>
+        </p:spPr>
+        <p:txBody>
+          <a:bodyPr wrap="square" lIns="0" tIns="0" rIns="0" bIns="0" rtlCol="0" anchor="t"/>
+          <a:lstStyle/>
+          <a:p>
+            <a:pPr algn="ctr" indent="0" marL="0">
+              <a:buNone/>
+            </a:pPr>
+            <a:r>
+              <a:rPr lang="en-US" sz="850" dirty="0">
+                <a:solidFill>
+                  <a:srgbClr val="475569"/>
+                </a:solidFill>
+                <a:latin typeface="Calibri" pitchFamily="34" charset="0"/>
+                <a:ea typeface="Calibri" pitchFamily="34" charset="-122"/>
+                <a:cs typeface="Calibri" pitchFamily="34" charset="-120"/>
+              </a:rPr>
+              <a:t>past tense</a:t>
+            </a:r>
+            <a:endParaRPr lang="en-US" sz="850" dirty="0"/>
+          </a:p>
+        </p:txBody>
+      </p:sp>
+      <p:sp>
+        <p:nvSpPr>
+          <p:cNvPr id="25" name="Shape 23"/>
           <p:cNvSpPr/>
           <p:nvPr/>
         </p:nvSpPr>
@@ -27404,7 +29136,7 @@
       </p:sp>
       <p:sp>
         <p:nvSpPr>
-          <p:cNvPr id="23" name="Text 21"/>
+          <p:cNvPr id="26" name="Text 24"/>
           <p:cNvSpPr/>
           <p:nvPr/>
         </p:nvSpPr>
@@ -27443,7 +29175,7 @@
       </p:sp>
       <p:sp>
         <p:nvSpPr>
-          <p:cNvPr id="24" name="Shape 22"/>
+          <p:cNvPr id="27" name="Shape 25"/>
           <p:cNvSpPr/>
           <p:nvPr/>
         </p:nvSpPr>
@@ -27470,7 +29202,7 @@
       </p:sp>
       <p:sp>
         <p:nvSpPr>
-          <p:cNvPr id="25" name="Text 23"/>
+          <p:cNvPr id="28" name="Text 26"/>
           <p:cNvSpPr/>
           <p:nvPr/>
         </p:nvSpPr>
@@ -27509,7 +29241,7 @@
       </p:sp>
       <p:sp>
         <p:nvSpPr>
-          <p:cNvPr id="26" name="Shape 24"/>
+          <p:cNvPr id="29" name="Shape 27"/>
           <p:cNvSpPr/>
           <p:nvPr/>
         </p:nvSpPr>
@@ -27536,7 +29268,7 @@
       </p:sp>
       <p:sp>
         <p:nvSpPr>
-          <p:cNvPr id="27" name="Text 25"/>
+          <p:cNvPr id="30" name="Text 28"/>
           <p:cNvSpPr/>
           <p:nvPr/>
         </p:nvSpPr>
@@ -27575,7 +29307,7 @@
       </p:sp>
       <p:sp>
         <p:nvSpPr>
-          <p:cNvPr id="28" name="Shape 26"/>
+          <p:cNvPr id="31" name="Shape 29"/>
           <p:cNvSpPr/>
           <p:nvPr/>
         </p:nvSpPr>
@@ -27602,7 +29334,7 @@
       </p:sp>
       <p:sp>
         <p:nvSpPr>
-          <p:cNvPr id="29" name="Text 27"/>
+          <p:cNvPr id="32" name="Text 30"/>
           <p:cNvSpPr/>
           <p:nvPr/>
         </p:nvSpPr>
@@ -28064,7 +29796,7 @@
                 <a:ea typeface="Trebuchet MS" pitchFamily="34" charset="-122"/>
                 <a:cs typeface="Trebuchet MS" pitchFamily="34" charset="-120"/>
               </a:rPr>
-              <a:t>asking</a:t>
+              <a:t>overasked</a:t>
             </a:r>
             <a:endParaRPr lang="en-US" sz="2800" dirty="0"/>
           </a:p>
@@ -28144,7 +29876,7 @@
         </p:nvSpPr>
         <p:spPr>
           <a:xfrm>
-            <a:off x="2938272" y="2258568"/>
+            <a:off x="2221992" y="2258568"/>
             <a:ext cx="1828800" cy="292608"/>
           </a:xfrm>
           <a:prstGeom prst="rect">
@@ -28153,11 +29885,11 @@
             </a:avLst>
           </a:prstGeom>
           <a:solidFill>
-            <a:srgbClr val="CCFBF1"/>
+            <a:srgbClr val="DDD6FE"/>
           </a:solidFill>
           <a:ln w="19050">
             <a:solidFill>
-              <a:srgbClr val="0D9488"/>
+              <a:srgbClr val="7C3AED"/>
             </a:solidFill>
             <a:prstDash val="solid"/>
           </a:ln>
@@ -28178,7 +29910,7 @@
         </p:nvSpPr>
         <p:spPr>
           <a:xfrm>
-            <a:off x="2938272" y="2258568"/>
+            <a:off x="2221992" y="2258568"/>
             <a:ext cx="1828800" cy="292608"/>
           </a:xfrm>
           <a:prstGeom prst="rect">
@@ -28197,13 +29929,13 @@
             <a:r>
               <a:rPr lang="en-US" sz="1300" b="1" dirty="0">
                 <a:solidFill>
-                  <a:srgbClr val="0F766E"/>
+                  <a:srgbClr val="4C1D95"/>
                 </a:solidFill>
                 <a:latin typeface="Trebuchet MS" pitchFamily="34" charset="0"/>
                 <a:ea typeface="Trebuchet MS" pitchFamily="34" charset="-122"/>
                 <a:cs typeface="Trebuchet MS" pitchFamily="34" charset="-120"/>
               </a:rPr>
-              <a:t>ask</a:t>
+              <a:t>over</a:t>
             </a:r>
             <a:endParaRPr lang="en-US" sz="1300" dirty="0"/>
           </a:p>
@@ -28217,7 +29949,7 @@
         </p:nvSpPr>
         <p:spPr>
           <a:xfrm>
-            <a:off x="2938272" y="2569464"/>
+            <a:off x="2221992" y="2569464"/>
             <a:ext cx="1828800" cy="201168"/>
           </a:xfrm>
           <a:prstGeom prst="rect">
@@ -28242,7 +29974,7 @@
                 <a:ea typeface="Calibri" pitchFamily="34" charset="-122"/>
                 <a:cs typeface="Calibri" pitchFamily="34" charset="-120"/>
               </a:rPr>
-              <a:t>to request or inquire</a:t>
+              <a:t>too much</a:t>
             </a:r>
             <a:endParaRPr lang="en-US" sz="850" dirty="0"/>
           </a:p>
@@ -28256,7 +29988,7 @@
         </p:nvSpPr>
         <p:spPr>
           <a:xfrm>
-            <a:off x="5803392" y="2258568"/>
+            <a:off x="4370832" y="2258568"/>
             <a:ext cx="1828800" cy="292608"/>
           </a:xfrm>
           <a:prstGeom prst="rect">
@@ -28265,11 +29997,11 @@
             </a:avLst>
           </a:prstGeom>
           <a:solidFill>
-            <a:srgbClr val="FCE7F3"/>
+            <a:srgbClr val="CCFBF1"/>
           </a:solidFill>
           <a:ln w="19050">
             <a:solidFill>
-              <a:srgbClr val="DB2777"/>
+              <a:srgbClr val="0D9488"/>
             </a:solidFill>
             <a:prstDash val="solid"/>
           </a:ln>
@@ -28290,7 +30022,7 @@
         </p:nvSpPr>
         <p:spPr>
           <a:xfrm>
-            <a:off x="5803392" y="2258568"/>
+            <a:off x="4370832" y="2258568"/>
             <a:ext cx="1828800" cy="292608"/>
           </a:xfrm>
           <a:prstGeom prst="rect">
@@ -28309,13 +30041,13 @@
             <a:r>
               <a:rPr lang="en-US" sz="1300" b="1" dirty="0">
                 <a:solidFill>
-                  <a:srgbClr val="9D174D"/>
+                  <a:srgbClr val="0F766E"/>
                 </a:solidFill>
                 <a:latin typeface="Trebuchet MS" pitchFamily="34" charset="0"/>
                 <a:ea typeface="Trebuchet MS" pitchFamily="34" charset="-122"/>
                 <a:cs typeface="Trebuchet MS" pitchFamily="34" charset="-120"/>
               </a:rPr>
-              <a:t>ing</a:t>
+              <a:t>ask</a:t>
             </a:r>
             <a:endParaRPr lang="en-US" sz="1300" dirty="0"/>
           </a:p>
@@ -28329,7 +30061,7 @@
         </p:nvSpPr>
         <p:spPr>
           <a:xfrm>
-            <a:off x="5803392" y="2569464"/>
+            <a:off x="4370832" y="2569464"/>
             <a:ext cx="1828800" cy="201168"/>
           </a:xfrm>
           <a:prstGeom prst="rect">
@@ -28354,7 +30086,7 @@
                 <a:ea typeface="Calibri" pitchFamily="34" charset="-122"/>
                 <a:cs typeface="Calibri" pitchFamily="34" charset="-120"/>
               </a:rPr>
-              <a:t>ongoing action</a:t>
+              <a:t>to request or inquire</a:t>
             </a:r>
             <a:endParaRPr lang="en-US" sz="850" dirty="0"/>
           </a:p>
@@ -28363,6 +30095,118 @@
       <p:sp>
         <p:nvSpPr>
           <p:cNvPr id="22" name="Shape 20"/>
+          <p:cNvSpPr/>
+          <p:nvPr/>
+        </p:nvSpPr>
+        <p:spPr>
+          <a:xfrm>
+            <a:off x="6519672" y="2258568"/>
+            <a:ext cx="1828800" cy="292608"/>
+          </a:xfrm>
+          <a:prstGeom prst="rect">
+            <a:avLst>
+              <a:gd name="adj" fmla="val 25000"/>
+            </a:avLst>
+          </a:prstGeom>
+          <a:solidFill>
+            <a:srgbClr val="FCE7F3"/>
+          </a:solidFill>
+          <a:ln w="19050">
+            <a:solidFill>
+              <a:srgbClr val="DB2777"/>
+            </a:solidFill>
+            <a:prstDash val="solid"/>
+          </a:ln>
+          <a:effectLst>
+            <a:outerShdw sx="100000" sy="100000" kx="0" ky="0" algn="bl" rotWithShape="0" blurRad="101600" dist="38100" dir="8100000">
+              <a:srgbClr val="000000">
+                <a:alpha val="12000"/>
+              </a:srgbClr>
+            </a:outerShdw>
+          </a:effectLst>
+        </p:spPr>
+      </p:sp>
+      <p:sp>
+        <p:nvSpPr>
+          <p:cNvPr id="23" name="Text 21"/>
+          <p:cNvSpPr/>
+          <p:nvPr/>
+        </p:nvSpPr>
+        <p:spPr>
+          <a:xfrm>
+            <a:off x="6519672" y="2258568"/>
+            <a:ext cx="1828800" cy="292608"/>
+          </a:xfrm>
+          <a:prstGeom prst="rect">
+            <a:avLst/>
+          </a:prstGeom>
+          <a:noFill/>
+          <a:ln/>
+        </p:spPr>
+        <p:txBody>
+          <a:bodyPr wrap="square" lIns="0" tIns="0" rIns="0" bIns="0" rtlCol="0" anchor="ctr"/>
+          <a:lstStyle/>
+          <a:p>
+            <a:pPr algn="ctr" indent="0" marL="0">
+              <a:buNone/>
+            </a:pPr>
+            <a:r>
+              <a:rPr lang="en-US" sz="1300" b="1" dirty="0">
+                <a:solidFill>
+                  <a:srgbClr val="9D174D"/>
+                </a:solidFill>
+                <a:latin typeface="Trebuchet MS" pitchFamily="34" charset="0"/>
+                <a:ea typeface="Trebuchet MS" pitchFamily="34" charset="-122"/>
+                <a:cs typeface="Trebuchet MS" pitchFamily="34" charset="-120"/>
+              </a:rPr>
+              <a:t>ed</a:t>
+            </a:r>
+            <a:endParaRPr lang="en-US" sz="1300" dirty="0"/>
+          </a:p>
+        </p:txBody>
+      </p:sp>
+      <p:sp>
+        <p:nvSpPr>
+          <p:cNvPr id="24" name="Text 22"/>
+          <p:cNvSpPr/>
+          <p:nvPr/>
+        </p:nvSpPr>
+        <p:spPr>
+          <a:xfrm>
+            <a:off x="6519672" y="2569464"/>
+            <a:ext cx="1828800" cy="201168"/>
+          </a:xfrm>
+          <a:prstGeom prst="rect">
+            <a:avLst/>
+          </a:prstGeom>
+          <a:noFill/>
+          <a:ln/>
+        </p:spPr>
+        <p:txBody>
+          <a:bodyPr wrap="square" lIns="0" tIns="0" rIns="0" bIns="0" rtlCol="0" anchor="t"/>
+          <a:lstStyle/>
+          <a:p>
+            <a:pPr algn="ctr" indent="0" marL="0">
+              <a:buNone/>
+            </a:pPr>
+            <a:r>
+              <a:rPr lang="en-US" sz="850" dirty="0">
+                <a:solidFill>
+                  <a:srgbClr val="475569"/>
+                </a:solidFill>
+                <a:latin typeface="Calibri" pitchFamily="34" charset="0"/>
+                <a:ea typeface="Calibri" pitchFamily="34" charset="-122"/>
+                <a:cs typeface="Calibri" pitchFamily="34" charset="-120"/>
+              </a:rPr>
+              <a:t>past tense</a:t>
+            </a:r>
+            <a:endParaRPr lang="en-US" sz="850" dirty="0"/>
+          </a:p>
+        </p:txBody>
+      </p:sp>
+      <p:sp>
+        <p:nvSpPr>
+          <p:cNvPr id="25" name="Shape 23"/>
           <p:cNvSpPr/>
           <p:nvPr/>
         </p:nvSpPr>
@@ -28389,7 +30233,7 @@
       </p:sp>
       <p:sp>
         <p:nvSpPr>
-          <p:cNvPr id="23" name="Text 21"/>
+          <p:cNvPr id="26" name="Text 24"/>
           <p:cNvSpPr/>
           <p:nvPr/>
         </p:nvSpPr>
@@ -28428,7 +30272,7 @@
       </p:sp>
       <p:sp>
         <p:nvSpPr>
-          <p:cNvPr id="24" name="Shape 22"/>
+          <p:cNvPr id="27" name="Shape 25"/>
           <p:cNvSpPr/>
           <p:nvPr/>
         </p:nvSpPr>
@@ -28455,13 +30299,13 @@
       </p:sp>
       <p:sp>
         <p:nvSpPr>
-          <p:cNvPr id="25" name="Shape 23"/>
-          <p:cNvSpPr/>
-          <p:nvPr/>
-        </p:nvSpPr>
-        <p:spPr>
-          <a:xfrm>
-            <a:off x="2999232" y="3364992"/>
+          <p:cNvPr id="28" name="Shape 26"/>
+          <p:cNvSpPr/>
+          <p:nvPr/>
+        </p:nvSpPr>
+        <p:spPr>
+          <a:xfrm>
+            <a:off x="2313432" y="3364992"/>
             <a:ext cx="1645920" cy="475488"/>
           </a:xfrm>
           <a:prstGeom prst="rect">
@@ -28482,13 +30326,13 @@
       </p:sp>
       <p:sp>
         <p:nvSpPr>
-          <p:cNvPr id="26" name="Text 24"/>
-          <p:cNvSpPr/>
-          <p:nvPr/>
-        </p:nvSpPr>
-        <p:spPr>
-          <a:xfrm>
-            <a:off x="2999232" y="3364992"/>
+          <p:cNvPr id="29" name="Text 27"/>
+          <p:cNvSpPr/>
+          <p:nvPr/>
+        </p:nvSpPr>
+        <p:spPr>
+          <a:xfrm>
+            <a:off x="2313432" y="3364992"/>
             <a:ext cx="1645920" cy="475488"/>
           </a:xfrm>
           <a:prstGeom prst="rect">
@@ -28513,7 +30357,7 @@
                 <a:ea typeface="Trebuchet MS" pitchFamily="34" charset="-122"/>
                 <a:cs typeface="Trebuchet MS" pitchFamily="34" charset="-120"/>
               </a:rPr>
-              <a:t>ask</a:t>
+              <a:t>o</a:t>
             </a:r>
             <a:endParaRPr lang="en-US" sz="1400" dirty="0"/>
           </a:p>
@@ -28521,14 +30365,14 @@
       </p:sp>
       <p:sp>
         <p:nvSpPr>
-          <p:cNvPr id="27" name="Text 25"/>
-          <p:cNvSpPr/>
-          <p:nvPr/>
-        </p:nvSpPr>
-        <p:spPr>
-          <a:xfrm>
-            <a:off x="4645152" y="3364992"/>
-            <a:ext cx="1097280" cy="475488"/>
+          <p:cNvPr id="30" name="Text 28"/>
+          <p:cNvSpPr/>
+          <p:nvPr/>
+        </p:nvSpPr>
+        <p:spPr>
+          <a:xfrm>
+            <a:off x="3959352" y="3364992"/>
+            <a:ext cx="411480" cy="475488"/>
           </a:xfrm>
           <a:prstGeom prst="rect">
             <a:avLst/>
@@ -28560,13 +30404,13 @@
       </p:sp>
       <p:sp>
         <p:nvSpPr>
-          <p:cNvPr id="28" name="Shape 26"/>
-          <p:cNvSpPr/>
-          <p:nvPr/>
-        </p:nvSpPr>
-        <p:spPr>
-          <a:xfrm>
-            <a:off x="5742432" y="3364992"/>
+          <p:cNvPr id="31" name="Shape 29"/>
+          <p:cNvSpPr/>
+          <p:nvPr/>
+        </p:nvSpPr>
+        <p:spPr>
+          <a:xfrm>
+            <a:off x="4370832" y="3364992"/>
             <a:ext cx="1645920" cy="475488"/>
           </a:xfrm>
           <a:prstGeom prst="rect">
@@ -28587,13 +30431,13 @@
       </p:sp>
       <p:sp>
         <p:nvSpPr>
-          <p:cNvPr id="29" name="Text 27"/>
-          <p:cNvSpPr/>
-          <p:nvPr/>
-        </p:nvSpPr>
-        <p:spPr>
-          <a:xfrm>
-            <a:off x="5742432" y="3364992"/>
+          <p:cNvPr id="32" name="Text 30"/>
+          <p:cNvSpPr/>
+          <p:nvPr/>
+        </p:nvSpPr>
+        <p:spPr>
+          <a:xfrm>
+            <a:off x="4370832" y="3364992"/>
             <a:ext cx="1645920" cy="475488"/>
           </a:xfrm>
           <a:prstGeom prst="rect">
@@ -28618,7 +30462,7 @@
                 <a:ea typeface="Trebuchet MS" pitchFamily="34" charset="-122"/>
                 <a:cs typeface="Trebuchet MS" pitchFamily="34" charset="-120"/>
               </a:rPr>
-              <a:t>ing</a:t>
+              <a:t>ver</a:t>
             </a:r>
             <a:endParaRPr lang="en-US" sz="1400" dirty="0"/>
           </a:p>
@@ -28626,7 +30470,112 @@
       </p:sp>
       <p:sp>
         <p:nvSpPr>
-          <p:cNvPr id="30" name="Shape 28"/>
+          <p:cNvPr id="33" name="Text 31"/>
+          <p:cNvSpPr/>
+          <p:nvPr/>
+        </p:nvSpPr>
+        <p:spPr>
+          <a:xfrm>
+            <a:off x="6016752" y="3364992"/>
+            <a:ext cx="411480" cy="475488"/>
+          </a:xfrm>
+          <a:prstGeom prst="rect">
+            <a:avLst/>
+          </a:prstGeom>
+          <a:noFill/>
+          <a:ln/>
+        </p:spPr>
+        <p:txBody>
+          <a:bodyPr wrap="square" lIns="0" tIns="0" rIns="0" bIns="0" rtlCol="0" anchor="ctr"/>
+          <a:lstStyle/>
+          <a:p>
+            <a:pPr algn="ctr" indent="0" marL="0">
+              <a:buNone/>
+            </a:pPr>
+            <a:r>
+              <a:rPr lang="en-US" sz="1600" b="1" dirty="0">
+                <a:solidFill>
+                  <a:srgbClr val="0D9488"/>
+                </a:solidFill>
+                <a:latin typeface="Trebuchet MS" pitchFamily="34" charset="0"/>
+                <a:ea typeface="Trebuchet MS" pitchFamily="34" charset="-122"/>
+                <a:cs typeface="Trebuchet MS" pitchFamily="34" charset="-120"/>
+              </a:rPr>
+              <a:t>·</a:t>
+            </a:r>
+            <a:endParaRPr lang="en-US" sz="1600" dirty="0"/>
+          </a:p>
+        </p:txBody>
+      </p:sp>
+      <p:sp>
+        <p:nvSpPr>
+          <p:cNvPr id="34" name="Shape 32"/>
+          <p:cNvSpPr/>
+          <p:nvPr/>
+        </p:nvSpPr>
+        <p:spPr>
+          <a:xfrm>
+            <a:off x="6428232" y="3364992"/>
+            <a:ext cx="1645920" cy="475488"/>
+          </a:xfrm>
+          <a:prstGeom prst="rect">
+            <a:avLst>
+              <a:gd name="adj" fmla="val 9615"/>
+            </a:avLst>
+          </a:prstGeom>
+          <a:solidFill>
+            <a:srgbClr val="FFFFFF"/>
+          </a:solidFill>
+          <a:ln w="12700">
+            <a:solidFill>
+              <a:srgbClr val="0D9488"/>
+            </a:solidFill>
+            <a:prstDash val="solid"/>
+          </a:ln>
+        </p:spPr>
+      </p:sp>
+      <p:sp>
+        <p:nvSpPr>
+          <p:cNvPr id="35" name="Text 33"/>
+          <p:cNvSpPr/>
+          <p:nvPr/>
+        </p:nvSpPr>
+        <p:spPr>
+          <a:xfrm>
+            <a:off x="6428232" y="3364992"/>
+            <a:ext cx="1645920" cy="475488"/>
+          </a:xfrm>
+          <a:prstGeom prst="rect">
+            <a:avLst/>
+          </a:prstGeom>
+          <a:noFill/>
+          <a:ln/>
+        </p:spPr>
+        <p:txBody>
+          <a:bodyPr wrap="square" lIns="0" tIns="0" rIns="0" bIns="0" rtlCol="0" anchor="ctr"/>
+          <a:lstStyle/>
+          <a:p>
+            <a:pPr algn="ctr" indent="0" marL="0">
+              <a:buNone/>
+            </a:pPr>
+            <a:r>
+              <a:rPr lang="en-US" sz="1400" b="1" dirty="0">
+                <a:solidFill>
+                  <a:srgbClr val="0D9488"/>
+                </a:solidFill>
+                <a:latin typeface="Trebuchet MS" pitchFamily="34" charset="0"/>
+                <a:ea typeface="Trebuchet MS" pitchFamily="34" charset="-122"/>
+                <a:cs typeface="Trebuchet MS" pitchFamily="34" charset="-120"/>
+              </a:rPr>
+              <a:t>asked</a:t>
+            </a:r>
+            <a:endParaRPr lang="en-US" sz="1400" dirty="0"/>
+          </a:p>
+        </p:txBody>
+      </p:sp>
+      <p:sp>
+        <p:nvSpPr>
+          <p:cNvPr id="36" name="Shape 34"/>
           <p:cNvSpPr/>
           <p:nvPr/>
         </p:nvSpPr>
@@ -28653,7 +30602,7 @@
       </p:sp>
       <p:sp>
         <p:nvSpPr>
-          <p:cNvPr id="31" name="Text 29"/>
+          <p:cNvPr id="37" name="Text 35"/>
           <p:cNvSpPr/>
           <p:nvPr/>
         </p:nvSpPr>
@@ -28692,7 +30641,7 @@
       </p:sp>
       <p:sp>
         <p:nvSpPr>
-          <p:cNvPr id="32" name="Shape 30"/>
+          <p:cNvPr id="38" name="Shape 36"/>
           <p:cNvSpPr/>
           <p:nvPr/>
         </p:nvSpPr>
@@ -28719,7 +30668,7 @@
       </p:sp>
       <p:sp>
         <p:nvSpPr>
-          <p:cNvPr id="33" name="Text 31"/>
+          <p:cNvPr id="39" name="Text 37"/>
           <p:cNvSpPr/>
           <p:nvPr/>
         </p:nvSpPr>
@@ -29181,7 +31130,7 @@
                 <a:ea typeface="Trebuchet MS" pitchFamily="34" charset="-122"/>
                 <a:cs typeface="Trebuchet MS" pitchFamily="34" charset="-120"/>
               </a:rPr>
-              <a:t>asking</a:t>
+              <a:t>overasked</a:t>
             </a:r>
             <a:endParaRPr lang="en-US" sz="2800" dirty="0"/>
           </a:p>
@@ -29261,7 +31210,7 @@
         </p:nvSpPr>
         <p:spPr>
           <a:xfrm>
-            <a:off x="2938272" y="2258568"/>
+            <a:off x="2221992" y="2258568"/>
             <a:ext cx="1828800" cy="292608"/>
           </a:xfrm>
           <a:prstGeom prst="rect">
@@ -29270,11 +31219,11 @@
             </a:avLst>
           </a:prstGeom>
           <a:solidFill>
-            <a:srgbClr val="CCFBF1"/>
+            <a:srgbClr val="DDD6FE"/>
           </a:solidFill>
           <a:ln w="19050">
             <a:solidFill>
-              <a:srgbClr val="0D9488"/>
+              <a:srgbClr val="7C3AED"/>
             </a:solidFill>
             <a:prstDash val="solid"/>
           </a:ln>
@@ -29295,7 +31244,7 @@
         </p:nvSpPr>
         <p:spPr>
           <a:xfrm>
-            <a:off x="2938272" y="2258568"/>
+            <a:off x="2221992" y="2258568"/>
             <a:ext cx="1828800" cy="292608"/>
           </a:xfrm>
           <a:prstGeom prst="rect">
@@ -29314,13 +31263,13 @@
             <a:r>
               <a:rPr lang="en-US" sz="1300" b="1" dirty="0">
                 <a:solidFill>
-                  <a:srgbClr val="0F766E"/>
+                  <a:srgbClr val="4C1D95"/>
                 </a:solidFill>
                 <a:latin typeface="Trebuchet MS" pitchFamily="34" charset="0"/>
                 <a:ea typeface="Trebuchet MS" pitchFamily="34" charset="-122"/>
                 <a:cs typeface="Trebuchet MS" pitchFamily="34" charset="-120"/>
               </a:rPr>
-              <a:t>ask</a:t>
+              <a:t>over</a:t>
             </a:r>
             <a:endParaRPr lang="en-US" sz="1300" dirty="0"/>
           </a:p>
@@ -29334,7 +31283,7 @@
         </p:nvSpPr>
         <p:spPr>
           <a:xfrm>
-            <a:off x="2938272" y="2569464"/>
+            <a:off x="2221992" y="2569464"/>
             <a:ext cx="1828800" cy="201168"/>
           </a:xfrm>
           <a:prstGeom prst="rect">
@@ -29359,7 +31308,7 @@
                 <a:ea typeface="Calibri" pitchFamily="34" charset="-122"/>
                 <a:cs typeface="Calibri" pitchFamily="34" charset="-120"/>
               </a:rPr>
-              <a:t>to request or inquire</a:t>
+              <a:t>too much</a:t>
             </a:r>
             <a:endParaRPr lang="en-US" sz="850" dirty="0"/>
           </a:p>
@@ -29373,7 +31322,7 @@
         </p:nvSpPr>
         <p:spPr>
           <a:xfrm>
-            <a:off x="5803392" y="2258568"/>
+            <a:off x="4370832" y="2258568"/>
             <a:ext cx="1828800" cy="292608"/>
           </a:xfrm>
           <a:prstGeom prst="rect">
@@ -29382,11 +31331,11 @@
             </a:avLst>
           </a:prstGeom>
           <a:solidFill>
-            <a:srgbClr val="FCE7F3"/>
+            <a:srgbClr val="CCFBF1"/>
           </a:solidFill>
           <a:ln w="19050">
             <a:solidFill>
-              <a:srgbClr val="DB2777"/>
+              <a:srgbClr val="0D9488"/>
             </a:solidFill>
             <a:prstDash val="solid"/>
           </a:ln>
@@ -29407,7 +31356,7 @@
         </p:nvSpPr>
         <p:spPr>
           <a:xfrm>
-            <a:off x="5803392" y="2258568"/>
+            <a:off x="4370832" y="2258568"/>
             <a:ext cx="1828800" cy="292608"/>
           </a:xfrm>
           <a:prstGeom prst="rect">
@@ -29426,13 +31375,13 @@
             <a:r>
               <a:rPr lang="en-US" sz="1300" b="1" dirty="0">
                 <a:solidFill>
-                  <a:srgbClr val="9D174D"/>
+                  <a:srgbClr val="0F766E"/>
                 </a:solidFill>
                 <a:latin typeface="Trebuchet MS" pitchFamily="34" charset="0"/>
                 <a:ea typeface="Trebuchet MS" pitchFamily="34" charset="-122"/>
                 <a:cs typeface="Trebuchet MS" pitchFamily="34" charset="-120"/>
               </a:rPr>
-              <a:t>ing</a:t>
+              <a:t>ask</a:t>
             </a:r>
             <a:endParaRPr lang="en-US" sz="1300" dirty="0"/>
           </a:p>
@@ -29446,7 +31395,7 @@
         </p:nvSpPr>
         <p:spPr>
           <a:xfrm>
-            <a:off x="5803392" y="2569464"/>
+            <a:off x="4370832" y="2569464"/>
             <a:ext cx="1828800" cy="201168"/>
           </a:xfrm>
           <a:prstGeom prst="rect">
@@ -29471,7 +31420,7 @@
                 <a:ea typeface="Calibri" pitchFamily="34" charset="-122"/>
                 <a:cs typeface="Calibri" pitchFamily="34" charset="-120"/>
               </a:rPr>
-              <a:t>ongoing action</a:t>
+              <a:t>to request or inquire</a:t>
             </a:r>
             <a:endParaRPr lang="en-US" sz="850" dirty="0"/>
           </a:p>
@@ -29480,6 +31429,118 @@
       <p:sp>
         <p:nvSpPr>
           <p:cNvPr id="22" name="Shape 20"/>
+          <p:cNvSpPr/>
+          <p:nvPr/>
+        </p:nvSpPr>
+        <p:spPr>
+          <a:xfrm>
+            <a:off x="6519672" y="2258568"/>
+            <a:ext cx="1828800" cy="292608"/>
+          </a:xfrm>
+          <a:prstGeom prst="rect">
+            <a:avLst>
+              <a:gd name="adj" fmla="val 25000"/>
+            </a:avLst>
+          </a:prstGeom>
+          <a:solidFill>
+            <a:srgbClr val="FCE7F3"/>
+          </a:solidFill>
+          <a:ln w="19050">
+            <a:solidFill>
+              <a:srgbClr val="DB2777"/>
+            </a:solidFill>
+            <a:prstDash val="solid"/>
+          </a:ln>
+          <a:effectLst>
+            <a:outerShdw sx="100000" sy="100000" kx="0" ky="0" algn="bl" rotWithShape="0" blurRad="101600" dist="38100" dir="8100000">
+              <a:srgbClr val="000000">
+                <a:alpha val="12000"/>
+              </a:srgbClr>
+            </a:outerShdw>
+          </a:effectLst>
+        </p:spPr>
+      </p:sp>
+      <p:sp>
+        <p:nvSpPr>
+          <p:cNvPr id="23" name="Text 21"/>
+          <p:cNvSpPr/>
+          <p:nvPr/>
+        </p:nvSpPr>
+        <p:spPr>
+          <a:xfrm>
+            <a:off x="6519672" y="2258568"/>
+            <a:ext cx="1828800" cy="292608"/>
+          </a:xfrm>
+          <a:prstGeom prst="rect">
+            <a:avLst/>
+          </a:prstGeom>
+          <a:noFill/>
+          <a:ln/>
+        </p:spPr>
+        <p:txBody>
+          <a:bodyPr wrap="square" lIns="0" tIns="0" rIns="0" bIns="0" rtlCol="0" anchor="ctr"/>
+          <a:lstStyle/>
+          <a:p>
+            <a:pPr algn="ctr" indent="0" marL="0">
+              <a:buNone/>
+            </a:pPr>
+            <a:r>
+              <a:rPr lang="en-US" sz="1300" b="1" dirty="0">
+                <a:solidFill>
+                  <a:srgbClr val="9D174D"/>
+                </a:solidFill>
+                <a:latin typeface="Trebuchet MS" pitchFamily="34" charset="0"/>
+                <a:ea typeface="Trebuchet MS" pitchFamily="34" charset="-122"/>
+                <a:cs typeface="Trebuchet MS" pitchFamily="34" charset="-120"/>
+              </a:rPr>
+              <a:t>ed</a:t>
+            </a:r>
+            <a:endParaRPr lang="en-US" sz="1300" dirty="0"/>
+          </a:p>
+        </p:txBody>
+      </p:sp>
+      <p:sp>
+        <p:nvSpPr>
+          <p:cNvPr id="24" name="Text 22"/>
+          <p:cNvSpPr/>
+          <p:nvPr/>
+        </p:nvSpPr>
+        <p:spPr>
+          <a:xfrm>
+            <a:off x="6519672" y="2569464"/>
+            <a:ext cx="1828800" cy="201168"/>
+          </a:xfrm>
+          <a:prstGeom prst="rect">
+            <a:avLst/>
+          </a:prstGeom>
+          <a:noFill/>
+          <a:ln/>
+        </p:spPr>
+        <p:txBody>
+          <a:bodyPr wrap="square" lIns="0" tIns="0" rIns="0" bIns="0" rtlCol="0" anchor="t"/>
+          <a:lstStyle/>
+          <a:p>
+            <a:pPr algn="ctr" indent="0" marL="0">
+              <a:buNone/>
+            </a:pPr>
+            <a:r>
+              <a:rPr lang="en-US" sz="850" dirty="0">
+                <a:solidFill>
+                  <a:srgbClr val="475569"/>
+                </a:solidFill>
+                <a:latin typeface="Calibri" pitchFamily="34" charset="0"/>
+                <a:ea typeface="Calibri" pitchFamily="34" charset="-122"/>
+                <a:cs typeface="Calibri" pitchFamily="34" charset="-120"/>
+              </a:rPr>
+              <a:t>past tense</a:t>
+            </a:r>
+            <a:endParaRPr lang="en-US" sz="850" dirty="0"/>
+          </a:p>
+        </p:txBody>
+      </p:sp>
+      <p:sp>
+        <p:nvSpPr>
+          <p:cNvPr id="25" name="Shape 23"/>
           <p:cNvSpPr/>
           <p:nvPr/>
         </p:nvSpPr>
@@ -29506,7 +31567,7 @@
       </p:sp>
       <p:sp>
         <p:nvSpPr>
-          <p:cNvPr id="23" name="Text 21"/>
+          <p:cNvPr id="26" name="Text 24"/>
           <p:cNvSpPr/>
           <p:nvPr/>
         </p:nvSpPr>
@@ -29545,7 +31606,7 @@
       </p:sp>
       <p:sp>
         <p:nvSpPr>
-          <p:cNvPr id="24" name="Shape 22"/>
+          <p:cNvPr id="27" name="Shape 25"/>
           <p:cNvSpPr/>
           <p:nvPr/>
         </p:nvSpPr>
@@ -29572,13 +31633,13 @@
       </p:sp>
       <p:sp>
         <p:nvSpPr>
-          <p:cNvPr id="25" name="Shape 23"/>
-          <p:cNvSpPr/>
-          <p:nvPr/>
-        </p:nvSpPr>
-        <p:spPr>
-          <a:xfrm>
-            <a:off x="2999232" y="3364992"/>
+          <p:cNvPr id="28" name="Shape 26"/>
+          <p:cNvSpPr/>
+          <p:nvPr/>
+        </p:nvSpPr>
+        <p:spPr>
+          <a:xfrm>
+            <a:off x="2313432" y="3364992"/>
             <a:ext cx="1645920" cy="475488"/>
           </a:xfrm>
           <a:prstGeom prst="rect">
@@ -29599,13 +31660,13 @@
       </p:sp>
       <p:sp>
         <p:nvSpPr>
-          <p:cNvPr id="26" name="Text 24"/>
-          <p:cNvSpPr/>
-          <p:nvPr/>
-        </p:nvSpPr>
-        <p:spPr>
-          <a:xfrm>
-            <a:off x="2999232" y="3364992"/>
+          <p:cNvPr id="29" name="Text 27"/>
+          <p:cNvSpPr/>
+          <p:nvPr/>
+        </p:nvSpPr>
+        <p:spPr>
+          <a:xfrm>
+            <a:off x="2313432" y="3364992"/>
             <a:ext cx="1645920" cy="475488"/>
           </a:xfrm>
           <a:prstGeom prst="rect">
@@ -29630,7 +31691,7 @@
                 <a:ea typeface="Trebuchet MS" pitchFamily="34" charset="-122"/>
                 <a:cs typeface="Trebuchet MS" pitchFamily="34" charset="-120"/>
               </a:rPr>
-              <a:t>ask</a:t>
+              <a:t>o</a:t>
             </a:r>
             <a:endParaRPr lang="en-US" sz="1400" dirty="0"/>
           </a:p>
@@ -29638,14 +31699,14 @@
       </p:sp>
       <p:sp>
         <p:nvSpPr>
-          <p:cNvPr id="27" name="Text 25"/>
-          <p:cNvSpPr/>
-          <p:nvPr/>
-        </p:nvSpPr>
-        <p:spPr>
-          <a:xfrm>
-            <a:off x="4645152" y="3364992"/>
-            <a:ext cx="1097280" cy="475488"/>
+          <p:cNvPr id="30" name="Text 28"/>
+          <p:cNvSpPr/>
+          <p:nvPr/>
+        </p:nvSpPr>
+        <p:spPr>
+          <a:xfrm>
+            <a:off x="3959352" y="3364992"/>
+            <a:ext cx="411480" cy="475488"/>
           </a:xfrm>
           <a:prstGeom prst="rect">
             <a:avLst/>
@@ -29677,13 +31738,13 @@
       </p:sp>
       <p:sp>
         <p:nvSpPr>
-          <p:cNvPr id="28" name="Shape 26"/>
-          <p:cNvSpPr/>
-          <p:nvPr/>
-        </p:nvSpPr>
-        <p:spPr>
-          <a:xfrm>
-            <a:off x="5742432" y="3364992"/>
+          <p:cNvPr id="31" name="Shape 29"/>
+          <p:cNvSpPr/>
+          <p:nvPr/>
+        </p:nvSpPr>
+        <p:spPr>
+          <a:xfrm>
+            <a:off x="4370832" y="3364992"/>
             <a:ext cx="1645920" cy="475488"/>
           </a:xfrm>
           <a:prstGeom prst="rect">
@@ -29704,13 +31765,13 @@
       </p:sp>
       <p:sp>
         <p:nvSpPr>
-          <p:cNvPr id="29" name="Text 27"/>
-          <p:cNvSpPr/>
-          <p:nvPr/>
-        </p:nvSpPr>
-        <p:spPr>
-          <a:xfrm>
-            <a:off x="5742432" y="3364992"/>
+          <p:cNvPr id="32" name="Text 30"/>
+          <p:cNvSpPr/>
+          <p:nvPr/>
+        </p:nvSpPr>
+        <p:spPr>
+          <a:xfrm>
+            <a:off x="4370832" y="3364992"/>
             <a:ext cx="1645920" cy="475488"/>
           </a:xfrm>
           <a:prstGeom prst="rect">
@@ -29735,7 +31796,7 @@
                 <a:ea typeface="Trebuchet MS" pitchFamily="34" charset="-122"/>
                 <a:cs typeface="Trebuchet MS" pitchFamily="34" charset="-120"/>
               </a:rPr>
-              <a:t>ing</a:t>
+              <a:t>ver</a:t>
             </a:r>
             <a:endParaRPr lang="en-US" sz="1400" dirty="0"/>
           </a:p>
@@ -29743,7 +31804,112 @@
       </p:sp>
       <p:sp>
         <p:nvSpPr>
-          <p:cNvPr id="30" name="Shape 28"/>
+          <p:cNvPr id="33" name="Text 31"/>
+          <p:cNvSpPr/>
+          <p:nvPr/>
+        </p:nvSpPr>
+        <p:spPr>
+          <a:xfrm>
+            <a:off x="6016752" y="3364992"/>
+            <a:ext cx="411480" cy="475488"/>
+          </a:xfrm>
+          <a:prstGeom prst="rect">
+            <a:avLst/>
+          </a:prstGeom>
+          <a:noFill/>
+          <a:ln/>
+        </p:spPr>
+        <p:txBody>
+          <a:bodyPr wrap="square" lIns="0" tIns="0" rIns="0" bIns="0" rtlCol="0" anchor="ctr"/>
+          <a:lstStyle/>
+          <a:p>
+            <a:pPr algn="ctr" indent="0" marL="0">
+              <a:buNone/>
+            </a:pPr>
+            <a:r>
+              <a:rPr lang="en-US" sz="1600" b="1" dirty="0">
+                <a:solidFill>
+                  <a:srgbClr val="0D9488"/>
+                </a:solidFill>
+                <a:latin typeface="Trebuchet MS" pitchFamily="34" charset="0"/>
+                <a:ea typeface="Trebuchet MS" pitchFamily="34" charset="-122"/>
+                <a:cs typeface="Trebuchet MS" pitchFamily="34" charset="-120"/>
+              </a:rPr>
+              <a:t>·</a:t>
+            </a:r>
+            <a:endParaRPr lang="en-US" sz="1600" dirty="0"/>
+          </a:p>
+        </p:txBody>
+      </p:sp>
+      <p:sp>
+        <p:nvSpPr>
+          <p:cNvPr id="34" name="Shape 32"/>
+          <p:cNvSpPr/>
+          <p:nvPr/>
+        </p:nvSpPr>
+        <p:spPr>
+          <a:xfrm>
+            <a:off x="6428232" y="3364992"/>
+            <a:ext cx="1645920" cy="475488"/>
+          </a:xfrm>
+          <a:prstGeom prst="rect">
+            <a:avLst>
+              <a:gd name="adj" fmla="val 9615"/>
+            </a:avLst>
+          </a:prstGeom>
+          <a:solidFill>
+            <a:srgbClr val="FFFFFF"/>
+          </a:solidFill>
+          <a:ln w="12700">
+            <a:solidFill>
+              <a:srgbClr val="0D9488"/>
+            </a:solidFill>
+            <a:prstDash val="solid"/>
+          </a:ln>
+        </p:spPr>
+      </p:sp>
+      <p:sp>
+        <p:nvSpPr>
+          <p:cNvPr id="35" name="Text 33"/>
+          <p:cNvSpPr/>
+          <p:nvPr/>
+        </p:nvSpPr>
+        <p:spPr>
+          <a:xfrm>
+            <a:off x="6428232" y="3364992"/>
+            <a:ext cx="1645920" cy="475488"/>
+          </a:xfrm>
+          <a:prstGeom prst="rect">
+            <a:avLst/>
+          </a:prstGeom>
+          <a:noFill/>
+          <a:ln/>
+        </p:spPr>
+        <p:txBody>
+          <a:bodyPr wrap="square" lIns="0" tIns="0" rIns="0" bIns="0" rtlCol="0" anchor="ctr"/>
+          <a:lstStyle/>
+          <a:p>
+            <a:pPr algn="ctr" indent="0" marL="0">
+              <a:buNone/>
+            </a:pPr>
+            <a:r>
+              <a:rPr lang="en-US" sz="1400" b="1" dirty="0">
+                <a:solidFill>
+                  <a:srgbClr val="0D9488"/>
+                </a:solidFill>
+                <a:latin typeface="Trebuchet MS" pitchFamily="34" charset="0"/>
+                <a:ea typeface="Trebuchet MS" pitchFamily="34" charset="-122"/>
+                <a:cs typeface="Trebuchet MS" pitchFamily="34" charset="-120"/>
+              </a:rPr>
+              <a:t>asked</a:t>
+            </a:r>
+            <a:endParaRPr lang="en-US" sz="1400" dirty="0"/>
+          </a:p>
+        </p:txBody>
+      </p:sp>
+      <p:sp>
+        <p:nvSpPr>
+          <p:cNvPr id="36" name="Shape 34"/>
           <p:cNvSpPr/>
           <p:nvPr/>
         </p:nvSpPr>
@@ -29770,7 +31936,7 @@
       </p:sp>
       <p:sp>
         <p:nvSpPr>
-          <p:cNvPr id="31" name="Text 29"/>
+          <p:cNvPr id="37" name="Text 35"/>
           <p:cNvSpPr/>
           <p:nvPr/>
         </p:nvSpPr>
@@ -29809,18 +31975,18 @@
       </p:sp>
       <p:sp>
         <p:nvSpPr>
-          <p:cNvPr id="32" name="Shape 30"/>
+          <p:cNvPr id="38" name="Shape 36"/>
           <p:cNvSpPr/>
           <p:nvPr/>
         </p:nvSpPr>
         <p:spPr>
           <a:xfrm>
             <a:off x="1874520" y="4096512"/>
-            <a:ext cx="6903720" cy="658368"/>
+            <a:ext cx="6903720" cy="804672"/>
           </a:xfrm>
           <a:prstGeom prst="rect">
             <a:avLst>
-              <a:gd name="adj" fmla="val 8333"/>
+              <a:gd name="adj" fmla="val 6818"/>
             </a:avLst>
           </a:prstGeom>
           <a:solidFill>
@@ -29836,18 +32002,18 @@
       </p:sp>
       <p:sp>
         <p:nvSpPr>
-          <p:cNvPr id="33" name="Shape 31"/>
-          <p:cNvSpPr/>
-          <p:nvPr/>
-        </p:nvSpPr>
-        <p:spPr>
-          <a:xfrm>
-            <a:off x="2670048" y="4169664"/>
-            <a:ext cx="685800" cy="475488"/>
+          <p:cNvPr id="39" name="Shape 37"/>
+          <p:cNvSpPr/>
+          <p:nvPr/>
+        </p:nvSpPr>
+        <p:spPr>
+          <a:xfrm>
+            <a:off x="2124837" y="4169664"/>
+            <a:ext cx="685800" cy="384048"/>
           </a:xfrm>
           <a:prstGeom prst="rect">
             <a:avLst>
-              <a:gd name="adj" fmla="val 7692"/>
+              <a:gd name="adj" fmla="val 9524"/>
             </a:avLst>
           </a:prstGeom>
           <a:solidFill>
@@ -29863,14 +32029,14 @@
       </p:sp>
       <p:sp>
         <p:nvSpPr>
-          <p:cNvPr id="34" name="Text 32"/>
-          <p:cNvSpPr/>
-          <p:nvPr/>
-        </p:nvSpPr>
-        <p:spPr>
-          <a:xfrm>
-            <a:off x="2670048" y="4169664"/>
-            <a:ext cx="685800" cy="475488"/>
+          <p:cNvPr id="40" name="Text 38"/>
+          <p:cNvSpPr/>
+          <p:nvPr/>
+        </p:nvSpPr>
+        <p:spPr>
+          <a:xfrm>
+            <a:off x="2124837" y="4169664"/>
+            <a:ext cx="685800" cy="384048"/>
           </a:xfrm>
           <a:prstGeom prst="rect">
             <a:avLst/>
@@ -29894,7 +32060,7 @@
                 <a:ea typeface="Trebuchet MS" pitchFamily="34" charset="-122"/>
                 <a:cs typeface="Trebuchet MS" pitchFamily="34" charset="-120"/>
               </a:rPr>
-              <a:t>a</a:t>
+              <a:t>o</a:t>
             </a:r>
             <a:endParaRPr lang="en-US" sz="900" dirty="0"/>
           </a:p>
@@ -29902,18 +32068,18 @@
       </p:sp>
       <p:sp>
         <p:nvSpPr>
-          <p:cNvPr id="35" name="Shape 33"/>
-          <p:cNvSpPr/>
-          <p:nvPr/>
-        </p:nvSpPr>
-        <p:spPr>
-          <a:xfrm>
-            <a:off x="4123944" y="4169664"/>
-            <a:ext cx="685800" cy="475488"/>
+          <p:cNvPr id="41" name="Shape 39"/>
+          <p:cNvSpPr/>
+          <p:nvPr/>
+        </p:nvSpPr>
+        <p:spPr>
+          <a:xfrm>
+            <a:off x="3033522" y="4169664"/>
+            <a:ext cx="685800" cy="384048"/>
           </a:xfrm>
           <a:prstGeom prst="rect">
             <a:avLst>
-              <a:gd name="adj" fmla="val 7692"/>
+              <a:gd name="adj" fmla="val 9524"/>
             </a:avLst>
           </a:prstGeom>
           <a:solidFill>
@@ -29929,14 +32095,14 @@
       </p:sp>
       <p:sp>
         <p:nvSpPr>
-          <p:cNvPr id="36" name="Text 34"/>
-          <p:cNvSpPr/>
-          <p:nvPr/>
-        </p:nvSpPr>
-        <p:spPr>
-          <a:xfrm>
-            <a:off x="4123944" y="4169664"/>
-            <a:ext cx="685800" cy="475488"/>
+          <p:cNvPr id="42" name="Text 40"/>
+          <p:cNvSpPr/>
+          <p:nvPr/>
+        </p:nvSpPr>
+        <p:spPr>
+          <a:xfrm>
+            <a:off x="3033522" y="4169664"/>
+            <a:ext cx="685800" cy="384048"/>
           </a:xfrm>
           <a:prstGeom prst="rect">
             <a:avLst/>
@@ -29960,7 +32126,7 @@
                 <a:ea typeface="Trebuchet MS" pitchFamily="34" charset="-122"/>
                 <a:cs typeface="Trebuchet MS" pitchFamily="34" charset="-120"/>
               </a:rPr>
-              <a:t>sk</a:t>
+              <a:t>v</a:t>
             </a:r>
             <a:endParaRPr lang="en-US" sz="900" dirty="0"/>
           </a:p>
@@ -29968,18 +32134,18 @@
       </p:sp>
       <p:sp>
         <p:nvSpPr>
-          <p:cNvPr id="37" name="Shape 35"/>
-          <p:cNvSpPr/>
-          <p:nvPr/>
-        </p:nvSpPr>
-        <p:spPr>
-          <a:xfrm>
-            <a:off x="5577840" y="4169664"/>
-            <a:ext cx="685800" cy="475488"/>
+          <p:cNvPr id="43" name="Shape 41"/>
+          <p:cNvSpPr/>
+          <p:nvPr/>
+        </p:nvSpPr>
+        <p:spPr>
+          <a:xfrm>
+            <a:off x="3942207" y="4169664"/>
+            <a:ext cx="685800" cy="384048"/>
           </a:xfrm>
           <a:prstGeom prst="rect">
             <a:avLst>
-              <a:gd name="adj" fmla="val 7692"/>
+              <a:gd name="adj" fmla="val 9524"/>
             </a:avLst>
           </a:prstGeom>
           <a:solidFill>
@@ -29995,14 +32161,14 @@
       </p:sp>
       <p:sp>
         <p:nvSpPr>
-          <p:cNvPr id="38" name="Text 36"/>
-          <p:cNvSpPr/>
-          <p:nvPr/>
-        </p:nvSpPr>
-        <p:spPr>
-          <a:xfrm>
-            <a:off x="5577840" y="4169664"/>
-            <a:ext cx="685800" cy="475488"/>
+          <p:cNvPr id="44" name="Text 42"/>
+          <p:cNvSpPr/>
+          <p:nvPr/>
+        </p:nvSpPr>
+        <p:spPr>
+          <a:xfrm>
+            <a:off x="3942207" y="4169664"/>
+            <a:ext cx="685800" cy="384048"/>
           </a:xfrm>
           <a:prstGeom prst="rect">
             <a:avLst/>
@@ -30026,7 +32192,7 @@
                 <a:ea typeface="Trebuchet MS" pitchFamily="34" charset="-122"/>
                 <a:cs typeface="Trebuchet MS" pitchFamily="34" charset="-120"/>
               </a:rPr>
-              <a:t>i</a:t>
+              <a:t>er</a:t>
             </a:r>
             <a:endParaRPr lang="en-US" sz="900" dirty="0"/>
           </a:p>
@@ -30034,18 +32200,18 @@
       </p:sp>
       <p:sp>
         <p:nvSpPr>
-          <p:cNvPr id="39" name="Shape 37"/>
-          <p:cNvSpPr/>
-          <p:nvPr/>
-        </p:nvSpPr>
-        <p:spPr>
-          <a:xfrm>
-            <a:off x="7031736" y="4169664"/>
-            <a:ext cx="685800" cy="475488"/>
+          <p:cNvPr id="45" name="Shape 43"/>
+          <p:cNvSpPr/>
+          <p:nvPr/>
+        </p:nvSpPr>
+        <p:spPr>
+          <a:xfrm>
+            <a:off x="4850892" y="4169664"/>
+            <a:ext cx="685800" cy="384048"/>
           </a:xfrm>
           <a:prstGeom prst="rect">
             <a:avLst>
-              <a:gd name="adj" fmla="val 7692"/>
+              <a:gd name="adj" fmla="val 9524"/>
             </a:avLst>
           </a:prstGeom>
           <a:solidFill>
@@ -30061,14 +32227,14 @@
       </p:sp>
       <p:sp>
         <p:nvSpPr>
-          <p:cNvPr id="40" name="Text 38"/>
-          <p:cNvSpPr/>
-          <p:nvPr/>
-        </p:nvSpPr>
-        <p:spPr>
-          <a:xfrm>
-            <a:off x="7031736" y="4169664"/>
-            <a:ext cx="685800" cy="475488"/>
+          <p:cNvPr id="46" name="Text 44"/>
+          <p:cNvSpPr/>
+          <p:nvPr/>
+        </p:nvSpPr>
+        <p:spPr>
+          <a:xfrm>
+            <a:off x="4850892" y="4169664"/>
+            <a:ext cx="685800" cy="384048"/>
           </a:xfrm>
           <a:prstGeom prst="rect">
             <a:avLst/>
@@ -30092,9 +32258,246 @@
                 <a:ea typeface="Trebuchet MS" pitchFamily="34" charset="-122"/>
                 <a:cs typeface="Trebuchet MS" pitchFamily="34" charset="-120"/>
               </a:rPr>
-              <a:t>ng</a:t>
+              <a:t>a</a:t>
             </a:r>
             <a:endParaRPr lang="en-US" sz="900" dirty="0"/>
+          </a:p>
+        </p:txBody>
+      </p:sp>
+      <p:sp>
+        <p:nvSpPr>
+          <p:cNvPr id="47" name="Shape 45"/>
+          <p:cNvSpPr/>
+          <p:nvPr/>
+        </p:nvSpPr>
+        <p:spPr>
+          <a:xfrm>
+            <a:off x="5759577" y="4169664"/>
+            <a:ext cx="685800" cy="384048"/>
+          </a:xfrm>
+          <a:prstGeom prst="rect">
+            <a:avLst>
+              <a:gd name="adj" fmla="val 9524"/>
+            </a:avLst>
+          </a:prstGeom>
+          <a:solidFill>
+            <a:srgbClr val="FFFFFF"/>
+          </a:solidFill>
+          <a:ln w="12700">
+            <a:solidFill>
+              <a:srgbClr val="DB2777"/>
+            </a:solidFill>
+            <a:prstDash val="solid"/>
+          </a:ln>
+        </p:spPr>
+      </p:sp>
+      <p:sp>
+        <p:nvSpPr>
+          <p:cNvPr id="48" name="Text 46"/>
+          <p:cNvSpPr/>
+          <p:nvPr/>
+        </p:nvSpPr>
+        <p:spPr>
+          <a:xfrm>
+            <a:off x="5759577" y="4169664"/>
+            <a:ext cx="685800" cy="384048"/>
+          </a:xfrm>
+          <a:prstGeom prst="rect">
+            <a:avLst/>
+          </a:prstGeom>
+          <a:noFill/>
+          <a:ln/>
+        </p:spPr>
+        <p:txBody>
+          <a:bodyPr wrap="square" lIns="0" tIns="0" rIns="0" bIns="0" rtlCol="0" anchor="ctr"/>
+          <a:lstStyle/>
+          <a:p>
+            <a:pPr algn="ctr" indent="0" marL="0">
+              <a:buNone/>
+            </a:pPr>
+            <a:r>
+              <a:rPr lang="en-US" sz="900" b="1" dirty="0">
+                <a:solidFill>
+                  <a:srgbClr val="9D174D"/>
+                </a:solidFill>
+                <a:latin typeface="Trebuchet MS" pitchFamily="34" charset="0"/>
+                <a:ea typeface="Trebuchet MS" pitchFamily="34" charset="-122"/>
+                <a:cs typeface="Trebuchet MS" pitchFamily="34" charset="-120"/>
+              </a:rPr>
+              <a:t>s</a:t>
+            </a:r>
+            <a:endParaRPr lang="en-US" sz="900" dirty="0"/>
+          </a:p>
+        </p:txBody>
+      </p:sp>
+      <p:sp>
+        <p:nvSpPr>
+          <p:cNvPr id="49" name="Shape 47"/>
+          <p:cNvSpPr/>
+          <p:nvPr/>
+        </p:nvSpPr>
+        <p:spPr>
+          <a:xfrm>
+            <a:off x="6668262" y="4169664"/>
+            <a:ext cx="685800" cy="384048"/>
+          </a:xfrm>
+          <a:prstGeom prst="rect">
+            <a:avLst>
+              <a:gd name="adj" fmla="val 9524"/>
+            </a:avLst>
+          </a:prstGeom>
+          <a:solidFill>
+            <a:srgbClr val="FFFFFF"/>
+          </a:solidFill>
+          <a:ln w="12700">
+            <a:solidFill>
+              <a:srgbClr val="DB2777"/>
+            </a:solidFill>
+            <a:prstDash val="solid"/>
+          </a:ln>
+        </p:spPr>
+      </p:sp>
+      <p:sp>
+        <p:nvSpPr>
+          <p:cNvPr id="50" name="Text 48"/>
+          <p:cNvSpPr/>
+          <p:nvPr/>
+        </p:nvSpPr>
+        <p:spPr>
+          <a:xfrm>
+            <a:off x="6668262" y="4169664"/>
+            <a:ext cx="685800" cy="384048"/>
+          </a:xfrm>
+          <a:prstGeom prst="rect">
+            <a:avLst/>
+          </a:prstGeom>
+          <a:noFill/>
+          <a:ln/>
+        </p:spPr>
+        <p:txBody>
+          <a:bodyPr wrap="square" lIns="0" tIns="0" rIns="0" bIns="0" rtlCol="0" anchor="ctr"/>
+          <a:lstStyle/>
+          <a:p>
+            <a:pPr algn="ctr" indent="0" marL="0">
+              <a:buNone/>
+            </a:pPr>
+            <a:r>
+              <a:rPr lang="en-US" sz="900" b="1" dirty="0">
+                <a:solidFill>
+                  <a:srgbClr val="9D174D"/>
+                </a:solidFill>
+                <a:latin typeface="Trebuchet MS" pitchFamily="34" charset="0"/>
+                <a:ea typeface="Trebuchet MS" pitchFamily="34" charset="-122"/>
+                <a:cs typeface="Trebuchet MS" pitchFamily="34" charset="-120"/>
+              </a:rPr>
+              <a:t>k</a:t>
+            </a:r>
+            <a:endParaRPr lang="en-US" sz="900" dirty="0"/>
+          </a:p>
+        </p:txBody>
+      </p:sp>
+      <p:sp>
+        <p:nvSpPr>
+          <p:cNvPr id="51" name="Shape 49"/>
+          <p:cNvSpPr/>
+          <p:nvPr/>
+        </p:nvSpPr>
+        <p:spPr>
+          <a:xfrm>
+            <a:off x="7576947" y="4169664"/>
+            <a:ext cx="685800" cy="384048"/>
+          </a:xfrm>
+          <a:prstGeom prst="rect">
+            <a:avLst>
+              <a:gd name="adj" fmla="val 9524"/>
+            </a:avLst>
+          </a:prstGeom>
+          <a:solidFill>
+            <a:srgbClr val="FFFFFF"/>
+          </a:solidFill>
+          <a:ln w="12700">
+            <a:solidFill>
+              <a:srgbClr val="DB2777"/>
+            </a:solidFill>
+            <a:prstDash val="solid"/>
+          </a:ln>
+        </p:spPr>
+      </p:sp>
+      <p:sp>
+        <p:nvSpPr>
+          <p:cNvPr id="52" name="Text 50"/>
+          <p:cNvSpPr/>
+          <p:nvPr/>
+        </p:nvSpPr>
+        <p:spPr>
+          <a:xfrm>
+            <a:off x="7576947" y="4169664"/>
+            <a:ext cx="685800" cy="384048"/>
+          </a:xfrm>
+          <a:prstGeom prst="rect">
+            <a:avLst/>
+          </a:prstGeom>
+          <a:noFill/>
+          <a:ln/>
+        </p:spPr>
+        <p:txBody>
+          <a:bodyPr wrap="square" lIns="0" tIns="0" rIns="0" bIns="0" rtlCol="0" anchor="ctr"/>
+          <a:lstStyle/>
+          <a:p>
+            <a:pPr algn="ctr" indent="0" marL="0">
+              <a:buNone/>
+            </a:pPr>
+            <a:r>
+              <a:rPr lang="en-US" sz="900" b="1" dirty="0">
+                <a:solidFill>
+                  <a:srgbClr val="9D174D"/>
+                </a:solidFill>
+                <a:latin typeface="Trebuchet MS" pitchFamily="34" charset="0"/>
+                <a:ea typeface="Trebuchet MS" pitchFamily="34" charset="-122"/>
+                <a:cs typeface="Trebuchet MS" pitchFamily="34" charset="-120"/>
+              </a:rPr>
+              <a:t>t</a:t>
+            </a:r>
+            <a:endParaRPr lang="en-US" sz="900" dirty="0"/>
+          </a:p>
+        </p:txBody>
+      </p:sp>
+      <p:sp>
+        <p:nvSpPr>
+          <p:cNvPr id="53" name="Text 51"/>
+          <p:cNvSpPr/>
+          <p:nvPr/>
+        </p:nvSpPr>
+        <p:spPr>
+          <a:xfrm>
+            <a:off x="7576947" y="4572000"/>
+            <a:ext cx="685800" cy="219456"/>
+          </a:xfrm>
+          <a:prstGeom prst="rect">
+            <a:avLst/>
+          </a:prstGeom>
+          <a:noFill/>
+          <a:ln/>
+        </p:spPr>
+        <p:txBody>
+          <a:bodyPr wrap="square" lIns="0" tIns="0" rIns="0" bIns="0" rtlCol="0" anchor="t"/>
+          <a:lstStyle/>
+          <a:p>
+            <a:pPr algn="ctr" indent="0" marL="0">
+              <a:buNone/>
+            </a:pPr>
+            <a:r>
+              <a:rPr lang="en-US" sz="750" i="1" dirty="0">
+                <a:solidFill>
+                  <a:srgbClr val="94A3B8"/>
+                </a:solidFill>
+                <a:latin typeface="Calibri" pitchFamily="34" charset="0"/>
+                <a:ea typeface="Calibri" pitchFamily="34" charset="-122"/>
+                <a:cs typeface="Calibri" pitchFamily="34" charset="-120"/>
+              </a:rPr>
+              <a:t>/t/</a:t>
+            </a:r>
+            <a:endParaRPr lang="en-US" sz="750" dirty="0"/>
           </a:p>
         </p:txBody>
       </p:sp>
@@ -32199,7 +34602,7 @@
                 <a:ea typeface="Trebuchet MS" pitchFamily="34" charset="-122"/>
                 <a:cs typeface="Trebuchet MS" pitchFamily="34" charset="-120"/>
               </a:rPr>
-              <a:t>out-</a:t>
+              <a:t>over-</a:t>
             </a:r>
             <a:endParaRPr lang="en-US" sz="1300" dirty="0"/>
           </a:p>
@@ -32352,7 +34755,7 @@
                 <a:ea typeface="Trebuchet MS" pitchFamily="34" charset="-122"/>
                 <a:cs typeface="Trebuchet MS" pitchFamily="34" charset="-120"/>
               </a:rPr>
-              <a:t>fore-</a:t>
+              <a:t>out-</a:t>
             </a:r>
             <a:endParaRPr lang="en-US" sz="1300" dirty="0"/>
           </a:p>
@@ -32505,7 +34908,7 @@
                 <a:ea typeface="Trebuchet MS" pitchFamily="34" charset="-122"/>
                 <a:cs typeface="Trebuchet MS" pitchFamily="34" charset="-120"/>
               </a:rPr>
-              <a:t>over-</a:t>
+              <a:t>fore-</a:t>
             </a:r>
             <a:endParaRPr lang="en-US" sz="1300" dirty="0"/>
           </a:p>
@@ -32699,7 +35102,7 @@
                 <a:ea typeface="Trebuchet MS" pitchFamily="34" charset="-122"/>
                 <a:cs typeface="Trebuchet MS" pitchFamily="34" charset="-120"/>
               </a:rPr>
-              <a:t>ask</a:t>
+              <a:t>asked</a:t>
             </a:r>
             <a:endParaRPr lang="en-US" sz="1200" dirty="0"/>
           </a:p>
@@ -32765,7 +35168,7 @@
                 <a:ea typeface="Trebuchet MS" pitchFamily="34" charset="-122"/>
                 <a:cs typeface="Trebuchet MS" pitchFamily="34" charset="-120"/>
               </a:rPr>
-              <a:t>asked</a:t>
+              <a:t>asking</a:t>
             </a:r>
             <a:endParaRPr lang="en-US" sz="1200" dirty="0"/>
           </a:p>
@@ -32831,7 +35234,7 @@
                 <a:ea typeface="Trebuchet MS" pitchFamily="34" charset="-122"/>
                 <a:cs typeface="Trebuchet MS" pitchFamily="34" charset="-120"/>
               </a:rPr>
-              <a:t>asking</a:t>
+              <a:t>asker</a:t>
             </a:r>
             <a:endParaRPr lang="en-US" sz="1200" dirty="0"/>
           </a:p>
@@ -32897,7 +35300,7 @@
                 <a:ea typeface="Trebuchet MS" pitchFamily="34" charset="-122"/>
                 <a:cs typeface="Trebuchet MS" pitchFamily="34" charset="-120"/>
               </a:rPr>
-              <a:t>asker</a:t>
+              <a:t>asks</a:t>
             </a:r>
             <a:endParaRPr lang="en-US" sz="1200" dirty="0"/>
           </a:p>
@@ -32963,7 +35366,7 @@
                 <a:ea typeface="Trebuchet MS" pitchFamily="34" charset="-122"/>
                 <a:cs typeface="Trebuchet MS" pitchFamily="34" charset="-120"/>
               </a:rPr>
-              <a:t>asks</a:t>
+              <a:t>reasked</a:t>
             </a:r>
             <a:endParaRPr lang="en-US" sz="1200" dirty="0"/>
           </a:p>
@@ -33029,7 +35432,7 @@
                 <a:ea typeface="Trebuchet MS" pitchFamily="34" charset="-122"/>
                 <a:cs typeface="Trebuchet MS" pitchFamily="34" charset="-120"/>
               </a:rPr>
-              <a:t>reasked</a:t>
+              <a:t>outasked</a:t>
             </a:r>
             <a:endParaRPr lang="en-US" sz="1200" dirty="0"/>
           </a:p>
@@ -33095,7 +35498,7 @@
                 <a:ea typeface="Trebuchet MS" pitchFamily="34" charset="-122"/>
                 <a:cs typeface="Trebuchet MS" pitchFamily="34" charset="-120"/>
               </a:rPr>
-              <a:t>unasked</a:t>
+              <a:t>overasked</a:t>
             </a:r>
             <a:endParaRPr lang="en-US" sz="1200" dirty="0"/>
           </a:p>
@@ -33161,7 +35564,7 @@
                 <a:ea typeface="Trebuchet MS" pitchFamily="34" charset="-122"/>
                 <a:cs typeface="Trebuchet MS" pitchFamily="34" charset="-120"/>
               </a:rPr>
-              <a:t>outask</a:t>
+              <a:t>unasked</a:t>
             </a:r>
             <a:endParaRPr lang="en-US" sz="1200" dirty="0"/>
           </a:p>
@@ -34488,7 +36891,7 @@
                 <a:ea typeface="Calibri" pitchFamily="34" charset="-122"/>
                 <a:cs typeface="Calibri" pitchFamily="34" charset="-120"/>
               </a:rPr>
-              <a:t>2.  The root 'ask' comes from a Greek word.</a:t>
+              <a:t>2.  The root 'ask' means to give an answer.</a:t>
             </a:r>
             <a:endParaRPr lang="en-US" sz="1300" dirty="0"/>
           </a:p>
@@ -34627,7 +37030,7 @@
                 <a:ea typeface="Calibri" pitchFamily="34" charset="-122"/>
                 <a:cs typeface="Calibri" pitchFamily="34" charset="-120"/>
               </a:rPr>
-              <a:t>3.  An 'asker' is a person who asks questions.</a:t>
+              <a:t>3.  The word 'asking' contains the root 'ask' plus a suffix.</a:t>
             </a:r>
             <a:endParaRPr lang="en-US" sz="1300" dirty="0"/>
           </a:p>
@@ -34766,7 +37169,7 @@
                 <a:ea typeface="Calibri" pitchFamily="34" charset="-122"/>
                 <a:cs typeface="Calibri" pitchFamily="34" charset="-120"/>
               </a:rPr>
-              <a:t>4.  Adding 're-' to 'ask' makes the word 'reasked', meaning to ask again.</a:t>
+              <a:t>4.  The prefix 're-' in 'reasked' means to do something again.</a:t>
             </a:r>
             <a:endParaRPr lang="en-US" sz="1300" dirty="0"/>
           </a:p>
@@ -34905,7 +37308,7 @@
                 <a:ea typeface="Calibri" pitchFamily="34" charset="-122"/>
                 <a:cs typeface="Calibri" pitchFamily="34" charset="-120"/>
               </a:rPr>
-              <a:t>5.  The suffix '-ing' changes 'ask' into a describing word like an adjective.</a:t>
+              <a:t>5.  The word 'asker' means a person who never speaks.</a:t>
             </a:r>
             <a:endParaRPr lang="en-US" sz="1300" dirty="0"/>
           </a:p>
@@ -35439,7 +37842,7 @@
                 <a:ea typeface="Calibri" pitchFamily="34" charset="-122"/>
                 <a:cs typeface="Calibri" pitchFamily="34" charset="-120"/>
               </a:rPr>
-              <a:t>Origin: Latin: ascire</a:t>
+              <a:t>Origin: Latin: ascian</a:t>
             </a:r>
             <a:endParaRPr lang="en-US" sz="1100" dirty="0"/>
           </a:p>
@@ -35544,7 +37947,7 @@
                 <a:ea typeface="Trebuchet MS" pitchFamily="34" charset="-122"/>
                 <a:cs typeface="Trebuchet MS" pitchFamily="34" charset="-120"/>
               </a:rPr>
-              <a:t>ask</a:t>
+              <a:t>asked</a:t>
             </a:r>
             <a:endParaRPr lang="en-US" sz="1300" dirty="0"/>
           </a:p>
@@ -35610,7 +38013,7 @@
                 <a:ea typeface="Trebuchet MS" pitchFamily="34" charset="-122"/>
                 <a:cs typeface="Trebuchet MS" pitchFamily="34" charset="-120"/>
               </a:rPr>
-              <a:t>asked</a:t>
+              <a:t>asking</a:t>
             </a:r>
             <a:endParaRPr lang="en-US" sz="1300" dirty="0"/>
           </a:p>
@@ -35676,7 +38079,7 @@
                 <a:ea typeface="Trebuchet MS" pitchFamily="34" charset="-122"/>
                 <a:cs typeface="Trebuchet MS" pitchFamily="34" charset="-120"/>
               </a:rPr>
-              <a:t>asking</a:t>
+              <a:t>asker</a:t>
             </a:r>
             <a:endParaRPr lang="en-US" sz="1300" dirty="0"/>
           </a:p>
@@ -35742,7 +38145,7 @@
                 <a:ea typeface="Trebuchet MS" pitchFamily="34" charset="-122"/>
                 <a:cs typeface="Trebuchet MS" pitchFamily="34" charset="-120"/>
               </a:rPr>
-              <a:t>asker</a:t>
+              <a:t>asks</a:t>
             </a:r>
             <a:endParaRPr lang="en-US" sz="1300" dirty="0"/>
           </a:p>
@@ -35808,7 +38211,7 @@
                 <a:ea typeface="Trebuchet MS" pitchFamily="34" charset="-122"/>
                 <a:cs typeface="Trebuchet MS" pitchFamily="34" charset="-120"/>
               </a:rPr>
-              <a:t>asks</a:t>
+              <a:t>reasked</a:t>
             </a:r>
             <a:endParaRPr lang="en-US" sz="1300" dirty="0"/>
           </a:p>
@@ -35874,7 +38277,7 @@
                 <a:ea typeface="Trebuchet MS" pitchFamily="34" charset="-122"/>
                 <a:cs typeface="Trebuchet MS" pitchFamily="34" charset="-120"/>
               </a:rPr>
-              <a:t>reasked</a:t>
+              <a:t>outasked</a:t>
             </a:r>
             <a:endParaRPr lang="en-US" sz="1300" dirty="0"/>
           </a:p>
@@ -35940,7 +38343,7 @@
                 <a:ea typeface="Trebuchet MS" pitchFamily="34" charset="-122"/>
                 <a:cs typeface="Trebuchet MS" pitchFamily="34" charset="-120"/>
               </a:rPr>
-              <a:t>unasked</a:t>
+              <a:t>overasked</a:t>
             </a:r>
             <a:endParaRPr lang="en-US" sz="1300" dirty="0"/>
           </a:p>
@@ -36878,7 +39281,7 @@
                 <a:ea typeface="Trebuchet MS" pitchFamily="34" charset="-122"/>
                 <a:cs typeface="Trebuchet MS" pitchFamily="34" charset="-120"/>
               </a:rPr>
-              <a:t>out-</a:t>
+              <a:t>over-</a:t>
             </a:r>
             <a:endParaRPr lang="en-US" sz="1300" dirty="0"/>
           </a:p>
@@ -37031,7 +39434,7 @@
                 <a:ea typeface="Trebuchet MS" pitchFamily="34" charset="-122"/>
                 <a:cs typeface="Trebuchet MS" pitchFamily="34" charset="-120"/>
               </a:rPr>
-              <a:t>fore-</a:t>
+              <a:t>out-</a:t>
             </a:r>
             <a:endParaRPr lang="en-US" sz="1300" dirty="0"/>
           </a:p>
@@ -37184,7 +39587,7 @@
                 <a:ea typeface="Trebuchet MS" pitchFamily="34" charset="-122"/>
                 <a:cs typeface="Trebuchet MS" pitchFamily="34" charset="-120"/>
               </a:rPr>
-              <a:t>over-</a:t>
+              <a:t>fore-</a:t>
             </a:r>
             <a:endParaRPr lang="en-US" sz="1300" dirty="0"/>
           </a:p>
@@ -37714,7 +40117,7 @@
                 <a:ea typeface="Trebuchet MS" pitchFamily="34" charset="-122"/>
                 <a:cs typeface="Trebuchet MS" pitchFamily="34" charset="-120"/>
               </a:rPr>
-              <a:t>ask</a:t>
+              <a:t>asked</a:t>
             </a:r>
             <a:endParaRPr lang="en-US" sz="1400" dirty="0"/>
           </a:p>
@@ -38118,7 +40521,7 @@
                 <a:ea typeface="Trebuchet MS" pitchFamily="34" charset="-122"/>
                 <a:cs typeface="Trebuchet MS" pitchFamily="34" charset="-120"/>
               </a:rPr>
-              <a:t>ask</a:t>
+              <a:t>asked</a:t>
             </a:r>
             <a:endParaRPr lang="en-US" sz="1200" dirty="0"/>
           </a:p>
@@ -38184,7 +40587,7 @@
                 <a:ea typeface="Calibri" pitchFamily="34" charset="-122"/>
                 <a:cs typeface="Calibri" pitchFamily="34" charset="-120"/>
               </a:rPr>
-              <a:t>When someone puts a question to another person (used with he, she, or it).</a:t>
+              <a:t>When you ask something again because you didn't get an answer the first time.</a:t>
             </a:r>
             <a:endParaRPr lang="en-US" sz="1200" dirty="0"/>
           </a:p>
@@ -38257,7 +40660,7 @@
                 <a:ea typeface="Trebuchet MS" pitchFamily="34" charset="-122"/>
                 <a:cs typeface="Trebuchet MS" pitchFamily="34" charset="-120"/>
               </a:rPr>
-              <a:t>asked</a:t>
+              <a:t>asking</a:t>
             </a:r>
             <a:endParaRPr lang="en-US" sz="1200" dirty="0"/>
           </a:p>
@@ -38323,7 +40726,7 @@
                 <a:ea typeface="Calibri" pitchFamily="34" charset="-122"/>
                 <a:cs typeface="Calibri" pitchFamily="34" charset="-120"/>
               </a:rPr>
-              <a:t>A person who asks questions or makes requests.</a:t>
+              <a:t>When someone requests something, like when your mum asks you to tidy your room.</a:t>
             </a:r>
             <a:endParaRPr lang="en-US" sz="1200" dirty="0"/>
           </a:p>
@@ -38396,7 +40799,7 @@
                 <a:ea typeface="Trebuchet MS" pitchFamily="34" charset="-122"/>
                 <a:cs typeface="Trebuchet MS" pitchFamily="34" charset="-120"/>
               </a:rPr>
-              <a:t>asking</a:t>
+              <a:t>asker</a:t>
             </a:r>
             <a:endParaRPr lang="en-US" sz="1200" dirty="0"/>
           </a:p>
@@ -38462,7 +40865,7 @@
                 <a:ea typeface="Calibri" pitchFamily="34" charset="-122"/>
                 <a:cs typeface="Calibri" pitchFamily="34" charset="-120"/>
               </a:rPr>
-              <a:t>When you ask a question again because you did not get an answer the first time.</a:t>
+              <a:t>When someone asks more questions than another person.</a:t>
             </a:r>
             <a:endParaRPr lang="en-US" sz="1200" dirty="0"/>
           </a:p>
@@ -38535,7 +40938,7 @@
                 <a:ea typeface="Trebuchet MS" pitchFamily="34" charset="-122"/>
                 <a:cs typeface="Trebuchet MS" pitchFamily="34" charset="-120"/>
               </a:rPr>
-              <a:t>asker</a:t>
+              <a:t>asks</a:t>
             </a:r>
             <a:endParaRPr lang="en-US" sz="1200" dirty="0"/>
           </a:p>
@@ -38601,7 +41004,7 @@
                 <a:ea typeface="Calibri" pitchFamily="34" charset="-122"/>
                 <a:cs typeface="Calibri" pitchFamily="34" charset="-120"/>
               </a:rPr>
-              <a:t>The act of putting a question to someone right now.</a:t>
+              <a:t>A person who asks questions or makes requests.</a:t>
             </a:r>
             <a:endParaRPr lang="en-US" sz="1200" dirty="0"/>
           </a:p>
@@ -38674,7 +41077,7 @@
                 <a:ea typeface="Trebuchet MS" pitchFamily="34" charset="-122"/>
                 <a:cs typeface="Trebuchet MS" pitchFamily="34" charset="-120"/>
               </a:rPr>
-              <a:t>asks</a:t>
+              <a:t>reasked</a:t>
             </a:r>
             <a:endParaRPr lang="en-US" sz="1200" dirty="0"/>
           </a:p>
@@ -38740,7 +41143,7 @@
                 <a:ea typeface="Calibri" pitchFamily="34" charset="-122"/>
                 <a:cs typeface="Calibri" pitchFamily="34" charset="-120"/>
               </a:rPr>
-              <a:t>A question or request that nobody has said out loud yet.</a:t>
+              <a:t>When someone is asked to do too many things at once.</a:t>
             </a:r>
             <a:endParaRPr lang="en-US" sz="1200" dirty="0"/>
           </a:p>
@@ -38813,7 +41216,7 @@
                 <a:ea typeface="Trebuchet MS" pitchFamily="34" charset="-122"/>
                 <a:cs typeface="Trebuchet MS" pitchFamily="34" charset="-120"/>
               </a:rPr>
-              <a:t>reasked</a:t>
+              <a:t>outasked</a:t>
             </a:r>
             <a:endParaRPr lang="en-US" sz="1200" dirty="0"/>
           </a:p>
@@ -38879,7 +41282,7 @@
                 <a:ea typeface="Calibri" pitchFamily="34" charset="-122"/>
                 <a:cs typeface="Calibri" pitchFamily="34" charset="-120"/>
               </a:rPr>
-              <a:t>To put a question to someone or request something from them.</a:t>
+              <a:t>When you have already requested something from someone, like when you asked your teacher a question.</a:t>
             </a:r>
             <a:endParaRPr lang="en-US" sz="1200" dirty="0"/>
           </a:p>
@@ -38952,7 +41355,7 @@
                 <a:ea typeface="Trebuchet MS" pitchFamily="34" charset="-122"/>
                 <a:cs typeface="Trebuchet MS" pitchFamily="34" charset="-120"/>
               </a:rPr>
-              <a:t>unasked</a:t>
+              <a:t>overasked</a:t>
             </a:r>
             <a:endParaRPr lang="en-US" sz="1200" dirty="0"/>
           </a:p>
@@ -39018,7 +41421,7 @@
                 <a:ea typeface="Calibri" pitchFamily="34" charset="-122"/>
                 <a:cs typeface="Calibri" pitchFamily="34" charset="-120"/>
               </a:rPr>
-              <a:t>When you already put a question to someone in the past.</a:t>
+              <a:t>The act of requesting something right now, like asking a friend to play.</a:t>
             </a:r>
             <a:endParaRPr lang="en-US" sz="1200" dirty="0"/>
           </a:p>
@@ -39513,7 +41916,7 @@
                 <a:ea typeface="Calibri" pitchFamily="34" charset="-122"/>
                 <a:cs typeface="Calibri" pitchFamily="34" charset="-120"/>
               </a:rPr>
-              <a:t>She asked her teacher a really interesting question about how volcanoes form.</a:t>
+              <a:t>She was always asking thoughtful questions during science class.</a:t>
             </a:r>
             <a:endParaRPr lang="en-US" sz="1500" dirty="0"/>
           </a:p>
@@ -39677,7 +42080,7 @@
                 <a:ea typeface="Calibri" pitchFamily="34" charset="-122"/>
                 <a:cs typeface="Calibri" pitchFamily="34" charset="-120"/>
               </a:rPr>
-              <a:t>The student kept asking for more time to finish the maths test.</a:t>
+              <a:t>The teacher reasked the question because nobody had answered the first time.</a:t>
             </a:r>
             <a:endParaRPr lang="en-US" sz="1500" dirty="0"/>
           </a:p>
@@ -39841,7 +42244,7 @@
                 <a:ea typeface="Calibri" pitchFamily="34" charset="-122"/>
                 <a:cs typeface="Calibri" pitchFamily="34" charset="-120"/>
               </a:rPr>
-              <a:t>He is a very curious asker who never stops wondering about the world around him.</a:t>
+              <a:t>He was the best asker in the group, always curious about how things worked.</a:t>
             </a:r>
             <a:endParaRPr lang="en-US" sz="1500" dirty="0"/>
           </a:p>

--- a/output/wordlabs-ask-3day.pptx
+++ b/output/wordlabs-ask-3day.pptx
@@ -15357,11 +15357,11 @@
         <p:spPr>
           <a:xfrm>
             <a:off x="1874520" y="4096512"/>
-            <a:ext cx="6903720" cy="804672"/>
+            <a:ext cx="6903720" cy="658368"/>
           </a:xfrm>
           <a:prstGeom prst="rect">
             <a:avLst>
-              <a:gd name="adj" fmla="val 6818"/>
+              <a:gd name="adj" fmla="val 8333"/>
             </a:avLst>
           </a:prstGeom>
           <a:solidFill>
@@ -15383,12 +15383,12 @@
         </p:nvSpPr>
         <p:spPr>
           <a:xfrm>
-            <a:off x="2254649" y="4169664"/>
-            <a:ext cx="685800" cy="384048"/>
+            <a:off x="2124837" y="4169664"/>
+            <a:ext cx="685800" cy="475488"/>
           </a:xfrm>
           <a:prstGeom prst="rect">
             <a:avLst>
-              <a:gd name="adj" fmla="val 9524"/>
+              <a:gd name="adj" fmla="val 7692"/>
             </a:avLst>
           </a:prstGeom>
           <a:solidFill>
@@ -15410,8 +15410,8 @@
         </p:nvSpPr>
         <p:spPr>
           <a:xfrm>
-            <a:off x="2254649" y="4169664"/>
-            <a:ext cx="685800" cy="384048"/>
+            <a:off x="2124837" y="4169664"/>
+            <a:ext cx="685800" cy="475488"/>
           </a:xfrm>
           <a:prstGeom prst="rect">
             <a:avLst/>
@@ -15449,12 +15449,12 @@
         </p:nvSpPr>
         <p:spPr>
           <a:xfrm>
-            <a:off x="3293146" y="4169664"/>
-            <a:ext cx="685800" cy="384048"/>
+            <a:off x="3033522" y="4169664"/>
+            <a:ext cx="685800" cy="475488"/>
           </a:xfrm>
           <a:prstGeom prst="rect">
             <a:avLst>
-              <a:gd name="adj" fmla="val 9524"/>
+              <a:gd name="adj" fmla="val 7692"/>
             </a:avLst>
           </a:prstGeom>
           <a:solidFill>
@@ -15476,8 +15476,8 @@
         </p:nvSpPr>
         <p:spPr>
           <a:xfrm>
-            <a:off x="3293146" y="4169664"/>
-            <a:ext cx="685800" cy="384048"/>
+            <a:off x="3033522" y="4169664"/>
+            <a:ext cx="685800" cy="475488"/>
           </a:xfrm>
           <a:prstGeom prst="rect">
             <a:avLst/>
@@ -15515,12 +15515,12 @@
         </p:nvSpPr>
         <p:spPr>
           <a:xfrm>
-            <a:off x="4331643" y="4169664"/>
-            <a:ext cx="685800" cy="384048"/>
+            <a:off x="3942207" y="4169664"/>
+            <a:ext cx="685800" cy="475488"/>
           </a:xfrm>
           <a:prstGeom prst="rect">
             <a:avLst>
-              <a:gd name="adj" fmla="val 9524"/>
+              <a:gd name="adj" fmla="val 7692"/>
             </a:avLst>
           </a:prstGeom>
           <a:solidFill>
@@ -15542,8 +15542,8 @@
         </p:nvSpPr>
         <p:spPr>
           <a:xfrm>
-            <a:off x="4331643" y="4169664"/>
-            <a:ext cx="685800" cy="384048"/>
+            <a:off x="3942207" y="4169664"/>
+            <a:ext cx="685800" cy="475488"/>
           </a:xfrm>
           <a:prstGeom prst="rect">
             <a:avLst/>
@@ -15581,12 +15581,12 @@
         </p:nvSpPr>
         <p:spPr>
           <a:xfrm>
-            <a:off x="5370141" y="4169664"/>
-            <a:ext cx="685800" cy="384048"/>
+            <a:off x="4850892" y="4169664"/>
+            <a:ext cx="685800" cy="475488"/>
           </a:xfrm>
           <a:prstGeom prst="rect">
             <a:avLst>
-              <a:gd name="adj" fmla="val 9524"/>
+              <a:gd name="adj" fmla="val 7692"/>
             </a:avLst>
           </a:prstGeom>
           <a:solidFill>
@@ -15608,8 +15608,8 @@
         </p:nvSpPr>
         <p:spPr>
           <a:xfrm>
-            <a:off x="5370141" y="4169664"/>
-            <a:ext cx="685800" cy="384048"/>
+            <a:off x="4850892" y="4169664"/>
+            <a:ext cx="685800" cy="475488"/>
           </a:xfrm>
           <a:prstGeom prst="rect">
             <a:avLst/>
@@ -15647,12 +15647,12 @@
         </p:nvSpPr>
         <p:spPr>
           <a:xfrm>
-            <a:off x="6408638" y="4169664"/>
-            <a:ext cx="685800" cy="384048"/>
+            <a:off x="5759577" y="4169664"/>
+            <a:ext cx="685800" cy="475488"/>
           </a:xfrm>
           <a:prstGeom prst="rect">
             <a:avLst>
-              <a:gd name="adj" fmla="val 9524"/>
+              <a:gd name="adj" fmla="val 7692"/>
             </a:avLst>
           </a:prstGeom>
           <a:solidFill>
@@ -15674,8 +15674,8 @@
         </p:nvSpPr>
         <p:spPr>
           <a:xfrm>
-            <a:off x="6408638" y="4169664"/>
-            <a:ext cx="685800" cy="384048"/>
+            <a:off x="5759577" y="4169664"/>
+            <a:ext cx="685800" cy="475488"/>
           </a:xfrm>
           <a:prstGeom prst="rect">
             <a:avLst/>
@@ -15713,12 +15713,12 @@
         </p:nvSpPr>
         <p:spPr>
           <a:xfrm>
-            <a:off x="7447135" y="4169664"/>
-            <a:ext cx="685800" cy="384048"/>
+            <a:off x="6668262" y="4169664"/>
+            <a:ext cx="685800" cy="475488"/>
           </a:xfrm>
           <a:prstGeom prst="rect">
             <a:avLst>
-              <a:gd name="adj" fmla="val 9524"/>
+              <a:gd name="adj" fmla="val 7692"/>
             </a:avLst>
           </a:prstGeom>
           <a:solidFill>
@@ -15740,8 +15740,8 @@
         </p:nvSpPr>
         <p:spPr>
           <a:xfrm>
-            <a:off x="7447135" y="4169664"/>
-            <a:ext cx="685800" cy="384048"/>
+            <a:off x="6668262" y="4169664"/>
+            <a:ext cx="685800" cy="475488"/>
           </a:xfrm>
           <a:prstGeom prst="rect">
             <a:avLst/>
@@ -15765,7 +15765,7 @@
                 <a:ea typeface="Trebuchet MS" pitchFamily="34" charset="-122"/>
                 <a:cs typeface="Trebuchet MS" pitchFamily="34" charset="-120"/>
               </a:rPr>
-              <a:t>t</a:t>
+              <a:t>e</a:t>
             </a:r>
             <a:endParaRPr lang="en-US" sz="900" dirty="0"/>
           </a:p>
@@ -15773,40 +15773,67 @@
       </p:sp>
       <p:sp>
         <p:nvSpPr>
-          <p:cNvPr id="48" name="Text 46"/>
-          <p:cNvSpPr/>
-          <p:nvPr/>
-        </p:nvSpPr>
-        <p:spPr>
-          <a:xfrm>
-            <a:off x="7447135" y="4572000"/>
-            <a:ext cx="685800" cy="219456"/>
-          </a:xfrm>
-          <a:prstGeom prst="rect">
-            <a:avLst/>
-          </a:prstGeom>
-          <a:noFill/>
-          <a:ln/>
-        </p:spPr>
-        <p:txBody>
-          <a:bodyPr wrap="square" lIns="0" tIns="0" rIns="0" bIns="0" rtlCol="0" anchor="t"/>
-          <a:lstStyle/>
-          <a:p>
-            <a:pPr algn="ctr" indent="0" marL="0">
-              <a:buNone/>
-            </a:pPr>
-            <a:r>
-              <a:rPr lang="en-US" sz="750" i="1" dirty="0">
-                <a:solidFill>
-                  <a:srgbClr val="94A3B8"/>
-                </a:solidFill>
-                <a:latin typeface="Calibri" pitchFamily="34" charset="0"/>
-                <a:ea typeface="Calibri" pitchFamily="34" charset="-122"/>
-                <a:cs typeface="Calibri" pitchFamily="34" charset="-120"/>
-              </a:rPr>
-              <a:t>/t/</a:t>
-            </a:r>
-            <a:endParaRPr lang="en-US" sz="750" dirty="0"/>
+          <p:cNvPr id="48" name="Shape 46"/>
+          <p:cNvSpPr/>
+          <p:nvPr/>
+        </p:nvSpPr>
+        <p:spPr>
+          <a:xfrm>
+            <a:off x="7576947" y="4169664"/>
+            <a:ext cx="685800" cy="475488"/>
+          </a:xfrm>
+          <a:prstGeom prst="rect">
+            <a:avLst>
+              <a:gd name="adj" fmla="val 7692"/>
+            </a:avLst>
+          </a:prstGeom>
+          <a:solidFill>
+            <a:srgbClr val="FFFFFF"/>
+          </a:solidFill>
+          <a:ln w="12700">
+            <a:solidFill>
+              <a:srgbClr val="DB2777"/>
+            </a:solidFill>
+            <a:prstDash val="solid"/>
+          </a:ln>
+        </p:spPr>
+      </p:sp>
+      <p:sp>
+        <p:nvSpPr>
+          <p:cNvPr id="49" name="Text 47"/>
+          <p:cNvSpPr/>
+          <p:nvPr/>
+        </p:nvSpPr>
+        <p:spPr>
+          <a:xfrm>
+            <a:off x="7576947" y="4169664"/>
+            <a:ext cx="685800" cy="475488"/>
+          </a:xfrm>
+          <a:prstGeom prst="rect">
+            <a:avLst/>
+          </a:prstGeom>
+          <a:noFill/>
+          <a:ln/>
+        </p:spPr>
+        <p:txBody>
+          <a:bodyPr wrap="square" lIns="0" tIns="0" rIns="0" bIns="0" rtlCol="0" anchor="ctr"/>
+          <a:lstStyle/>
+          <a:p>
+            <a:pPr algn="ctr" indent="0" marL="0">
+              <a:buNone/>
+            </a:pPr>
+            <a:r>
+              <a:rPr lang="en-US" sz="900" b="1" dirty="0">
+                <a:solidFill>
+                  <a:srgbClr val="9D174D"/>
+                </a:solidFill>
+                <a:latin typeface="Trebuchet MS" pitchFamily="34" charset="0"/>
+                <a:ea typeface="Trebuchet MS" pitchFamily="34" charset="-122"/>
+                <a:cs typeface="Trebuchet MS" pitchFamily="34" charset="-120"/>
+              </a:rPr>
+              <a:t>d</a:t>
+            </a:r>
+            <a:endParaRPr lang="en-US" sz="900" dirty="0"/>
           </a:p>
         </p:txBody>
       </p:sp>
@@ -26994,11 +27021,11 @@
         <p:spPr>
           <a:xfrm>
             <a:off x="1874520" y="4096512"/>
-            <a:ext cx="6903720" cy="804672"/>
+            <a:ext cx="6903720" cy="658368"/>
           </a:xfrm>
           <a:prstGeom prst="rect">
             <a:avLst>
-              <a:gd name="adj" fmla="val 6818"/>
+              <a:gd name="adj" fmla="val 8333"/>
             </a:avLst>
           </a:prstGeom>
           <a:solidFill>
@@ -27021,11 +27048,11 @@
         <p:spPr>
           <a:xfrm>
             <a:off x="2254649" y="4169664"/>
-            <a:ext cx="685800" cy="384048"/>
+            <a:ext cx="685800" cy="475488"/>
           </a:xfrm>
           <a:prstGeom prst="rect">
             <a:avLst>
-              <a:gd name="adj" fmla="val 9524"/>
+              <a:gd name="adj" fmla="val 7692"/>
             </a:avLst>
           </a:prstGeom>
           <a:solidFill>
@@ -27048,7 +27075,7 @@
         <p:spPr>
           <a:xfrm>
             <a:off x="2254649" y="4169664"/>
-            <a:ext cx="685800" cy="384048"/>
+            <a:ext cx="685800" cy="475488"/>
           </a:xfrm>
           <a:prstGeom prst="rect">
             <a:avLst/>
@@ -27087,11 +27114,11 @@
         <p:spPr>
           <a:xfrm>
             <a:off x="3293146" y="4169664"/>
-            <a:ext cx="685800" cy="384048"/>
+            <a:ext cx="685800" cy="475488"/>
           </a:xfrm>
           <a:prstGeom prst="rect">
             <a:avLst>
-              <a:gd name="adj" fmla="val 9524"/>
+              <a:gd name="adj" fmla="val 7692"/>
             </a:avLst>
           </a:prstGeom>
           <a:solidFill>
@@ -27114,7 +27141,7 @@
         <p:spPr>
           <a:xfrm>
             <a:off x="3293146" y="4169664"/>
-            <a:ext cx="685800" cy="384048"/>
+            <a:ext cx="685800" cy="475488"/>
           </a:xfrm>
           <a:prstGeom prst="rect">
             <a:avLst/>
@@ -27138,7 +27165,7 @@
                 <a:ea typeface="Trebuchet MS" pitchFamily="34" charset="-122"/>
                 <a:cs typeface="Trebuchet MS" pitchFamily="34" charset="-120"/>
               </a:rPr>
-              <a:t>e</a:t>
+              <a:t>ea</a:t>
             </a:r>
             <a:endParaRPr lang="en-US" sz="900" dirty="0"/>
           </a:p>
@@ -27153,11 +27180,11 @@
         <p:spPr>
           <a:xfrm>
             <a:off x="4331643" y="4169664"/>
-            <a:ext cx="685800" cy="384048"/>
+            <a:ext cx="685800" cy="475488"/>
           </a:xfrm>
           <a:prstGeom prst="rect">
             <a:avLst>
-              <a:gd name="adj" fmla="val 9524"/>
+              <a:gd name="adj" fmla="val 7692"/>
             </a:avLst>
           </a:prstGeom>
           <a:solidFill>
@@ -27180,7 +27207,7 @@
         <p:spPr>
           <a:xfrm>
             <a:off x="4331643" y="4169664"/>
-            <a:ext cx="685800" cy="384048"/>
+            <a:ext cx="685800" cy="475488"/>
           </a:xfrm>
           <a:prstGeom prst="rect">
             <a:avLst/>
@@ -27204,7 +27231,7 @@
                 <a:ea typeface="Trebuchet MS" pitchFamily="34" charset="-122"/>
                 <a:cs typeface="Trebuchet MS" pitchFamily="34" charset="-120"/>
               </a:rPr>
-              <a:t>a</a:t>
+              <a:t>s</a:t>
             </a:r>
             <a:endParaRPr lang="en-US" sz="900" dirty="0"/>
           </a:p>
@@ -27219,11 +27246,11 @@
         <p:spPr>
           <a:xfrm>
             <a:off x="5370141" y="4169664"/>
-            <a:ext cx="685800" cy="384048"/>
+            <a:ext cx="685800" cy="475488"/>
           </a:xfrm>
           <a:prstGeom prst="rect">
             <a:avLst>
-              <a:gd name="adj" fmla="val 9524"/>
+              <a:gd name="adj" fmla="val 7692"/>
             </a:avLst>
           </a:prstGeom>
           <a:solidFill>
@@ -27246,7 +27273,7 @@
         <p:spPr>
           <a:xfrm>
             <a:off x="5370141" y="4169664"/>
-            <a:ext cx="685800" cy="384048"/>
+            <a:ext cx="685800" cy="475488"/>
           </a:xfrm>
           <a:prstGeom prst="rect">
             <a:avLst/>
@@ -27270,7 +27297,7 @@
                 <a:ea typeface="Trebuchet MS" pitchFamily="34" charset="-122"/>
                 <a:cs typeface="Trebuchet MS" pitchFamily="34" charset="-120"/>
               </a:rPr>
-              <a:t>s</a:t>
+              <a:t>k</a:t>
             </a:r>
             <a:endParaRPr lang="en-US" sz="900" dirty="0"/>
           </a:p>
@@ -27285,11 +27312,11 @@
         <p:spPr>
           <a:xfrm>
             <a:off x="6408638" y="4169664"/>
-            <a:ext cx="685800" cy="384048"/>
+            <a:ext cx="685800" cy="475488"/>
           </a:xfrm>
           <a:prstGeom prst="rect">
             <a:avLst>
-              <a:gd name="adj" fmla="val 9524"/>
+              <a:gd name="adj" fmla="val 7692"/>
             </a:avLst>
           </a:prstGeom>
           <a:solidFill>
@@ -27312,7 +27339,7 @@
         <p:spPr>
           <a:xfrm>
             <a:off x="6408638" y="4169664"/>
-            <a:ext cx="685800" cy="384048"/>
+            <a:ext cx="685800" cy="475488"/>
           </a:xfrm>
           <a:prstGeom prst="rect">
             <a:avLst/>
@@ -27336,7 +27363,7 @@
                 <a:ea typeface="Trebuchet MS" pitchFamily="34" charset="-122"/>
                 <a:cs typeface="Trebuchet MS" pitchFamily="34" charset="-120"/>
               </a:rPr>
-              <a:t>k</a:t>
+              <a:t>e</a:t>
             </a:r>
             <a:endParaRPr lang="en-US" sz="900" dirty="0"/>
           </a:p>
@@ -27351,11 +27378,11 @@
         <p:spPr>
           <a:xfrm>
             <a:off x="7447135" y="4169664"/>
-            <a:ext cx="685800" cy="384048"/>
+            <a:ext cx="685800" cy="475488"/>
           </a:xfrm>
           <a:prstGeom prst="rect">
             <a:avLst>
-              <a:gd name="adj" fmla="val 9524"/>
+              <a:gd name="adj" fmla="val 7692"/>
             </a:avLst>
           </a:prstGeom>
           <a:solidFill>
@@ -27378,7 +27405,7 @@
         <p:spPr>
           <a:xfrm>
             <a:off x="7447135" y="4169664"/>
-            <a:ext cx="685800" cy="384048"/>
+            <a:ext cx="685800" cy="475488"/>
           </a:xfrm>
           <a:prstGeom prst="rect">
             <a:avLst/>
@@ -27402,48 +27429,9 @@
                 <a:ea typeface="Trebuchet MS" pitchFamily="34" charset="-122"/>
                 <a:cs typeface="Trebuchet MS" pitchFamily="34" charset="-120"/>
               </a:rPr>
-              <a:t>t</a:t>
+              <a:t>d</a:t>
             </a:r>
             <a:endParaRPr lang="en-US" sz="900" dirty="0"/>
-          </a:p>
-        </p:txBody>
-      </p:sp>
-      <p:sp>
-        <p:nvSpPr>
-          <p:cNvPr id="48" name="Text 46"/>
-          <p:cNvSpPr/>
-          <p:nvPr/>
-        </p:nvSpPr>
-        <p:spPr>
-          <a:xfrm>
-            <a:off x="7447135" y="4572000"/>
-            <a:ext cx="685800" cy="219456"/>
-          </a:xfrm>
-          <a:prstGeom prst="rect">
-            <a:avLst/>
-          </a:prstGeom>
-          <a:noFill/>
-          <a:ln/>
-        </p:spPr>
-        <p:txBody>
-          <a:bodyPr wrap="square" lIns="0" tIns="0" rIns="0" bIns="0" rtlCol="0" anchor="t"/>
-          <a:lstStyle/>
-          <a:p>
-            <a:pPr algn="ctr" indent="0" marL="0">
-              <a:buNone/>
-            </a:pPr>
-            <a:r>
-              <a:rPr lang="en-US" sz="750" i="1" dirty="0">
-                <a:solidFill>
-                  <a:srgbClr val="94A3B8"/>
-                </a:solidFill>
-                <a:latin typeface="Calibri" pitchFamily="34" charset="0"/>
-                <a:ea typeface="Calibri" pitchFamily="34" charset="-122"/>
-                <a:cs typeface="Calibri" pitchFamily="34" charset="-120"/>
-              </a:rPr>
-              <a:t>/t/</a:t>
-            </a:r>
-            <a:endParaRPr lang="en-US" sz="750" dirty="0"/>
           </a:p>
         </p:txBody>
       </p:sp>
@@ -31982,11 +31970,11 @@
         <p:spPr>
           <a:xfrm>
             <a:off x="1874520" y="4096512"/>
-            <a:ext cx="6903720" cy="804672"/>
+            <a:ext cx="6903720" cy="658368"/>
           </a:xfrm>
           <a:prstGeom prst="rect">
             <a:avLst>
-              <a:gd name="adj" fmla="val 6818"/>
+              <a:gd name="adj" fmla="val 8333"/>
             </a:avLst>
           </a:prstGeom>
           <a:solidFill>
@@ -32008,12 +31996,12 @@
         </p:nvSpPr>
         <p:spPr>
           <a:xfrm>
-            <a:off x="2124837" y="4169664"/>
-            <a:ext cx="685800" cy="384048"/>
+            <a:off x="2023872" y="4169664"/>
+            <a:ext cx="685800" cy="475488"/>
           </a:xfrm>
           <a:prstGeom prst="rect">
             <a:avLst>
-              <a:gd name="adj" fmla="val 9524"/>
+              <a:gd name="adj" fmla="val 7692"/>
             </a:avLst>
           </a:prstGeom>
           <a:solidFill>
@@ -32035,8 +32023,8 @@
         </p:nvSpPr>
         <p:spPr>
           <a:xfrm>
-            <a:off x="2124837" y="4169664"/>
-            <a:ext cx="685800" cy="384048"/>
+            <a:off x="2023872" y="4169664"/>
+            <a:ext cx="685800" cy="475488"/>
           </a:xfrm>
           <a:prstGeom prst="rect">
             <a:avLst/>
@@ -32074,12 +32062,12 @@
         </p:nvSpPr>
         <p:spPr>
           <a:xfrm>
-            <a:off x="3033522" y="4169664"/>
-            <a:ext cx="685800" cy="384048"/>
+            <a:off x="2831592" y="4169664"/>
+            <a:ext cx="685800" cy="475488"/>
           </a:xfrm>
           <a:prstGeom prst="rect">
             <a:avLst>
-              <a:gd name="adj" fmla="val 9524"/>
+              <a:gd name="adj" fmla="val 7692"/>
             </a:avLst>
           </a:prstGeom>
           <a:solidFill>
@@ -32101,8 +32089,8 @@
         </p:nvSpPr>
         <p:spPr>
           <a:xfrm>
-            <a:off x="3033522" y="4169664"/>
-            <a:ext cx="685800" cy="384048"/>
+            <a:off x="2831592" y="4169664"/>
+            <a:ext cx="685800" cy="475488"/>
           </a:xfrm>
           <a:prstGeom prst="rect">
             <a:avLst/>
@@ -32140,12 +32128,12 @@
         </p:nvSpPr>
         <p:spPr>
           <a:xfrm>
-            <a:off x="3942207" y="4169664"/>
-            <a:ext cx="685800" cy="384048"/>
+            <a:off x="3639312" y="4169664"/>
+            <a:ext cx="685800" cy="475488"/>
           </a:xfrm>
           <a:prstGeom prst="rect">
             <a:avLst>
-              <a:gd name="adj" fmla="val 9524"/>
+              <a:gd name="adj" fmla="val 7692"/>
             </a:avLst>
           </a:prstGeom>
           <a:solidFill>
@@ -32167,8 +32155,8 @@
         </p:nvSpPr>
         <p:spPr>
           <a:xfrm>
-            <a:off x="3942207" y="4169664"/>
-            <a:ext cx="685800" cy="384048"/>
+            <a:off x="3639312" y="4169664"/>
+            <a:ext cx="685800" cy="475488"/>
           </a:xfrm>
           <a:prstGeom prst="rect">
             <a:avLst/>
@@ -32206,12 +32194,12 @@
         </p:nvSpPr>
         <p:spPr>
           <a:xfrm>
-            <a:off x="4850892" y="4169664"/>
-            <a:ext cx="685800" cy="384048"/>
+            <a:off x="4447032" y="4169664"/>
+            <a:ext cx="685800" cy="475488"/>
           </a:xfrm>
           <a:prstGeom prst="rect">
             <a:avLst>
-              <a:gd name="adj" fmla="val 9524"/>
+              <a:gd name="adj" fmla="val 7692"/>
             </a:avLst>
           </a:prstGeom>
           <a:solidFill>
@@ -32233,8 +32221,8 @@
         </p:nvSpPr>
         <p:spPr>
           <a:xfrm>
-            <a:off x="4850892" y="4169664"/>
-            <a:ext cx="685800" cy="384048"/>
+            <a:off x="4447032" y="4169664"/>
+            <a:ext cx="685800" cy="475488"/>
           </a:xfrm>
           <a:prstGeom prst="rect">
             <a:avLst/>
@@ -32272,12 +32260,12 @@
         </p:nvSpPr>
         <p:spPr>
           <a:xfrm>
-            <a:off x="5759577" y="4169664"/>
-            <a:ext cx="685800" cy="384048"/>
+            <a:off x="5254752" y="4169664"/>
+            <a:ext cx="685800" cy="475488"/>
           </a:xfrm>
           <a:prstGeom prst="rect">
             <a:avLst>
-              <a:gd name="adj" fmla="val 9524"/>
+              <a:gd name="adj" fmla="val 7692"/>
             </a:avLst>
           </a:prstGeom>
           <a:solidFill>
@@ -32299,8 +32287,8 @@
         </p:nvSpPr>
         <p:spPr>
           <a:xfrm>
-            <a:off x="5759577" y="4169664"/>
-            <a:ext cx="685800" cy="384048"/>
+            <a:off x="5254752" y="4169664"/>
+            <a:ext cx="685800" cy="475488"/>
           </a:xfrm>
           <a:prstGeom prst="rect">
             <a:avLst/>
@@ -32338,12 +32326,12 @@
         </p:nvSpPr>
         <p:spPr>
           <a:xfrm>
-            <a:off x="6668262" y="4169664"/>
-            <a:ext cx="685800" cy="384048"/>
+            <a:off x="6062472" y="4169664"/>
+            <a:ext cx="685800" cy="475488"/>
           </a:xfrm>
           <a:prstGeom prst="rect">
             <a:avLst>
-              <a:gd name="adj" fmla="val 9524"/>
+              <a:gd name="adj" fmla="val 7692"/>
             </a:avLst>
           </a:prstGeom>
           <a:solidFill>
@@ -32365,8 +32353,8 @@
         </p:nvSpPr>
         <p:spPr>
           <a:xfrm>
-            <a:off x="6668262" y="4169664"/>
-            <a:ext cx="685800" cy="384048"/>
+            <a:off x="6062472" y="4169664"/>
+            <a:ext cx="685800" cy="475488"/>
           </a:xfrm>
           <a:prstGeom prst="rect">
             <a:avLst/>
@@ -32404,12 +32392,12 @@
         </p:nvSpPr>
         <p:spPr>
           <a:xfrm>
-            <a:off x="7576947" y="4169664"/>
-            <a:ext cx="685800" cy="384048"/>
+            <a:off x="6870192" y="4169664"/>
+            <a:ext cx="685800" cy="475488"/>
           </a:xfrm>
           <a:prstGeom prst="rect">
             <a:avLst>
-              <a:gd name="adj" fmla="val 9524"/>
+              <a:gd name="adj" fmla="val 7692"/>
             </a:avLst>
           </a:prstGeom>
           <a:solidFill>
@@ -32431,8 +32419,8 @@
         </p:nvSpPr>
         <p:spPr>
           <a:xfrm>
-            <a:off x="7576947" y="4169664"/>
-            <a:ext cx="685800" cy="384048"/>
+            <a:off x="6870192" y="4169664"/>
+            <a:ext cx="685800" cy="475488"/>
           </a:xfrm>
           <a:prstGeom prst="rect">
             <a:avLst/>
@@ -32456,7 +32444,7 @@
                 <a:ea typeface="Trebuchet MS" pitchFamily="34" charset="-122"/>
                 <a:cs typeface="Trebuchet MS" pitchFamily="34" charset="-120"/>
               </a:rPr>
-              <a:t>t</a:t>
+              <a:t>e</a:t>
             </a:r>
             <a:endParaRPr lang="en-US" sz="900" dirty="0"/>
           </a:p>
@@ -32464,40 +32452,67 @@
       </p:sp>
       <p:sp>
         <p:nvSpPr>
-          <p:cNvPr id="53" name="Text 51"/>
-          <p:cNvSpPr/>
-          <p:nvPr/>
-        </p:nvSpPr>
-        <p:spPr>
-          <a:xfrm>
-            <a:off x="7576947" y="4572000"/>
-            <a:ext cx="685800" cy="219456"/>
-          </a:xfrm>
-          <a:prstGeom prst="rect">
-            <a:avLst/>
-          </a:prstGeom>
-          <a:noFill/>
-          <a:ln/>
-        </p:spPr>
-        <p:txBody>
-          <a:bodyPr wrap="square" lIns="0" tIns="0" rIns="0" bIns="0" rtlCol="0" anchor="t"/>
-          <a:lstStyle/>
-          <a:p>
-            <a:pPr algn="ctr" indent="0" marL="0">
-              <a:buNone/>
-            </a:pPr>
-            <a:r>
-              <a:rPr lang="en-US" sz="750" i="1" dirty="0">
-                <a:solidFill>
-                  <a:srgbClr val="94A3B8"/>
-                </a:solidFill>
-                <a:latin typeface="Calibri" pitchFamily="34" charset="0"/>
-                <a:ea typeface="Calibri" pitchFamily="34" charset="-122"/>
-                <a:cs typeface="Calibri" pitchFamily="34" charset="-120"/>
-              </a:rPr>
-              <a:t>/t/</a:t>
-            </a:r>
-            <a:endParaRPr lang="en-US" sz="750" dirty="0"/>
+          <p:cNvPr id="53" name="Shape 51"/>
+          <p:cNvSpPr/>
+          <p:nvPr/>
+        </p:nvSpPr>
+        <p:spPr>
+          <a:xfrm>
+            <a:off x="7677912" y="4169664"/>
+            <a:ext cx="685800" cy="475488"/>
+          </a:xfrm>
+          <a:prstGeom prst="rect">
+            <a:avLst>
+              <a:gd name="adj" fmla="val 7692"/>
+            </a:avLst>
+          </a:prstGeom>
+          <a:solidFill>
+            <a:srgbClr val="FFFFFF"/>
+          </a:solidFill>
+          <a:ln w="12700">
+            <a:solidFill>
+              <a:srgbClr val="DB2777"/>
+            </a:solidFill>
+            <a:prstDash val="solid"/>
+          </a:ln>
+        </p:spPr>
+      </p:sp>
+      <p:sp>
+        <p:nvSpPr>
+          <p:cNvPr id="54" name="Text 52"/>
+          <p:cNvSpPr/>
+          <p:nvPr/>
+        </p:nvSpPr>
+        <p:spPr>
+          <a:xfrm>
+            <a:off x="7677912" y="4169664"/>
+            <a:ext cx="685800" cy="475488"/>
+          </a:xfrm>
+          <a:prstGeom prst="rect">
+            <a:avLst/>
+          </a:prstGeom>
+          <a:noFill/>
+          <a:ln/>
+        </p:spPr>
+        <p:txBody>
+          <a:bodyPr wrap="square" lIns="0" tIns="0" rIns="0" bIns="0" rtlCol="0" anchor="ctr"/>
+          <a:lstStyle/>
+          <a:p>
+            <a:pPr algn="ctr" indent="0" marL="0">
+              <a:buNone/>
+            </a:pPr>
+            <a:r>
+              <a:rPr lang="en-US" sz="900" b="1" dirty="0">
+                <a:solidFill>
+                  <a:srgbClr val="9D174D"/>
+                </a:solidFill>
+                <a:latin typeface="Trebuchet MS" pitchFamily="34" charset="0"/>
+                <a:ea typeface="Trebuchet MS" pitchFamily="34" charset="-122"/>
+                <a:cs typeface="Trebuchet MS" pitchFamily="34" charset="-120"/>
+              </a:rPr>
+              <a:t>d</a:t>
+            </a:r>
+            <a:endParaRPr lang="en-US" sz="900" dirty="0"/>
           </a:p>
         </p:txBody>
       </p:sp>
@@ -36752,7 +36767,7 @@
                 <a:ea typeface="Calibri" pitchFamily="34" charset="-122"/>
                 <a:cs typeface="Calibri" pitchFamily="34" charset="-120"/>
               </a:rPr>
-              <a:t>1.  The word 'asked' is formed by adding the suffix '-ed' to the root 'ask'.</a:t>
+              <a:t>1.  The word 'asking' contains the root 'ask' plus a suffix.</a:t>
             </a:r>
             <a:endParaRPr lang="en-US" sz="1300" dirty="0"/>
           </a:p>
@@ -37030,7 +37045,7 @@
                 <a:ea typeface="Calibri" pitchFamily="34" charset="-122"/>
                 <a:cs typeface="Calibri" pitchFamily="34" charset="-120"/>
               </a:rPr>
-              <a:t>3.  The word 'asking' contains the root 'ask' plus a suffix.</a:t>
+              <a:t>3.  The word 'asker' means a person who never speaks.</a:t>
             </a:r>
             <a:endParaRPr lang="en-US" sz="1300" dirty="0"/>
           </a:p>
@@ -37053,11 +37068,11 @@
             </a:avLst>
           </a:prstGeom>
           <a:solidFill>
-            <a:srgbClr val="DCFCE7"/>
-          </a:solidFill>
-          <a:ln w="12700">
-            <a:solidFill>
-              <a:srgbClr val="16A34A"/>
+            <a:srgbClr val="FEE2E2"/>
+          </a:solidFill>
+          <a:ln w="12700">
+            <a:solidFill>
+              <a:srgbClr val="DC2626"/>
             </a:solidFill>
             <a:prstDash val="solid"/>
           </a:ln>
@@ -37090,13 +37105,13 @@
             <a:r>
               <a:rPr lang="en-US" sz="1100" b="1" dirty="0">
                 <a:solidFill>
-                  <a:srgbClr val="16A34A"/>
+                  <a:srgbClr val="DC2626"/>
                 </a:solidFill>
                 <a:latin typeface="Trebuchet MS" pitchFamily="34" charset="0"/>
                 <a:ea typeface="Trebuchet MS" pitchFamily="34" charset="-122"/>
                 <a:cs typeface="Trebuchet MS" pitchFamily="34" charset="-120"/>
               </a:rPr>
-              <a:t>TRUE</a:t>
+              <a:t>FALSE</a:t>
             </a:r>
             <a:endParaRPr lang="en-US" sz="1100" dirty="0"/>
           </a:p>
@@ -37308,7 +37323,7 @@
                 <a:ea typeface="Calibri" pitchFamily="34" charset="-122"/>
                 <a:cs typeface="Calibri" pitchFamily="34" charset="-120"/>
               </a:rPr>
-              <a:t>5.  The word 'asker' means a person who never speaks.</a:t>
+              <a:t>5.  The word 'asked' is formed by adding the suffix '-ed' to the root 'ask'.</a:t>
             </a:r>
             <a:endParaRPr lang="en-US" sz="1300" dirty="0"/>
           </a:p>
@@ -37331,11 +37346,11 @@
             </a:avLst>
           </a:prstGeom>
           <a:solidFill>
-            <a:srgbClr val="FEE2E2"/>
-          </a:solidFill>
-          <a:ln w="12700">
-            <a:solidFill>
-              <a:srgbClr val="DC2626"/>
+            <a:srgbClr val="DCFCE7"/>
+          </a:solidFill>
+          <a:ln w="12700">
+            <a:solidFill>
+              <a:srgbClr val="16A34A"/>
             </a:solidFill>
             <a:prstDash val="solid"/>
           </a:ln>
@@ -37368,13 +37383,13 @@
             <a:r>
               <a:rPr lang="en-US" sz="1100" b="1" dirty="0">
                 <a:solidFill>
-                  <a:srgbClr val="DC2626"/>
+                  <a:srgbClr val="16A34A"/>
                 </a:solidFill>
                 <a:latin typeface="Trebuchet MS" pitchFamily="34" charset="0"/>
                 <a:ea typeface="Trebuchet MS" pitchFamily="34" charset="-122"/>
                 <a:cs typeface="Trebuchet MS" pitchFamily="34" charset="-120"/>
               </a:rPr>
-              <a:t>FALSE</a:t>
+              <a:t>TRUE</a:t>
             </a:r>
             <a:endParaRPr lang="en-US" sz="1100" dirty="0"/>
           </a:p>
